--- a/clients/oceanides/company-profile/output/pptx/Oceanides-Company-Profile-final.pptx
+++ b/clients/oceanides/company-profile/output/pptx/Oceanides-Company-Profile-final.pptx
@@ -2,18 +2,18 @@
 <file path=ppt/presentation.xml><?xml version="1.0" encoding="utf-8"?>
 <p:presentation xmlns:p="http://schemas.openxmlformats.org/presentationml/2006/main">
   <p:sldMasterIdLst>
-    <p:sldMasterId xmlns:r="http://schemas.openxmlformats.org/officeDocument/2006/relationships" id="2147483648" r:id="Ra8643957f4044335"/>
+    <p:sldMasterId xmlns:r="http://schemas.openxmlformats.org/officeDocument/2006/relationships" id="2147483648" r:id="Rb33847ddd717447f"/>
   </p:sldMasterIdLst>
   <p:notesMasterIdLst>
-    <p:notesMasterId xmlns:r="http://schemas.openxmlformats.org/officeDocument/2006/relationships" r:id="R76e7274c13384688"/>
+    <p:notesMasterId xmlns:r="http://schemas.openxmlformats.org/officeDocument/2006/relationships" r:id="R9189071e23044e1f"/>
   </p:notesMasterIdLst>
   <p:sldIdLst>
-    <p:sldId xmlns:r="http://schemas.openxmlformats.org/officeDocument/2006/relationships" id="256" r:id="R427a74fde29b4376"/>
-    <p:sldId xmlns:r="http://schemas.openxmlformats.org/officeDocument/2006/relationships" id="257" r:id="R7bbb23f8bf214d52"/>
-    <p:sldId xmlns:r="http://schemas.openxmlformats.org/officeDocument/2006/relationships" id="258" r:id="Rea940cd738234aa8"/>
-    <p:sldId xmlns:r="http://schemas.openxmlformats.org/officeDocument/2006/relationships" id="259" r:id="Re01baca6068143ca"/>
-    <p:sldId xmlns:r="http://schemas.openxmlformats.org/officeDocument/2006/relationships" id="260" r:id="R81a032bae2ba48c7"/>
-    <p:sldId xmlns:r="http://schemas.openxmlformats.org/officeDocument/2006/relationships" id="261" r:id="R5fb2fc1e3f46453a"/>
+    <p:sldId xmlns:r="http://schemas.openxmlformats.org/officeDocument/2006/relationships" id="256" r:id="Rc345c8ea6f0945a0"/>
+    <p:sldId xmlns:r="http://schemas.openxmlformats.org/officeDocument/2006/relationships" id="257" r:id="Re534c8d6e825481a"/>
+    <p:sldId xmlns:r="http://schemas.openxmlformats.org/officeDocument/2006/relationships" id="258" r:id="Rca3f2cf381264992"/>
+    <p:sldId xmlns:r="http://schemas.openxmlformats.org/officeDocument/2006/relationships" id="259" r:id="Rcf1d1b4df91a4f5e"/>
+    <p:sldId xmlns:r="http://schemas.openxmlformats.org/officeDocument/2006/relationships" id="260" r:id="R6f9a0303d83643a6"/>
+    <p:sldId xmlns:r="http://schemas.openxmlformats.org/officeDocument/2006/relationships" id="261" r:id="R94efd3bdc3d44a2c"/>
   </p:sldIdLst>
   <p:sldSz cx="7562850" cy="10696575"/>
   <p:notesSz cx="6858000" cy="9144000"/>
@@ -477,7 +477,7 @@
           </a:p>
           <a:p xmlns:a="http://schemas.openxmlformats.org/drawingml/2006/main">
             <a:r>
-              <a:t>Cover vehicle: clients/oceanides/assets/tb2-truck-street.png, approved real vehicle source in client design/asset records.Matched cover pair: clients/oceanides/assets/tb2-ba3-before.png and tb2-ba3-after.png, confirmed real job photos in the same asset-builder records.</a:t>
+              <a:t>Cover: AI-generated conceptual property cutaway, not a real project or engineering plan. Exact generation brief: company-profile/assets/generated-sources.json.</a:t>
             </a:r>
           </a:p>
         </p:txBody>
@@ -577,7 +577,7 @@
           </a:p>
           <a:p xmlns:a="http://schemas.openxmlformats.org/drawingml/2006/main">
             <a:r>
-              <a:t/>
+              <a:t>Vehicle: clients/oceanides/assets/tb2-truck-street.png, approved actual source in client design/asset records.</a:t>
             </a:r>
           </a:p>
         </p:txBody>
@@ -677,7 +677,7 @@
           </a:p>
           <a:p xmlns:a="http://schemas.openxmlformats.org/drawingml/2006/main">
             <a:r>
-              <a:t>Matched before/after pair: clients/oceanides/assets/tb2-ba2-before.png and tb2-ba2-after.png. Neil confirmed real job photos on 2026-08-01; see client DESIGN.md and asset-builder source.</a:t>
+              <a:t>Matched before/after pair: clients/oceanides/assets/tb2-ba2-before.png and tb2-ba2-after.png. Neil confirmed real job photos on 2026-08-01; see client DESIGN.md and asset-builder source.Service scene: AI-generated fictional specialist, visibly labeled. Not an actual Oceanides employee or completed project. Exact generation brief: company-profile/assets/generated-sources.json.</a:t>
             </a:r>
           </a:p>
         </p:txBody>
@@ -777,7 +777,7 @@
           </a:p>
           <a:p xmlns:a="http://schemas.openxmlformats.org/drawingml/2006/main">
             <a:r>
-              <a:t>Illustrative interior: Max Vakhtbovych, Pexels https://www.pexels.com/photo/an-interior-of-a-living-room-8089170/ . Not a completed Oceanides project.</a:t>
+              <a:t>Service scene: AI-generated fictional specialist, visibly labeled. Not an actual Oceanides employee or completed project. Exact generation brief: company-profile/assets/generated-sources.json.</a:t>
             </a:r>
           </a:p>
         </p:txBody>
@@ -877,7 +877,7 @@
           </a:p>
           <a:p xmlns:a="http://schemas.openxmlformats.org/drawingml/2006/main">
             <a:r>
-              <a:t>Illustrative pest: Jari Lobo, Pexels https://www.pexels.com/photo/close-up-of-cockroach-19294665/ .</a:t>
+              <a:t>Service scene: AI-generated fictional specialist, visibly labeled. Not an actual Oceanides employee or completed project. Exact generation brief: company-profile/assets/generated-sources.json.</a:t>
             </a:r>
           </a:p>
         </p:txBody>
@@ -1045,7 +1045,7 @@
   </p:cSld>
   <p:clrMap bg1="lt1" tx1="dk1" bg2="lt2" tx2="dk2" accent1="accent1" accent2="accent2" accent3="accent3" accent4="accent4" accent5="accent5" accent6="accent6" hlink="hlink" folHlink="folHlink"/>
   <p:sldLayoutIdLst>
-    <p:sldLayoutId xmlns:r="http://schemas.openxmlformats.org/officeDocument/2006/relationships" id="2147483649" r:id="R1804631751f64f9f"/>
+    <p:sldLayoutId xmlns:r="http://schemas.openxmlformats.org/officeDocument/2006/relationships" id="2147483649" r:id="Rfa03c62a963549a4"/>
   </p:sldLayoutIdLst>
   <p:txStyles>
     <p:titleStyle>
@@ -1593,20 +1593,20 @@
       </p:grpSpPr>
       <p:pic>
         <p:nvPicPr>
-          <p:cNvPr id="21" name=""/>
+          <p:cNvPr id="19" name=""/>
           <p:cNvPicPr>
             <a:picLocks xmlns:a="http://schemas.openxmlformats.org/drawingml/2006/main" noChangeAspect="1"/>
           </p:cNvPicPr>
           <p:nvPr/>
         </p:nvPicPr>
         <p:blipFill>
-          <a:blip xmlns:r="http://schemas.openxmlformats.org/officeDocument/2006/relationships" xmlns:a="http://schemas.openxmlformats.org/drawingml/2006/main" r:embed="R11211e8eeff4491a"/>
+          <a:blip xmlns:r="http://schemas.openxmlformats.org/officeDocument/2006/relationships" xmlns:a="http://schemas.openxmlformats.org/drawingml/2006/main" r:embed="R1fa473c69cca43ee"/>
           <a:stretch xmlns:a="http://schemas.openxmlformats.org/drawingml/2006/main"/>
         </p:blipFill>
         <p:spPr>
           <a:xfrm xmlns:a="http://schemas.openxmlformats.org/drawingml/2006/main">
-            <a:off x="295275" y="247650"/>
-            <a:ext cx="1476375" cy="1476375"/>
+            <a:off x="361950" y="228600"/>
+            <a:ext cx="1143000" cy="1143000"/>
           </a:xfrm>
           <a:prstGeom xmlns:a="http://schemas.openxmlformats.org/drawingml/2006/main" prst="rect">
             <a:avLst/>
@@ -1618,36 +1618,36 @@
           <p:cNvPr id="2" name="profile-1">
             <a:extLst xmlns:a="http://schemas.openxmlformats.org/drawingml/2006/main">
               <a:ext uri="{FF2B5EF4-FFF2-40B4-BE49-F238E27FC236}">
-                <a16:creationId xmlns:a16="http://schemas.microsoft.com/office/drawing/2014/main" id="{DF346A69-3FCE-4435-AA9A-B06098A9C05C}"/>
-              </a:ext>
-            </a:extLst>
-          </p:cNvPr>
-          <p:cNvSpPr>
-            <a:spLocks xmlns:a="http://schemas.openxmlformats.org/drawingml/2006/main" noGrp="1"/>
-          </p:cNvSpPr>
-          <p:nvPr/>
-        </p:nvSpPr>
-        <p:spPr>
-          <a:xfrm xmlns:a="http://schemas.openxmlformats.org/drawingml/2006/main">
-            <a:off x="2057400" y="352425"/>
-            <a:ext cx="5143500" cy="848678"/>
-          </a:xfrm>
-          <a:prstGeom xmlns:a="http://schemas.openxmlformats.org/drawingml/2006/main" prst="rect">
-            <a:avLst/>
-          </a:prstGeom>
-          <a:noFill xmlns:a="http://schemas.openxmlformats.org/drawingml/2006/main"/>
-          <a:ln xmlns:a="http://schemas.openxmlformats.org/drawingml/2006/main" w="0">
-            <a:noFill/>
-          </a:ln>
-        </p:spPr>
-        <p:txBody>
-          <a:bodyPr xmlns:a="http://schemas.openxmlformats.org/drawingml/2006/main" wrap="none" lIns="0" tIns="0" rIns="0" bIns="0" anchor="t">
-            <a:noAutofit/>
-          </a:bodyPr>
-          <a:lstStyle xmlns:a="http://schemas.openxmlformats.org/drawingml/2006/main"/>
-          <a:p xmlns:a="http://schemas.openxmlformats.org/drawingml/2006/main">
-            <a:pPr algn="l">
-              <a:defRPr sz="5025" b="1">
+                <a16:creationId xmlns:a16="http://schemas.microsoft.com/office/drawing/2014/main" id="{2731B405-3CE9-4A9C-88E1-5688BEBF7681}"/>
+              </a:ext>
+            </a:extLst>
+          </p:cNvPr>
+          <p:cNvSpPr>
+            <a:spLocks xmlns:a="http://schemas.openxmlformats.org/drawingml/2006/main" noGrp="1"/>
+          </p:cNvSpPr>
+          <p:nvPr/>
+        </p:nvSpPr>
+        <p:spPr>
+          <a:xfrm xmlns:a="http://schemas.openxmlformats.org/drawingml/2006/main">
+            <a:off x="1866900" y="314325"/>
+            <a:ext cx="5334000" cy="786765"/>
+          </a:xfrm>
+          <a:prstGeom xmlns:a="http://schemas.openxmlformats.org/drawingml/2006/main" prst="rect">
+            <a:avLst/>
+          </a:prstGeom>
+          <a:noFill xmlns:a="http://schemas.openxmlformats.org/drawingml/2006/main"/>
+          <a:ln xmlns:a="http://schemas.openxmlformats.org/drawingml/2006/main" w="0">
+            <a:noFill/>
+          </a:ln>
+        </p:spPr>
+        <p:txBody>
+          <a:bodyPr xmlns:a="http://schemas.openxmlformats.org/drawingml/2006/main" wrap="none" lIns="0" tIns="0" rIns="0" bIns="0" anchor="t">
+            <a:noAutofit/>
+          </a:bodyPr>
+          <a:lstStyle xmlns:a="http://schemas.openxmlformats.org/drawingml/2006/main"/>
+          <a:p xmlns:a="http://schemas.openxmlformats.org/drawingml/2006/main">
+            <a:pPr algn="l">
+              <a:defRPr sz="4650" b="1">
                 <a:solidFill>
                   <a:srgbClr val="FFFFFF"/>
                 </a:solidFill>
@@ -1657,7 +1657,7 @@
               </a:defRPr>
             </a:pPr>
             <a:r>
-              <a:rPr sz="5025" b="1">
+              <a:rPr sz="4650" b="1">
                 <a:solidFill>
                   <a:srgbClr val="FFFFFF"/>
                 </a:solidFill>
@@ -1675,36 +1675,36 @@
           <p:cNvPr id="3" name="profile-2">
             <a:extLst xmlns:a="http://schemas.openxmlformats.org/drawingml/2006/main">
               <a:ext uri="{FF2B5EF4-FFF2-40B4-BE49-F238E27FC236}">
-                <a16:creationId xmlns:a16="http://schemas.microsoft.com/office/drawing/2014/main" id="{DD6F6BD5-EF93-4736-9E06-40EEF0F3B8F0}"/>
-              </a:ext>
-            </a:extLst>
-          </p:cNvPr>
-          <p:cNvSpPr>
-            <a:spLocks xmlns:a="http://schemas.openxmlformats.org/drawingml/2006/main" noGrp="1"/>
-          </p:cNvSpPr>
-          <p:nvPr/>
-        </p:nvSpPr>
-        <p:spPr>
-          <a:xfrm xmlns:a="http://schemas.openxmlformats.org/drawingml/2006/main">
-            <a:off x="2076450" y="1143000"/>
-            <a:ext cx="5143500" cy="257175"/>
-          </a:xfrm>
-          <a:prstGeom xmlns:a="http://schemas.openxmlformats.org/drawingml/2006/main" prst="rect">
-            <a:avLst/>
-          </a:prstGeom>
-          <a:noFill xmlns:a="http://schemas.openxmlformats.org/drawingml/2006/main"/>
-          <a:ln xmlns:a="http://schemas.openxmlformats.org/drawingml/2006/main" w="0">
-            <a:noFill/>
-          </a:ln>
-        </p:spPr>
-        <p:txBody>
-          <a:bodyPr xmlns:a="http://schemas.openxmlformats.org/drawingml/2006/main" wrap="none" lIns="0" tIns="0" rIns="0" bIns="0" anchor="t">
-            <a:noAutofit/>
-          </a:bodyPr>
-          <a:lstStyle xmlns:a="http://schemas.openxmlformats.org/drawingml/2006/main"/>
-          <a:p xmlns:a="http://schemas.openxmlformats.org/drawingml/2006/main">
-            <a:pPr algn="l">
-              <a:defRPr sz="1350" b="0">
+                <a16:creationId xmlns:a16="http://schemas.microsoft.com/office/drawing/2014/main" id="{1598FEF5-8CF0-4346-977A-7E65882AFF60}"/>
+              </a:ext>
+            </a:extLst>
+          </p:cNvPr>
+          <p:cNvSpPr>
+            <a:spLocks xmlns:a="http://schemas.openxmlformats.org/drawingml/2006/main" noGrp="1"/>
+          </p:cNvSpPr>
+          <p:nvPr/>
+        </p:nvSpPr>
+        <p:spPr>
+          <a:xfrm xmlns:a="http://schemas.openxmlformats.org/drawingml/2006/main">
+            <a:off x="1885950" y="1057275"/>
+            <a:ext cx="5267325" cy="219075"/>
+          </a:xfrm>
+          <a:prstGeom xmlns:a="http://schemas.openxmlformats.org/drawingml/2006/main" prst="rect">
+            <a:avLst/>
+          </a:prstGeom>
+          <a:noFill xmlns:a="http://schemas.openxmlformats.org/drawingml/2006/main"/>
+          <a:ln xmlns:a="http://schemas.openxmlformats.org/drawingml/2006/main" w="0">
+            <a:noFill/>
+          </a:ln>
+        </p:spPr>
+        <p:txBody>
+          <a:bodyPr xmlns:a="http://schemas.openxmlformats.org/drawingml/2006/main" wrap="none" lIns="0" tIns="0" rIns="0" bIns="0" anchor="t">
+            <a:noAutofit/>
+          </a:bodyPr>
+          <a:lstStyle xmlns:a="http://schemas.openxmlformats.org/drawingml/2006/main"/>
+          <a:p xmlns:a="http://schemas.openxmlformats.org/drawingml/2006/main">
+            <a:pPr algn="l">
+              <a:defRPr sz="1125" b="0">
                 <a:solidFill>
                   <a:srgbClr val="DFE8F5"/>
                 </a:solidFill>
@@ -1714,7 +1714,7 @@
               </a:defRPr>
             </a:pPr>
             <a:r>
-              <a:rPr sz="1350" b="0">
+              <a:rPr sz="1125" b="0">
                 <a:solidFill>
                   <a:srgbClr val="DFE8F5"/>
                 </a:solidFill>
@@ -1722,87 +1722,30 @@
                 <a:ea typeface="Arial"/>
                 <a:cs typeface="Arial"/>
               </a:rPr>
-              <a:t>Plumbing Siphoning &amp;</a:t>
-            </a:r>
-          </a:p>
-        </p:txBody>
-      </p:sp>
-      <p:sp>
-        <p:nvSpPr>
-          <p:cNvPr id="4" name="profile-3">
-            <a:extLst xmlns:a="http://schemas.openxmlformats.org/drawingml/2006/main">
-              <a:ext uri="{FF2B5EF4-FFF2-40B4-BE49-F238E27FC236}">
-                <a16:creationId xmlns:a16="http://schemas.microsoft.com/office/drawing/2014/main" id="{1DB9E9D7-9ED2-4607-8578-2C88A59AE667}"/>
-              </a:ext>
-            </a:extLst>
-          </p:cNvPr>
-          <p:cNvSpPr>
-            <a:spLocks xmlns:a="http://schemas.openxmlformats.org/drawingml/2006/main" noGrp="1"/>
-          </p:cNvSpPr>
-          <p:nvPr/>
-        </p:nvSpPr>
-        <p:spPr>
-          <a:xfrm xmlns:a="http://schemas.openxmlformats.org/drawingml/2006/main">
-            <a:off x="2076450" y="1381125"/>
-            <a:ext cx="5143500" cy="257175"/>
-          </a:xfrm>
-          <a:prstGeom xmlns:a="http://schemas.openxmlformats.org/drawingml/2006/main" prst="rect">
-            <a:avLst/>
-          </a:prstGeom>
-          <a:noFill xmlns:a="http://schemas.openxmlformats.org/drawingml/2006/main"/>
-          <a:ln xmlns:a="http://schemas.openxmlformats.org/drawingml/2006/main" w="0">
-            <a:noFill/>
-          </a:ln>
-        </p:spPr>
-        <p:txBody>
-          <a:bodyPr xmlns:a="http://schemas.openxmlformats.org/drawingml/2006/main" wrap="none" lIns="0" tIns="0" rIns="0" bIns="0" anchor="t">
-            <a:noAutofit/>
-          </a:bodyPr>
-          <a:lstStyle xmlns:a="http://schemas.openxmlformats.org/drawingml/2006/main"/>
-          <a:p xmlns:a="http://schemas.openxmlformats.org/drawingml/2006/main">
-            <a:pPr algn="l">
-              <a:defRPr sz="1350" b="0">
-                <a:solidFill>
-                  <a:srgbClr val="DFE8F5"/>
-                </a:solidFill>
-                <a:latin typeface="Arial"/>
-                <a:ea typeface="Arial"/>
-                <a:cs typeface="Arial"/>
-              </a:defRPr>
-            </a:pPr>
-            <a:r>
-              <a:rPr sz="1350" b="0">
-                <a:solidFill>
-                  <a:srgbClr val="DFE8F5"/>
-                </a:solidFill>
-                <a:latin typeface="Arial"/>
-                <a:ea typeface="Arial"/>
-                <a:cs typeface="Arial"/>
-              </a:rPr>
-              <a:t>Pest Management Services OPC</a:t>
+              <a:t>Plumbing Siphoning &amp; Pest Management Services OPC</a:t>
             </a:r>
           </a:p>
         </p:txBody>
       </p:sp>
       <p:pic>
         <p:nvPicPr>
-          <p:cNvPr id="25" name=""/>
+          <p:cNvPr id="22" name=""/>
           <p:cNvPicPr>
             <a:picLocks xmlns:a="http://schemas.openxmlformats.org/drawingml/2006/main" noChangeAspect="1"/>
           </p:cNvPicPr>
           <p:nvPr/>
         </p:nvPicPr>
         <p:blipFill>
-          <a:blip xmlns:r="http://schemas.openxmlformats.org/officeDocument/2006/relationships" xmlns:a="http://schemas.openxmlformats.org/drawingml/2006/main" r:embed="R26b8a3f52f5b439d"/>
-          <a:srcRect xmlns:a="http://schemas.openxmlformats.org/drawingml/2006/main" l="0" t="9194" r="0" b="9194"/>
+          <a:blip xmlns:r="http://schemas.openxmlformats.org/officeDocument/2006/relationships" xmlns:a="http://schemas.openxmlformats.org/drawingml/2006/main" r:embed="R6b2e1cc3d3824836"/>
+          <a:srcRect xmlns:a="http://schemas.openxmlformats.org/drawingml/2006/main" l="0" t="1259" r="0" b="1259"/>
           <a:stretch xmlns:a="http://schemas.openxmlformats.org/drawingml/2006/main">
             <a:fillRect l="0" t="0" r="0" b="0"/>
           </a:stretch>
         </p:blipFill>
         <p:spPr>
           <a:xfrm xmlns:a="http://schemas.openxmlformats.org/drawingml/2006/main">
-            <a:off x="0" y="1895475"/>
-            <a:ext cx="7562850" cy="4114800"/>
+            <a:off x="0" y="1676400"/>
+            <a:ext cx="7562850" cy="4914900"/>
           </a:xfrm>
           <a:prstGeom xmlns:a="http://schemas.openxmlformats.org/drawingml/2006/main" prst="rect">
             <a:avLst/>
@@ -1811,83 +1754,94 @@
       </p:pic>
       <p:sp>
         <p:nvSpPr>
+          <p:cNvPr id="5" name="profile-3">
+            <a:extLst xmlns:a="http://schemas.openxmlformats.org/drawingml/2006/main">
+              <a:ext uri="{FF2B5EF4-FFF2-40B4-BE49-F238E27FC236}">
+                <a16:creationId xmlns:a16="http://schemas.microsoft.com/office/drawing/2014/main" id="{1C9D16EC-4212-474E-B454-3A749230C315}"/>
+              </a:ext>
+            </a:extLst>
+          </p:cNvPr>
+          <p:cNvSpPr>
+            <a:spLocks xmlns:a="http://schemas.openxmlformats.org/drawingml/2006/main" noGrp="1"/>
+          </p:cNvSpPr>
+          <p:nvPr/>
+        </p:nvSpPr>
+        <p:spPr>
+          <a:xfrm xmlns:a="http://schemas.openxmlformats.org/drawingml/2006/main">
+            <a:off x="419100" y="6715125"/>
+            <a:ext cx="6724650" cy="155258"/>
+          </a:xfrm>
+          <a:prstGeom xmlns:a="http://schemas.openxmlformats.org/drawingml/2006/main" prst="rect">
+            <a:avLst/>
+          </a:prstGeom>
+          <a:noFill xmlns:a="http://schemas.openxmlformats.org/drawingml/2006/main"/>
+          <a:ln xmlns:a="http://schemas.openxmlformats.org/drawingml/2006/main" w="0">
+            <a:noFill/>
+          </a:ln>
+        </p:spPr>
+        <p:txBody>
+          <a:bodyPr xmlns:a="http://schemas.openxmlformats.org/drawingml/2006/main" wrap="none" lIns="0" tIns="0" rIns="0" bIns="0" anchor="t">
+            <a:noAutofit/>
+          </a:bodyPr>
+          <a:lstStyle xmlns:a="http://schemas.openxmlformats.org/drawingml/2006/main"/>
+          <a:p xmlns:a="http://schemas.openxmlformats.org/drawingml/2006/main">
+            <a:pPr algn="l">
+              <a:defRPr sz="825" b="0">
+                <a:solidFill>
+                  <a:srgbClr val="8FB3DD"/>
+                </a:solidFill>
+                <a:latin typeface="Arial"/>
+                <a:ea typeface="Arial"/>
+                <a:cs typeface="Arial"/>
+              </a:defRPr>
+            </a:pPr>
+            <a:r>
+              <a:rPr sz="825" b="0">
+                <a:solidFill>
+                  <a:srgbClr val="8FB3DD"/>
+                </a:solidFill>
+                <a:latin typeface="Arial"/>
+                <a:ea typeface="Arial"/>
+                <a:cs typeface="Arial"/>
+              </a:rPr>
+              <a:t>AI-generated property-services concept</a:t>
+            </a:r>
+          </a:p>
+        </p:txBody>
+      </p:sp>
+      <p:sp>
+        <p:nvSpPr>
           <p:cNvPr id="6" name="profile-4">
             <a:extLst xmlns:a="http://schemas.openxmlformats.org/drawingml/2006/main">
               <a:ext uri="{FF2B5EF4-FFF2-40B4-BE49-F238E27FC236}">
-                <a16:creationId xmlns:a16="http://schemas.microsoft.com/office/drawing/2014/main" id="{A86ACCB9-89AB-49F5-91F4-DAB113B40ED6}"/>
-              </a:ext>
-            </a:extLst>
-          </p:cNvPr>
-          <p:cNvSpPr>
-            <a:spLocks xmlns:a="http://schemas.openxmlformats.org/drawingml/2006/main" noGrp="1"/>
-          </p:cNvSpPr>
-          <p:nvPr/>
-        </p:nvSpPr>
-        <p:spPr>
-          <a:xfrm xmlns:a="http://schemas.openxmlformats.org/drawingml/2006/main">
-            <a:off x="0" y="5076825"/>
-            <a:ext cx="7562850" cy="1543050"/>
+                <a16:creationId xmlns:a16="http://schemas.microsoft.com/office/drawing/2014/main" id="{2E1E9CF1-1476-4B3E-941A-74FF789C17F4}"/>
+              </a:ext>
+            </a:extLst>
+          </p:cNvPr>
+          <p:cNvSpPr>
+            <a:spLocks xmlns:a="http://schemas.openxmlformats.org/drawingml/2006/main" noGrp="1"/>
+          </p:cNvSpPr>
+          <p:nvPr/>
+        </p:nvSpPr>
+        <p:spPr>
+          <a:xfrm xmlns:a="http://schemas.openxmlformats.org/drawingml/2006/main">
+            <a:off x="0" y="7077075"/>
+            <a:ext cx="257175" cy="1952625"/>
           </a:xfrm>
           <a:custGeom xmlns:a="http://schemas.openxmlformats.org/drawingml/2006/main">
             <a:pathLst>
-              <a:path w="7562850" h="1543050">
+              <a:path w="257175" h="1952625">
                 <a:moveTo>
                   <a:pt x="0" y="0"/>
                 </a:moveTo>
                 <a:lnTo>
-                  <a:pt x="7562850" y="0"/>
+                  <a:pt x="257175" y="0"/>
                 </a:lnTo>
                 <a:lnTo>
-                  <a:pt x="7562850" y="952500"/>
+                  <a:pt x="257175" y="1809750"/>
                 </a:lnTo>
                 <a:lnTo>
-                  <a:pt x="0" y="1543050"/>
-                </a:lnTo>
-                <a:close/>
-              </a:path>
-            </a:pathLst>
-          </a:custGeom>
-          <a:solidFill xmlns:a="http://schemas.openxmlformats.org/drawingml/2006/main">
-            <a:srgbClr val="0A1F45"/>
-          </a:solidFill>
-          <a:ln xmlns:a="http://schemas.openxmlformats.org/drawingml/2006/main" w="0">
-            <a:noFill/>
-          </a:ln>
-        </p:spPr>
-      </p:sp>
-      <p:sp>
-        <p:nvSpPr>
-          <p:cNvPr id="7" name="profile-5">
-            <a:extLst xmlns:a="http://schemas.openxmlformats.org/drawingml/2006/main">
-              <a:ext uri="{FF2B5EF4-FFF2-40B4-BE49-F238E27FC236}">
-                <a16:creationId xmlns:a16="http://schemas.microsoft.com/office/drawing/2014/main" id="{C4A1B6AB-48D1-4D3B-ADFC-0FECD6633502}"/>
-              </a:ext>
-            </a:extLst>
-          </p:cNvPr>
-          <p:cNvSpPr>
-            <a:spLocks xmlns:a="http://schemas.openxmlformats.org/drawingml/2006/main" noGrp="1"/>
-          </p:cNvSpPr>
-          <p:nvPr/>
-        </p:nvSpPr>
-        <p:spPr>
-          <a:xfrm xmlns:a="http://schemas.openxmlformats.org/drawingml/2006/main">
-            <a:off x="0" y="5076825"/>
-            <a:ext cx="371475" cy="1543050"/>
-          </a:xfrm>
-          <a:custGeom xmlns:a="http://schemas.openxmlformats.org/drawingml/2006/main">
-            <a:pathLst>
-              <a:path w="371475" h="1543050">
-                <a:moveTo>
-                  <a:pt x="0" y="0"/>
-                </a:moveTo>
-                <a:lnTo>
-                  <a:pt x="371475" y="0"/>
-                </a:lnTo>
-                <a:lnTo>
-                  <a:pt x="371475" y="1485900"/>
-                </a:lnTo>
-                <a:lnTo>
-                  <a:pt x="0" y="1543050"/>
+                  <a:pt x="0" y="1952625"/>
                 </a:lnTo>
                 <a:close/>
               </a:path>
@@ -1903,39 +1857,39 @@
       </p:sp>
       <p:sp>
         <p:nvSpPr>
-          <p:cNvPr id="8" name="profile-6">
-            <a:extLst xmlns:a="http://schemas.openxmlformats.org/drawingml/2006/main">
-              <a:ext uri="{FF2B5EF4-FFF2-40B4-BE49-F238E27FC236}">
-                <a16:creationId xmlns:a16="http://schemas.microsoft.com/office/drawing/2014/main" id="{90EBCA04-E167-4A43-BF7E-2C0BBAE58F28}"/>
-              </a:ext>
-            </a:extLst>
-          </p:cNvPr>
-          <p:cNvSpPr>
-            <a:spLocks xmlns:a="http://schemas.openxmlformats.org/drawingml/2006/main" noGrp="1"/>
-          </p:cNvSpPr>
-          <p:nvPr/>
-        </p:nvSpPr>
-        <p:spPr>
-          <a:xfrm xmlns:a="http://schemas.openxmlformats.org/drawingml/2006/main">
-            <a:off x="571500" y="5314950"/>
-            <a:ext cx="6591300" cy="799148"/>
-          </a:xfrm>
-          <a:prstGeom xmlns:a="http://schemas.openxmlformats.org/drawingml/2006/main" prst="rect">
-            <a:avLst/>
-          </a:prstGeom>
-          <a:noFill xmlns:a="http://schemas.openxmlformats.org/drawingml/2006/main"/>
-          <a:ln xmlns:a="http://schemas.openxmlformats.org/drawingml/2006/main" w="0">
-            <a:noFill/>
-          </a:ln>
-        </p:spPr>
-        <p:txBody>
-          <a:bodyPr xmlns:a="http://schemas.openxmlformats.org/drawingml/2006/main" wrap="none" lIns="0" tIns="0" rIns="0" bIns="0" anchor="t">
-            <a:noAutofit/>
-          </a:bodyPr>
-          <a:lstStyle xmlns:a="http://schemas.openxmlformats.org/drawingml/2006/main"/>
-          <a:p xmlns:a="http://schemas.openxmlformats.org/drawingml/2006/main">
-            <a:pPr algn="l">
-              <a:defRPr sz="4725" b="1">
+          <p:cNvPr id="7" name="profile-5">
+            <a:extLst xmlns:a="http://schemas.openxmlformats.org/drawingml/2006/main">
+              <a:ext uri="{FF2B5EF4-FFF2-40B4-BE49-F238E27FC236}">
+                <a16:creationId xmlns:a16="http://schemas.microsoft.com/office/drawing/2014/main" id="{D4AF5ADC-40A4-4B56-81A3-E83560D9CCE3}"/>
+              </a:ext>
+            </a:extLst>
+          </p:cNvPr>
+          <p:cNvSpPr>
+            <a:spLocks xmlns:a="http://schemas.openxmlformats.org/drawingml/2006/main" noGrp="1"/>
+          </p:cNvSpPr>
+          <p:nvPr/>
+        </p:nvSpPr>
+        <p:spPr>
+          <a:xfrm xmlns:a="http://schemas.openxmlformats.org/drawingml/2006/main">
+            <a:off x="419100" y="7077075"/>
+            <a:ext cx="6724650" cy="712470"/>
+          </a:xfrm>
+          <a:prstGeom xmlns:a="http://schemas.openxmlformats.org/drawingml/2006/main" prst="rect">
+            <a:avLst/>
+          </a:prstGeom>
+          <a:noFill xmlns:a="http://schemas.openxmlformats.org/drawingml/2006/main"/>
+          <a:ln xmlns:a="http://schemas.openxmlformats.org/drawingml/2006/main" w="0">
+            <a:noFill/>
+          </a:ln>
+        </p:spPr>
+        <p:txBody>
+          <a:bodyPr xmlns:a="http://schemas.openxmlformats.org/drawingml/2006/main" wrap="none" lIns="0" tIns="0" rIns="0" bIns="0" anchor="t">
+            <a:noAutofit/>
+          </a:bodyPr>
+          <a:lstStyle xmlns:a="http://schemas.openxmlformats.org/drawingml/2006/main"/>
+          <a:p xmlns:a="http://schemas.openxmlformats.org/drawingml/2006/main">
+            <a:pPr algn="l">
+              <a:defRPr sz="4200" b="1">
                 <a:solidFill>
                   <a:srgbClr val="FFFFFF"/>
                 </a:solidFill>
@@ -1945,7 +1899,7 @@
               </a:defRPr>
             </a:pPr>
             <a:r>
-              <a:rPr sz="4725" b="1">
+              <a:rPr sz="4200" b="1">
                 <a:solidFill>
                   <a:srgbClr val="FFFFFF"/>
                 </a:solidFill>
@@ -1960,288 +1914,295 @@
       </p:sp>
       <p:sp>
         <p:nvSpPr>
+          <p:cNvPr id="8" name="profile-6">
+            <a:extLst xmlns:a="http://schemas.openxmlformats.org/drawingml/2006/main">
+              <a:ext uri="{FF2B5EF4-FFF2-40B4-BE49-F238E27FC236}">
+                <a16:creationId xmlns:a16="http://schemas.microsoft.com/office/drawing/2014/main" id="{2580C10E-C89E-42D3-8598-8C608315EEEE}"/>
+              </a:ext>
+            </a:extLst>
+          </p:cNvPr>
+          <p:cNvSpPr>
+            <a:spLocks xmlns:a="http://schemas.openxmlformats.org/drawingml/2006/main" noGrp="1"/>
+          </p:cNvSpPr>
+          <p:nvPr/>
+        </p:nvSpPr>
+        <p:spPr>
+          <a:xfrm xmlns:a="http://schemas.openxmlformats.org/drawingml/2006/main">
+            <a:off x="419100" y="7839075"/>
+            <a:ext cx="6724650" cy="254318"/>
+          </a:xfrm>
+          <a:prstGeom xmlns:a="http://schemas.openxmlformats.org/drawingml/2006/main" prst="rect">
+            <a:avLst/>
+          </a:prstGeom>
+          <a:noFill xmlns:a="http://schemas.openxmlformats.org/drawingml/2006/main"/>
+          <a:ln xmlns:a="http://schemas.openxmlformats.org/drawingml/2006/main" w="0">
+            <a:noFill/>
+          </a:ln>
+        </p:spPr>
+        <p:txBody>
+          <a:bodyPr xmlns:a="http://schemas.openxmlformats.org/drawingml/2006/main" wrap="none" lIns="0" tIns="0" rIns="0" bIns="0" anchor="t">
+            <a:noAutofit/>
+          </a:bodyPr>
+          <a:lstStyle xmlns:a="http://schemas.openxmlformats.org/drawingml/2006/main"/>
+          <a:p xmlns:a="http://schemas.openxmlformats.org/drawingml/2006/main">
+            <a:pPr algn="l">
+              <a:defRPr sz="1425" b="0">
+                <a:solidFill>
+                  <a:srgbClr val="DFE8F5"/>
+                </a:solidFill>
+                <a:latin typeface="Arial"/>
+                <a:ea typeface="Arial"/>
+                <a:cs typeface="Arial"/>
+              </a:defRPr>
+            </a:pPr>
+            <a:r>
+              <a:rPr sz="1425" b="0">
+                <a:solidFill>
+                  <a:srgbClr val="DFE8F5"/>
+                </a:solidFill>
+                <a:latin typeface="Arial"/>
+                <a:ea typeface="Arial"/>
+                <a:cs typeface="Arial"/>
+              </a:rPr>
+              <a:t>Property services. One coordinated point of contact.</a:t>
+            </a:r>
+          </a:p>
+        </p:txBody>
+      </p:sp>
+      <p:sp>
+        <p:nvSpPr>
           <p:cNvPr id="9" name="profile-7">
             <a:extLst xmlns:a="http://schemas.openxmlformats.org/drawingml/2006/main">
               <a:ext uri="{FF2B5EF4-FFF2-40B4-BE49-F238E27FC236}">
-                <a16:creationId xmlns:a16="http://schemas.microsoft.com/office/drawing/2014/main" id="{8A6ACD9D-1DD4-4326-A11C-7C453B22997A}"/>
-              </a:ext>
-            </a:extLst>
-          </p:cNvPr>
-          <p:cNvSpPr>
-            <a:spLocks xmlns:a="http://schemas.openxmlformats.org/drawingml/2006/main" noGrp="1"/>
-          </p:cNvSpPr>
-          <p:nvPr/>
-        </p:nvSpPr>
-        <p:spPr>
-          <a:xfrm xmlns:a="http://schemas.openxmlformats.org/drawingml/2006/main">
-            <a:off x="590550" y="6076950"/>
-            <a:ext cx="6534150" cy="266700"/>
-          </a:xfrm>
-          <a:prstGeom xmlns:a="http://schemas.openxmlformats.org/drawingml/2006/main" prst="rect">
-            <a:avLst/>
-          </a:prstGeom>
-          <a:noFill xmlns:a="http://schemas.openxmlformats.org/drawingml/2006/main"/>
-          <a:ln xmlns:a="http://schemas.openxmlformats.org/drawingml/2006/main" w="0">
-            <a:noFill/>
-          </a:ln>
-        </p:spPr>
-        <p:txBody>
-          <a:bodyPr xmlns:a="http://schemas.openxmlformats.org/drawingml/2006/main" wrap="none" lIns="0" tIns="0" rIns="0" bIns="0" anchor="t">
-            <a:noAutofit/>
-          </a:bodyPr>
-          <a:lstStyle xmlns:a="http://schemas.openxmlformats.org/drawingml/2006/main"/>
-          <a:p xmlns:a="http://schemas.openxmlformats.org/drawingml/2006/main">
-            <a:pPr algn="l">
-              <a:defRPr sz="1500" b="0">
-                <a:solidFill>
-                  <a:srgbClr val="DFE8F5"/>
-                </a:solidFill>
-                <a:latin typeface="Arial"/>
-                <a:ea typeface="Arial"/>
-                <a:cs typeface="Arial"/>
-              </a:defRPr>
-            </a:pPr>
-            <a:r>
-              <a:rPr sz="1500" b="0">
-                <a:solidFill>
-                  <a:srgbClr val="DFE8F5"/>
-                </a:solidFill>
-                <a:latin typeface="Arial"/>
-                <a:ea typeface="Arial"/>
-                <a:cs typeface="Arial"/>
-              </a:rPr>
-              <a:t>Property services. One coordinated point of contact.</a:t>
-            </a:r>
-          </a:p>
-        </p:txBody>
-      </p:sp>
-      <p:pic>
-        <p:nvPicPr>
-          <p:cNvPr id="30" name=""/>
-          <p:cNvPicPr>
-            <a:picLocks xmlns:a="http://schemas.openxmlformats.org/drawingml/2006/main" noChangeAspect="1"/>
-          </p:cNvPicPr>
-          <p:nvPr/>
-        </p:nvPicPr>
-        <p:blipFill>
-          <a:blip xmlns:r="http://schemas.openxmlformats.org/officeDocument/2006/relationships" xmlns:a="http://schemas.openxmlformats.org/drawingml/2006/main" r:embed="Rcfbf2a151e474673"/>
-          <a:srcRect xmlns:a="http://schemas.openxmlformats.org/drawingml/2006/main" l="0" t="33756" r="0" b="33756"/>
-          <a:stretch xmlns:a="http://schemas.openxmlformats.org/drawingml/2006/main">
-            <a:fillRect l="0" t="0" r="0" b="0"/>
-          </a:stretch>
-        </p:blipFill>
-        <p:spPr>
-          <a:xfrm xmlns:a="http://schemas.openxmlformats.org/drawingml/2006/main">
-            <a:off x="0" y="6848475"/>
-            <a:ext cx="3752850" cy="1828800"/>
-          </a:xfrm>
-          <a:prstGeom xmlns:a="http://schemas.openxmlformats.org/drawingml/2006/main" prst="rect">
-            <a:avLst/>
-          </a:prstGeom>
-        </p:spPr>
-      </p:pic>
-      <p:pic>
-        <p:nvPicPr>
-          <p:cNvPr id="31" name=""/>
-          <p:cNvPicPr>
-            <a:picLocks xmlns:a="http://schemas.openxmlformats.org/drawingml/2006/main" noChangeAspect="1"/>
-          </p:cNvPicPr>
-          <p:nvPr/>
-        </p:nvPicPr>
-        <p:blipFill>
-          <a:blip xmlns:r="http://schemas.openxmlformats.org/officeDocument/2006/relationships" xmlns:a="http://schemas.openxmlformats.org/drawingml/2006/main" r:embed="R360657aeb8874bbf"/>
-          <a:srcRect xmlns:a="http://schemas.openxmlformats.org/drawingml/2006/main" l="0" t="33756" r="0" b="33756"/>
-          <a:stretch xmlns:a="http://schemas.openxmlformats.org/drawingml/2006/main">
-            <a:fillRect l="0" t="0" r="0" b="0"/>
-          </a:stretch>
-        </p:blipFill>
-        <p:spPr>
-          <a:xfrm xmlns:a="http://schemas.openxmlformats.org/drawingml/2006/main">
-            <a:off x="3810000" y="6848475"/>
-            <a:ext cx="3752850" cy="1828800"/>
-          </a:xfrm>
-          <a:prstGeom xmlns:a="http://schemas.openxmlformats.org/drawingml/2006/main" prst="rect">
-            <a:avLst/>
-          </a:prstGeom>
-        </p:spPr>
-      </p:pic>
-      <p:sp>
-        <p:nvSpPr>
-          <p:cNvPr id="12" name="profile-8">
-            <a:extLst xmlns:a="http://schemas.openxmlformats.org/drawingml/2006/main">
-              <a:ext uri="{FF2B5EF4-FFF2-40B4-BE49-F238E27FC236}">
-                <a16:creationId xmlns:a16="http://schemas.microsoft.com/office/drawing/2014/main" id="{9434606B-D0CB-4FF2-B8F9-F3D7728E4D01}"/>
-              </a:ext>
-            </a:extLst>
-          </p:cNvPr>
-          <p:cNvSpPr>
-            <a:spLocks xmlns:a="http://schemas.openxmlformats.org/drawingml/2006/main" noGrp="1"/>
-          </p:cNvSpPr>
-          <p:nvPr/>
-        </p:nvSpPr>
-        <p:spPr>
-          <a:xfrm xmlns:a="http://schemas.openxmlformats.org/drawingml/2006/main">
-            <a:off x="295275" y="8801100"/>
-            <a:ext cx="1619250" cy="180023"/>
-          </a:xfrm>
-          <a:prstGeom xmlns:a="http://schemas.openxmlformats.org/drawingml/2006/main" prst="rect">
-            <a:avLst/>
-          </a:prstGeom>
-          <a:noFill xmlns:a="http://schemas.openxmlformats.org/drawingml/2006/main"/>
-          <a:ln xmlns:a="http://schemas.openxmlformats.org/drawingml/2006/main" w="0">
-            <a:noFill/>
-          </a:ln>
-        </p:spPr>
-        <p:txBody>
-          <a:bodyPr xmlns:a="http://schemas.openxmlformats.org/drawingml/2006/main" wrap="none" lIns="0" tIns="0" rIns="0" bIns="0" anchor="t">
-            <a:noAutofit/>
-          </a:bodyPr>
-          <a:lstStyle xmlns:a="http://schemas.openxmlformats.org/drawingml/2006/main"/>
-          <a:p xmlns:a="http://schemas.openxmlformats.org/drawingml/2006/main">
-            <a:pPr algn="l">
-              <a:defRPr sz="975" b="1">
-                <a:solidFill>
-                  <a:srgbClr val="8FB3DD"/>
-                </a:solidFill>
-                <a:latin typeface="Arial"/>
-                <a:ea typeface="Arial"/>
-                <a:cs typeface="Arial"/>
-              </a:defRPr>
-            </a:pPr>
-            <a:r>
-              <a:rPr sz="975" b="1">
-                <a:solidFill>
-                  <a:srgbClr val="8FB3DD"/>
-                </a:solidFill>
-                <a:latin typeface="Arial"/>
-                <a:ea typeface="Arial"/>
-                <a:cs typeface="Arial"/>
-              </a:rPr>
-              <a:t>BEFORE</a:t>
-            </a:r>
-          </a:p>
-        </p:txBody>
-      </p:sp>
-      <p:sp>
-        <p:nvSpPr>
-          <p:cNvPr id="13" name="profile-9">
-            <a:extLst xmlns:a="http://schemas.openxmlformats.org/drawingml/2006/main">
-              <a:ext uri="{FF2B5EF4-FFF2-40B4-BE49-F238E27FC236}">
-                <a16:creationId xmlns:a16="http://schemas.microsoft.com/office/drawing/2014/main" id="{DC2C223D-6465-4612-9561-BBFC9B9F0FF9}"/>
-              </a:ext>
-            </a:extLst>
-          </p:cNvPr>
-          <p:cNvSpPr>
-            <a:spLocks xmlns:a="http://schemas.openxmlformats.org/drawingml/2006/main" noGrp="1"/>
-          </p:cNvSpPr>
-          <p:nvPr/>
-        </p:nvSpPr>
-        <p:spPr>
-          <a:xfrm xmlns:a="http://schemas.openxmlformats.org/drawingml/2006/main">
-            <a:off x="4038600" y="8801100"/>
-            <a:ext cx="1619250" cy="180023"/>
-          </a:xfrm>
-          <a:prstGeom xmlns:a="http://schemas.openxmlformats.org/drawingml/2006/main" prst="rect">
-            <a:avLst/>
-          </a:prstGeom>
-          <a:noFill xmlns:a="http://schemas.openxmlformats.org/drawingml/2006/main"/>
-          <a:ln xmlns:a="http://schemas.openxmlformats.org/drawingml/2006/main" w="0">
-            <a:noFill/>
-          </a:ln>
-        </p:spPr>
-        <p:txBody>
-          <a:bodyPr xmlns:a="http://schemas.openxmlformats.org/drawingml/2006/main" wrap="none" lIns="0" tIns="0" rIns="0" bIns="0" anchor="t">
-            <a:noAutofit/>
-          </a:bodyPr>
-          <a:lstStyle xmlns:a="http://schemas.openxmlformats.org/drawingml/2006/main"/>
-          <a:p xmlns:a="http://schemas.openxmlformats.org/drawingml/2006/main">
-            <a:pPr algn="l">
-              <a:defRPr sz="975" b="1">
-                <a:solidFill>
-                  <a:srgbClr val="8FB3DD"/>
-                </a:solidFill>
-                <a:latin typeface="Arial"/>
-                <a:ea typeface="Arial"/>
-                <a:cs typeface="Arial"/>
-              </a:defRPr>
-            </a:pPr>
-            <a:r>
-              <a:rPr sz="975" b="1">
-                <a:solidFill>
-                  <a:srgbClr val="8FB3DD"/>
-                </a:solidFill>
-                <a:latin typeface="Arial"/>
-                <a:ea typeface="Arial"/>
-                <a:cs typeface="Arial"/>
-              </a:rPr>
-              <a:t>AFTER</a:t>
-            </a:r>
-          </a:p>
-        </p:txBody>
-      </p:sp>
-      <p:sp>
-        <p:nvSpPr>
-          <p:cNvPr id="14" name="profile-10">
-            <a:extLst xmlns:a="http://schemas.openxmlformats.org/drawingml/2006/main">
-              <a:ext uri="{FF2B5EF4-FFF2-40B4-BE49-F238E27FC236}">
-                <a16:creationId xmlns:a16="http://schemas.microsoft.com/office/drawing/2014/main" id="{1A93A266-7DF1-44FB-8302-64CEE47C60C1}"/>
-              </a:ext>
-            </a:extLst>
-          </p:cNvPr>
-          <p:cNvSpPr>
-            <a:spLocks xmlns:a="http://schemas.openxmlformats.org/drawingml/2006/main" noGrp="1"/>
-          </p:cNvSpPr>
-          <p:nvPr/>
-        </p:nvSpPr>
-        <p:spPr>
-          <a:xfrm xmlns:a="http://schemas.openxmlformats.org/drawingml/2006/main">
-            <a:off x="295275" y="9305925"/>
-            <a:ext cx="6981825" cy="217170"/>
-          </a:xfrm>
-          <a:prstGeom xmlns:a="http://schemas.openxmlformats.org/drawingml/2006/main" prst="rect">
-            <a:avLst/>
-          </a:prstGeom>
-          <a:noFill xmlns:a="http://schemas.openxmlformats.org/drawingml/2006/main"/>
-          <a:ln xmlns:a="http://schemas.openxmlformats.org/drawingml/2006/main" w="0">
-            <a:noFill/>
-          </a:ln>
-        </p:spPr>
-        <p:txBody>
-          <a:bodyPr xmlns:a="http://schemas.openxmlformats.org/drawingml/2006/main" wrap="none" lIns="0" tIns="0" rIns="0" bIns="0" anchor="t">
-            <a:noAutofit/>
-          </a:bodyPr>
-          <a:lstStyle xmlns:a="http://schemas.openxmlformats.org/drawingml/2006/main"/>
-          <a:p xmlns:a="http://schemas.openxmlformats.org/drawingml/2006/main">
-            <a:pPr algn="l">
-              <a:defRPr sz="1200" b="0">
+                <a16:creationId xmlns:a16="http://schemas.microsoft.com/office/drawing/2014/main" id="{75D54C4A-A804-4EC2-9D51-B0F5895C7CB8}"/>
+              </a:ext>
+            </a:extLst>
+          </p:cNvPr>
+          <p:cNvSpPr>
+            <a:spLocks xmlns:a="http://schemas.openxmlformats.org/drawingml/2006/main" noGrp="1"/>
+          </p:cNvSpPr>
+          <p:nvPr/>
+        </p:nvSpPr>
+        <p:spPr>
+          <a:xfrm xmlns:a="http://schemas.openxmlformats.org/drawingml/2006/main">
+            <a:off x="419100" y="8477250"/>
+            <a:ext cx="3209925" cy="353378"/>
+          </a:xfrm>
+          <a:prstGeom xmlns:a="http://schemas.openxmlformats.org/drawingml/2006/main" prst="rect">
+            <a:avLst/>
+          </a:prstGeom>
+          <a:noFill xmlns:a="http://schemas.openxmlformats.org/drawingml/2006/main"/>
+          <a:ln xmlns:a="http://schemas.openxmlformats.org/drawingml/2006/main" w="0">
+            <a:noFill/>
+          </a:ln>
+        </p:spPr>
+        <p:txBody>
+          <a:bodyPr xmlns:a="http://schemas.openxmlformats.org/drawingml/2006/main" wrap="none" lIns="0" tIns="0" rIns="0" bIns="0" anchor="t">
+            <a:noAutofit/>
+          </a:bodyPr>
+          <a:lstStyle xmlns:a="http://schemas.openxmlformats.org/drawingml/2006/main"/>
+          <a:p xmlns:a="http://schemas.openxmlformats.org/drawingml/2006/main">
+            <a:pPr algn="l">
+              <a:defRPr sz="2025" b="1">
                 <a:solidFill>
                   <a:srgbClr val="FFFFFF"/>
                 </a:solidFill>
-                <a:latin typeface="Arial"/>
-                <a:ea typeface="Arial"/>
-                <a:cs typeface="Arial"/>
-              </a:defRPr>
-            </a:pPr>
-            <a:r>
-              <a:rPr sz="1200" b="0">
+                <a:latin typeface="Arial Narrow"/>
+                <a:ea typeface="Arial Narrow"/>
+                <a:cs typeface="Arial Narrow"/>
+              </a:defRPr>
+            </a:pPr>
+            <a:r>
+              <a:rPr sz="2025" b="1">
                 <a:solidFill>
                   <a:srgbClr val="FFFFFF"/>
                 </a:solidFill>
-                <a:latin typeface="Arial"/>
-                <a:ea typeface="Arial"/>
-                <a:cs typeface="Arial"/>
-              </a:rPr>
-              <a:t>Siphoning / Plumbing / Renovation &amp; restoration / Pest control</a:t>
-            </a:r>
-          </a:p>
-        </p:txBody>
-      </p:sp>
-      <p:sp>
-        <p:nvSpPr>
-          <p:cNvPr id="15" name="profile-11">
-            <a:extLst xmlns:a="http://schemas.openxmlformats.org/drawingml/2006/main">
-              <a:ext uri="{FF2B5EF4-FFF2-40B4-BE49-F238E27FC236}">
-                <a16:creationId xmlns:a16="http://schemas.microsoft.com/office/drawing/2014/main" id="{43E345A4-5C11-4D4C-9C92-34C08F0C7796}"/>
+                <a:latin typeface="Arial Narrow"/>
+                <a:ea typeface="Arial Narrow"/>
+                <a:cs typeface="Arial Narrow"/>
+              </a:rPr>
+              <a:t>SIPHONING</a:t>
+            </a:r>
+          </a:p>
+        </p:txBody>
+      </p:sp>
+      <p:sp>
+        <p:nvSpPr>
+          <p:cNvPr id="10" name="profile-8">
+            <a:extLst xmlns:a="http://schemas.openxmlformats.org/drawingml/2006/main">
+              <a:ext uri="{FF2B5EF4-FFF2-40B4-BE49-F238E27FC236}">
+                <a16:creationId xmlns:a16="http://schemas.microsoft.com/office/drawing/2014/main" id="{BA0B2B40-DA5A-4D3B-ABEB-D693BA5F39ED}"/>
+              </a:ext>
+            </a:extLst>
+          </p:cNvPr>
+          <p:cNvSpPr>
+            <a:spLocks xmlns:a="http://schemas.openxmlformats.org/drawingml/2006/main" noGrp="1"/>
+          </p:cNvSpPr>
+          <p:nvPr/>
+        </p:nvSpPr>
+        <p:spPr>
+          <a:xfrm xmlns:a="http://schemas.openxmlformats.org/drawingml/2006/main">
+            <a:off x="3943350" y="8477250"/>
+            <a:ext cx="3209925" cy="353378"/>
+          </a:xfrm>
+          <a:prstGeom xmlns:a="http://schemas.openxmlformats.org/drawingml/2006/main" prst="rect">
+            <a:avLst/>
+          </a:prstGeom>
+          <a:noFill xmlns:a="http://schemas.openxmlformats.org/drawingml/2006/main"/>
+          <a:ln xmlns:a="http://schemas.openxmlformats.org/drawingml/2006/main" w="0">
+            <a:noFill/>
+          </a:ln>
+        </p:spPr>
+        <p:txBody>
+          <a:bodyPr xmlns:a="http://schemas.openxmlformats.org/drawingml/2006/main" wrap="none" lIns="0" tIns="0" rIns="0" bIns="0" anchor="t">
+            <a:noAutofit/>
+          </a:bodyPr>
+          <a:lstStyle xmlns:a="http://schemas.openxmlformats.org/drawingml/2006/main"/>
+          <a:p xmlns:a="http://schemas.openxmlformats.org/drawingml/2006/main">
+            <a:pPr algn="l">
+              <a:defRPr sz="2025" b="1">
+                <a:solidFill>
+                  <a:srgbClr val="FFFFFF"/>
+                </a:solidFill>
+                <a:latin typeface="Arial Narrow"/>
+                <a:ea typeface="Arial Narrow"/>
+                <a:cs typeface="Arial Narrow"/>
+              </a:defRPr>
+            </a:pPr>
+            <a:r>
+              <a:rPr sz="2025" b="1">
+                <a:solidFill>
+                  <a:srgbClr val="FFFFFF"/>
+                </a:solidFill>
+                <a:latin typeface="Arial Narrow"/>
+                <a:ea typeface="Arial Narrow"/>
+                <a:cs typeface="Arial Narrow"/>
+              </a:rPr>
+              <a:t>PLUMBING</a:t>
+            </a:r>
+          </a:p>
+        </p:txBody>
+      </p:sp>
+      <p:sp>
+        <p:nvSpPr>
+          <p:cNvPr id="11" name="profile-9">
+            <a:extLst xmlns:a="http://schemas.openxmlformats.org/drawingml/2006/main">
+              <a:ext uri="{FF2B5EF4-FFF2-40B4-BE49-F238E27FC236}">
+                <a16:creationId xmlns:a16="http://schemas.microsoft.com/office/drawing/2014/main" id="{B2C775A9-21EF-45E9-99FB-EB4F2B831599}"/>
+              </a:ext>
+            </a:extLst>
+          </p:cNvPr>
+          <p:cNvSpPr>
+            <a:spLocks xmlns:a="http://schemas.openxmlformats.org/drawingml/2006/main" noGrp="1"/>
+          </p:cNvSpPr>
+          <p:nvPr/>
+        </p:nvSpPr>
+        <p:spPr>
+          <a:xfrm xmlns:a="http://schemas.openxmlformats.org/drawingml/2006/main">
+            <a:off x="419100" y="9048750"/>
+            <a:ext cx="3209925" cy="316230"/>
+          </a:xfrm>
+          <a:prstGeom xmlns:a="http://schemas.openxmlformats.org/drawingml/2006/main" prst="rect">
+            <a:avLst/>
+          </a:prstGeom>
+          <a:noFill xmlns:a="http://schemas.openxmlformats.org/drawingml/2006/main"/>
+          <a:ln xmlns:a="http://schemas.openxmlformats.org/drawingml/2006/main" w="0">
+            <a:noFill/>
+          </a:ln>
+        </p:spPr>
+        <p:txBody>
+          <a:bodyPr xmlns:a="http://schemas.openxmlformats.org/drawingml/2006/main" wrap="none" lIns="0" tIns="0" rIns="0" bIns="0" anchor="t">
+            <a:noAutofit/>
+          </a:bodyPr>
+          <a:lstStyle xmlns:a="http://schemas.openxmlformats.org/drawingml/2006/main"/>
+          <a:p xmlns:a="http://schemas.openxmlformats.org/drawingml/2006/main">
+            <a:pPr algn="l">
+              <a:defRPr sz="1800" b="1">
+                <a:solidFill>
+                  <a:srgbClr val="FFFFFF"/>
+                </a:solidFill>
+                <a:latin typeface="Arial Narrow"/>
+                <a:ea typeface="Arial Narrow"/>
+                <a:cs typeface="Arial Narrow"/>
+              </a:defRPr>
+            </a:pPr>
+            <a:r>
+              <a:rPr sz="1800" b="1">
+                <a:solidFill>
+                  <a:srgbClr val="FFFFFF"/>
+                </a:solidFill>
+                <a:latin typeface="Arial Narrow"/>
+                <a:ea typeface="Arial Narrow"/>
+                <a:cs typeface="Arial Narrow"/>
+              </a:rPr>
+              <a:t>RENOVATION &amp; RESTORATION</a:t>
+            </a:r>
+          </a:p>
+        </p:txBody>
+      </p:sp>
+      <p:sp>
+        <p:nvSpPr>
+          <p:cNvPr id="12" name="profile-10">
+            <a:extLst xmlns:a="http://schemas.openxmlformats.org/drawingml/2006/main">
+              <a:ext uri="{FF2B5EF4-FFF2-40B4-BE49-F238E27FC236}">
+                <a16:creationId xmlns:a16="http://schemas.microsoft.com/office/drawing/2014/main" id="{413A51E9-A373-4344-BDD2-F2EC32BCB3F6}"/>
+              </a:ext>
+            </a:extLst>
+          </p:cNvPr>
+          <p:cNvSpPr>
+            <a:spLocks xmlns:a="http://schemas.openxmlformats.org/drawingml/2006/main" noGrp="1"/>
+          </p:cNvSpPr>
+          <p:nvPr/>
+        </p:nvSpPr>
+        <p:spPr>
+          <a:xfrm xmlns:a="http://schemas.openxmlformats.org/drawingml/2006/main">
+            <a:off x="3943350" y="9048750"/>
+            <a:ext cx="3209925" cy="353378"/>
+          </a:xfrm>
+          <a:prstGeom xmlns:a="http://schemas.openxmlformats.org/drawingml/2006/main" prst="rect">
+            <a:avLst/>
+          </a:prstGeom>
+          <a:noFill xmlns:a="http://schemas.openxmlformats.org/drawingml/2006/main"/>
+          <a:ln xmlns:a="http://schemas.openxmlformats.org/drawingml/2006/main" w="0">
+            <a:noFill/>
+          </a:ln>
+        </p:spPr>
+        <p:txBody>
+          <a:bodyPr xmlns:a="http://schemas.openxmlformats.org/drawingml/2006/main" wrap="none" lIns="0" tIns="0" rIns="0" bIns="0" anchor="t">
+            <a:noAutofit/>
+          </a:bodyPr>
+          <a:lstStyle xmlns:a="http://schemas.openxmlformats.org/drawingml/2006/main"/>
+          <a:p xmlns:a="http://schemas.openxmlformats.org/drawingml/2006/main">
+            <a:pPr algn="l">
+              <a:defRPr sz="2025" b="1">
+                <a:solidFill>
+                  <a:srgbClr val="FFFFFF"/>
+                </a:solidFill>
+                <a:latin typeface="Arial Narrow"/>
+                <a:ea typeface="Arial Narrow"/>
+                <a:cs typeface="Arial Narrow"/>
+              </a:defRPr>
+            </a:pPr>
+            <a:r>
+              <a:rPr sz="2025" b="1">
+                <a:solidFill>
+                  <a:srgbClr val="FFFFFF"/>
+                </a:solidFill>
+                <a:latin typeface="Arial Narrow"/>
+                <a:ea typeface="Arial Narrow"/>
+                <a:cs typeface="Arial Narrow"/>
+              </a:rPr>
+              <a:t>PEST CONTROL</a:t>
+            </a:r>
+          </a:p>
+        </p:txBody>
+      </p:sp>
+      <p:sp>
+        <p:nvSpPr>
+          <p:cNvPr id="13" name="profile-11">
+            <a:extLst xmlns:a="http://schemas.openxmlformats.org/drawingml/2006/main">
+              <a:ext uri="{FF2B5EF4-FFF2-40B4-BE49-F238E27FC236}">
+                <a16:creationId xmlns:a16="http://schemas.microsoft.com/office/drawing/2014/main" id="{4932955B-26A3-4A30-AEDE-AEB1C03E9135}"/>
               </a:ext>
             </a:extLst>
           </p:cNvPr>
@@ -2268,10 +2229,10 @@
       </p:sp>
       <p:sp>
         <p:nvSpPr>
-          <p:cNvPr id="16" name="profile-12">
-            <a:extLst xmlns:a="http://schemas.openxmlformats.org/drawingml/2006/main">
-              <a:ext uri="{FF2B5EF4-FFF2-40B4-BE49-F238E27FC236}">
-                <a16:creationId xmlns:a16="http://schemas.microsoft.com/office/drawing/2014/main" id="{4C91D98D-A31A-4DEA-AAED-19E55A2B8446}"/>
+          <p:cNvPr id="14" name="profile-12">
+            <a:extLst xmlns:a="http://schemas.openxmlformats.org/drawingml/2006/main">
+              <a:ext uri="{FF2B5EF4-FFF2-40B4-BE49-F238E27FC236}">
+                <a16:creationId xmlns:a16="http://schemas.microsoft.com/office/drawing/2014/main" id="{6B1C39D9-744C-4FF9-8B30-BFAEF697EC13}"/>
               </a:ext>
             </a:extLst>
           </p:cNvPr>
@@ -2314,10 +2275,10 @@
       </p:sp>
       <p:sp>
         <p:nvSpPr>
-          <p:cNvPr id="17" name="profile-13">
-            <a:extLst xmlns:a="http://schemas.openxmlformats.org/drawingml/2006/main">
-              <a:ext uri="{FF2B5EF4-FFF2-40B4-BE49-F238E27FC236}">
-                <a16:creationId xmlns:a16="http://schemas.microsoft.com/office/drawing/2014/main" id="{AB021289-C1A7-48F9-A95C-B87C63252530}"/>
+          <p:cNvPr id="15" name="profile-13">
+            <a:extLst xmlns:a="http://schemas.openxmlformats.org/drawingml/2006/main">
+              <a:ext uri="{FF2B5EF4-FFF2-40B4-BE49-F238E27FC236}">
+                <a16:creationId xmlns:a16="http://schemas.microsoft.com/office/drawing/2014/main" id="{47064C5D-68AA-400D-800F-F95C5D0CF956}"/>
               </a:ext>
             </a:extLst>
           </p:cNvPr>
@@ -2371,10 +2332,10 @@
       </p:sp>
       <p:sp>
         <p:nvSpPr>
-          <p:cNvPr id="18" name="profile-14">
-            <a:extLst xmlns:a="http://schemas.openxmlformats.org/drawingml/2006/main">
-              <a:ext uri="{FF2B5EF4-FFF2-40B4-BE49-F238E27FC236}">
-                <a16:creationId xmlns:a16="http://schemas.microsoft.com/office/drawing/2014/main" id="{1DD4C47D-045B-4E7A-A882-91C471A050DB}"/>
+          <p:cNvPr id="16" name="profile-14">
+            <a:extLst xmlns:a="http://schemas.openxmlformats.org/drawingml/2006/main">
+              <a:ext uri="{FF2B5EF4-FFF2-40B4-BE49-F238E27FC236}">
+                <a16:creationId xmlns:a16="http://schemas.microsoft.com/office/drawing/2014/main" id="{2CDE233B-0D62-4AC2-9E53-4E9ABBB6EDD2}"/>
               </a:ext>
             </a:extLst>
           </p:cNvPr>
@@ -2428,10 +2389,10 @@
       </p:sp>
       <p:sp>
         <p:nvSpPr>
-          <p:cNvPr id="19" name="profile-15">
-            <a:extLst xmlns:a="http://schemas.openxmlformats.org/drawingml/2006/main">
-              <a:ext uri="{FF2B5EF4-FFF2-40B4-BE49-F238E27FC236}">
-                <a16:creationId xmlns:a16="http://schemas.microsoft.com/office/drawing/2014/main" id="{959EAF2B-4132-4B68-A085-D631507BF552}"/>
+          <p:cNvPr id="17" name="profile-15">
+            <a:extLst xmlns:a="http://schemas.openxmlformats.org/drawingml/2006/main">
+              <a:ext uri="{FF2B5EF4-FFF2-40B4-BE49-F238E27FC236}">
+                <a16:creationId xmlns:a16="http://schemas.microsoft.com/office/drawing/2014/main" id="{A5EB4E3E-9451-4FEB-9DCE-E6A0CAE25BC2}"/>
               </a:ext>
             </a:extLst>
           </p:cNvPr>
@@ -2485,10 +2446,10 @@
       </p:sp>
       <p:sp>
         <p:nvSpPr>
-          <p:cNvPr id="20" name="profile-16">
-            <a:extLst xmlns:a="http://schemas.openxmlformats.org/drawingml/2006/main">
-              <a:ext uri="{FF2B5EF4-FFF2-40B4-BE49-F238E27FC236}">
-                <a16:creationId xmlns:a16="http://schemas.microsoft.com/office/drawing/2014/main" id="{A7B3C01D-A3FD-4C11-B0EF-6C964A8BB49A}"/>
+          <p:cNvPr id="18" name="profile-16">
+            <a:extLst xmlns:a="http://schemas.openxmlformats.org/drawingml/2006/main">
+              <a:ext uri="{FF2B5EF4-FFF2-40B4-BE49-F238E27FC236}">
+                <a16:creationId xmlns:a16="http://schemas.microsoft.com/office/drawing/2014/main" id="{381D7D7E-FDDA-4F75-91B7-1A40D3DF02D8}"/>
               </a:ext>
             </a:extLst>
           </p:cNvPr>
@@ -2543,7 +2504,7 @@
     </p:spTree>
     <p:extLst>
       <p:ext uri="{BB962C8B-B14F-4D97-AF65-F5344CB8AC3E}">
-        <p14:creationId xmlns:p14="http://schemas.microsoft.com/office/powerpoint/2010/main" val="64934616"/>
+        <p14:creationId xmlns:p14="http://schemas.microsoft.com/office/powerpoint/2010/main" val="639774273"/>
       </p:ext>
     </p:extLst>
   </p:cSld>
@@ -2569,52 +2530,25 @@
       <p:grpSpPr>
         <a:xfrm xmlns:a="http://schemas.openxmlformats.org/drawingml/2006/main"/>
       </p:grpSpPr>
-      <p:sp>
-        <p:nvSpPr>
-          <p:cNvPr id="32" name="profile-17">
-            <a:extLst xmlns:a="http://schemas.openxmlformats.org/drawingml/2006/main">
-              <a:ext uri="{FF2B5EF4-FFF2-40B4-BE49-F238E27FC236}">
-                <a16:creationId xmlns:a16="http://schemas.microsoft.com/office/drawing/2014/main" id="{BE9F3189-3BFD-415D-B7CC-FE4FD37519DD}"/>
-              </a:ext>
-            </a:extLst>
-          </p:cNvPr>
-          <p:cNvSpPr>
-            <a:spLocks xmlns:a="http://schemas.openxmlformats.org/drawingml/2006/main" noGrp="1"/>
-          </p:cNvSpPr>
-          <p:nvPr/>
-        </p:nvSpPr>
-        <p:spPr>
-          <a:xfrm xmlns:a="http://schemas.openxmlformats.org/drawingml/2006/main">
-            <a:off x="0" y="0"/>
-            <a:ext cx="7562850" cy="1866900"/>
-          </a:xfrm>
-          <a:prstGeom xmlns:a="http://schemas.openxmlformats.org/drawingml/2006/main" prst="rect">
-            <a:avLst/>
-          </a:prstGeom>
-          <a:solidFill xmlns:a="http://schemas.openxmlformats.org/drawingml/2006/main">
-            <a:srgbClr val="0A1F45"/>
-          </a:solidFill>
-          <a:ln xmlns:a="http://schemas.openxmlformats.org/drawingml/2006/main" w="0">
-            <a:noFill/>
-          </a:ln>
-        </p:spPr>
-      </p:sp>
       <p:pic>
         <p:nvPicPr>
-          <p:cNvPr id="33" name=""/>
+          <p:cNvPr id="29" name=""/>
           <p:cNvPicPr>
             <a:picLocks xmlns:a="http://schemas.openxmlformats.org/drawingml/2006/main" noChangeAspect="1"/>
           </p:cNvPicPr>
           <p:nvPr/>
         </p:nvPicPr>
         <p:blipFill>
-          <a:blip xmlns:r="http://schemas.openxmlformats.org/officeDocument/2006/relationships" xmlns:a="http://schemas.openxmlformats.org/drawingml/2006/main" r:embed="Re14cafc6ed4746ed"/>
-          <a:stretch xmlns:a="http://schemas.openxmlformats.org/drawingml/2006/main"/>
+          <a:blip xmlns:r="http://schemas.openxmlformats.org/officeDocument/2006/relationships" xmlns:a="http://schemas.openxmlformats.org/drawingml/2006/main" r:embed="R03d9b037983c490e"/>
+          <a:srcRect xmlns:a="http://schemas.openxmlformats.org/drawingml/2006/main" l="0" t="25346" r="0" b="25346"/>
+          <a:stretch xmlns:a="http://schemas.openxmlformats.org/drawingml/2006/main">
+            <a:fillRect l="0" t="0" r="0" b="0"/>
+          </a:stretch>
         </p:blipFill>
         <p:spPr>
           <a:xfrm xmlns:a="http://schemas.openxmlformats.org/drawingml/2006/main">
-            <a:off x="295275" y="180975"/>
-            <a:ext cx="1390650" cy="1390650"/>
+            <a:off x="0" y="0"/>
+            <a:ext cx="7562850" cy="2486025"/>
           </a:xfrm>
           <a:prstGeom xmlns:a="http://schemas.openxmlformats.org/drawingml/2006/main" prst="rect">
             <a:avLst/>
@@ -2623,140 +2557,26 @@
       </p:pic>
       <p:sp>
         <p:nvSpPr>
-          <p:cNvPr id="3" name="profile-18">
-            <a:extLst xmlns:a="http://schemas.openxmlformats.org/drawingml/2006/main">
-              <a:ext uri="{FF2B5EF4-FFF2-40B4-BE49-F238E27FC236}">
-                <a16:creationId xmlns:a16="http://schemas.microsoft.com/office/drawing/2014/main" id="{803B2ECF-2AF3-44E0-9F27-DAFCEB649D61}"/>
-              </a:ext>
-            </a:extLst>
-          </p:cNvPr>
-          <p:cNvSpPr>
-            <a:spLocks xmlns:a="http://schemas.openxmlformats.org/drawingml/2006/main" noGrp="1"/>
-          </p:cNvSpPr>
-          <p:nvPr/>
-        </p:nvSpPr>
-        <p:spPr>
-          <a:xfrm xmlns:a="http://schemas.openxmlformats.org/drawingml/2006/main">
-            <a:off x="2000250" y="400050"/>
-            <a:ext cx="5286375" cy="712470"/>
-          </a:xfrm>
-          <a:prstGeom xmlns:a="http://schemas.openxmlformats.org/drawingml/2006/main" prst="rect">
-            <a:avLst/>
-          </a:prstGeom>
-          <a:noFill xmlns:a="http://schemas.openxmlformats.org/drawingml/2006/main"/>
-          <a:ln xmlns:a="http://schemas.openxmlformats.org/drawingml/2006/main" w="0">
-            <a:noFill/>
-          </a:ln>
-        </p:spPr>
-        <p:txBody>
-          <a:bodyPr xmlns:a="http://schemas.openxmlformats.org/drawingml/2006/main" wrap="none" lIns="0" tIns="0" rIns="0" bIns="0" anchor="t">
-            <a:noAutofit/>
-          </a:bodyPr>
-          <a:lstStyle xmlns:a="http://schemas.openxmlformats.org/drawingml/2006/main"/>
-          <a:p xmlns:a="http://schemas.openxmlformats.org/drawingml/2006/main">
-            <a:pPr algn="l">
-              <a:defRPr sz="4200" b="1">
-                <a:solidFill>
-                  <a:srgbClr val="FFFFFF"/>
-                </a:solidFill>
-                <a:latin typeface="Arial Narrow"/>
-                <a:ea typeface="Arial Narrow"/>
-                <a:cs typeface="Arial Narrow"/>
-              </a:defRPr>
-            </a:pPr>
-            <a:r>
-              <a:rPr sz="4200" b="1">
-                <a:solidFill>
-                  <a:srgbClr val="FFFFFF"/>
-                </a:solidFill>
-                <a:latin typeface="Arial Narrow"/>
-                <a:ea typeface="Arial Narrow"/>
-                <a:cs typeface="Arial Narrow"/>
-              </a:rPr>
-              <a:t>OCEANIDES</a:t>
-            </a:r>
-          </a:p>
-        </p:txBody>
-      </p:sp>
-      <p:sp>
-        <p:nvSpPr>
-          <p:cNvPr id="4" name="profile-19">
-            <a:extLst xmlns:a="http://schemas.openxmlformats.org/drawingml/2006/main">
-              <a:ext uri="{FF2B5EF4-FFF2-40B4-BE49-F238E27FC236}">
-                <a16:creationId xmlns:a16="http://schemas.microsoft.com/office/drawing/2014/main" id="{6B5ABD19-4B18-4F58-ACF0-43D92A401761}"/>
-              </a:ext>
-            </a:extLst>
-          </p:cNvPr>
-          <p:cNvSpPr>
-            <a:spLocks xmlns:a="http://schemas.openxmlformats.org/drawingml/2006/main" noGrp="1"/>
-          </p:cNvSpPr>
-          <p:nvPr/>
-        </p:nvSpPr>
-        <p:spPr>
-          <a:xfrm xmlns:a="http://schemas.openxmlformats.org/drawingml/2006/main">
-            <a:off x="2019300" y="1162050"/>
-            <a:ext cx="5238750" cy="229553"/>
-          </a:xfrm>
-          <a:prstGeom xmlns:a="http://schemas.openxmlformats.org/drawingml/2006/main" prst="rect">
-            <a:avLst/>
-          </a:prstGeom>
-          <a:noFill xmlns:a="http://schemas.openxmlformats.org/drawingml/2006/main"/>
-          <a:ln xmlns:a="http://schemas.openxmlformats.org/drawingml/2006/main" w="0">
-            <a:noFill/>
-          </a:ln>
-        </p:spPr>
-        <p:txBody>
-          <a:bodyPr xmlns:a="http://schemas.openxmlformats.org/drawingml/2006/main" wrap="none" lIns="0" tIns="0" rIns="0" bIns="0" anchor="t">
-            <a:noAutofit/>
-          </a:bodyPr>
-          <a:lstStyle xmlns:a="http://schemas.openxmlformats.org/drawingml/2006/main"/>
-          <a:p xmlns:a="http://schemas.openxmlformats.org/drawingml/2006/main">
-            <a:pPr algn="l">
-              <a:defRPr sz="1275" b="0">
-                <a:solidFill>
-                  <a:srgbClr val="DFE8F5"/>
-                </a:solidFill>
-                <a:latin typeface="Arial"/>
-                <a:ea typeface="Arial"/>
-                <a:cs typeface="Arial"/>
-              </a:defRPr>
-            </a:pPr>
-            <a:r>
-              <a:rPr sz="1275" b="0">
-                <a:solidFill>
-                  <a:srgbClr val="DFE8F5"/>
-                </a:solidFill>
-                <a:latin typeface="Arial"/>
-                <a:ea typeface="Arial"/>
-                <a:cs typeface="Arial"/>
-              </a:rPr>
-              <a:t>Homes / Condominiums / Company facilities</a:t>
-            </a:r>
-          </a:p>
-        </p:txBody>
-      </p:sp>
-      <p:sp>
-        <p:nvSpPr>
-          <p:cNvPr id="5" name="profile-20">
-            <a:extLst xmlns:a="http://schemas.openxmlformats.org/drawingml/2006/main">
-              <a:ext uri="{FF2B5EF4-FFF2-40B4-BE49-F238E27FC236}">
-                <a16:creationId xmlns:a16="http://schemas.microsoft.com/office/drawing/2014/main" id="{DC9FBEC7-A236-4A52-BF01-3226DDFF32C6}"/>
-              </a:ext>
-            </a:extLst>
-          </p:cNvPr>
-          <p:cNvSpPr>
-            <a:spLocks xmlns:a="http://schemas.openxmlformats.org/drawingml/2006/main" noGrp="1"/>
-          </p:cNvSpPr>
-          <p:nvPr/>
-        </p:nvSpPr>
-        <p:spPr>
-          <a:xfrm xmlns:a="http://schemas.openxmlformats.org/drawingml/2006/main">
-            <a:off x="257175" y="1552575"/>
-            <a:ext cx="7000875" cy="1323975"/>
+          <p:cNvPr id="2" name="profile-17">
+            <a:extLst xmlns:a="http://schemas.openxmlformats.org/drawingml/2006/main">
+              <a:ext uri="{FF2B5EF4-FFF2-40B4-BE49-F238E27FC236}">
+                <a16:creationId xmlns:a16="http://schemas.microsoft.com/office/drawing/2014/main" id="{18A29371-98E5-42D9-9B01-85FADF057110}"/>
+              </a:ext>
+            </a:extLst>
+          </p:cNvPr>
+          <p:cNvSpPr>
+            <a:spLocks xmlns:a="http://schemas.openxmlformats.org/drawingml/2006/main" noGrp="1"/>
+          </p:cNvSpPr>
+          <p:nvPr/>
+        </p:nvSpPr>
+        <p:spPr>
+          <a:xfrm xmlns:a="http://schemas.openxmlformats.org/drawingml/2006/main">
+            <a:off x="257175" y="1952625"/>
+            <a:ext cx="7000875" cy="971550"/>
           </a:xfrm>
           <a:custGeom xmlns:a="http://schemas.openxmlformats.org/drawingml/2006/main">
             <a:pathLst>
-              <a:path w="7000875" h="1323975">
+              <a:path w="7000875" h="971550">
                 <a:moveTo>
                   <a:pt x="514350" y="0"/>
                 </a:moveTo>
@@ -2764,10 +2584,10 @@
                   <a:pt x="7000875" y="0"/>
                 </a:lnTo>
                 <a:lnTo>
-                  <a:pt x="6267450" y="1323975"/>
+                  <a:pt x="6267450" y="971550"/>
                 </a:lnTo>
                 <a:lnTo>
-                  <a:pt x="0" y="1323975"/>
+                  <a:pt x="0" y="971550"/>
                 </a:lnTo>
                 <a:close/>
               </a:path>
@@ -2783,26 +2603,26 @@
       </p:sp>
       <p:sp>
         <p:nvSpPr>
-          <p:cNvPr id="6" name="profile-21">
-            <a:extLst xmlns:a="http://schemas.openxmlformats.org/drawingml/2006/main">
-              <a:ext uri="{FF2B5EF4-FFF2-40B4-BE49-F238E27FC236}">
-                <a16:creationId xmlns:a16="http://schemas.microsoft.com/office/drawing/2014/main" id="{FA12A8CD-EB51-45EA-840B-A4613FE6AB9E}"/>
-              </a:ext>
-            </a:extLst>
-          </p:cNvPr>
-          <p:cNvSpPr>
-            <a:spLocks xmlns:a="http://schemas.openxmlformats.org/drawingml/2006/main" noGrp="1"/>
-          </p:cNvSpPr>
-          <p:nvPr/>
-        </p:nvSpPr>
-        <p:spPr>
-          <a:xfrm xmlns:a="http://schemas.openxmlformats.org/drawingml/2006/main">
-            <a:off x="257175" y="1552575"/>
-            <a:ext cx="6896100" cy="1238250"/>
+          <p:cNvPr id="3" name="profile-18">
+            <a:extLst xmlns:a="http://schemas.openxmlformats.org/drawingml/2006/main">
+              <a:ext uri="{FF2B5EF4-FFF2-40B4-BE49-F238E27FC236}">
+                <a16:creationId xmlns:a16="http://schemas.microsoft.com/office/drawing/2014/main" id="{D7351469-BB15-4303-B37E-93A559C2A6AD}"/>
+              </a:ext>
+            </a:extLst>
+          </p:cNvPr>
+          <p:cNvSpPr>
+            <a:spLocks xmlns:a="http://schemas.openxmlformats.org/drawingml/2006/main" noGrp="1"/>
+          </p:cNvSpPr>
+          <p:nvPr/>
+        </p:nvSpPr>
+        <p:spPr>
+          <a:xfrm xmlns:a="http://schemas.openxmlformats.org/drawingml/2006/main">
+            <a:off x="257175" y="1952625"/>
+            <a:ext cx="6896100" cy="885825"/>
           </a:xfrm>
           <a:custGeom xmlns:a="http://schemas.openxmlformats.org/drawingml/2006/main">
             <a:pathLst>
-              <a:path w="6896100" h="1238250">
+              <a:path w="6896100" h="885825">
                 <a:moveTo>
                   <a:pt x="514350" y="0"/>
                 </a:moveTo>
@@ -2810,10 +2630,10 @@
                   <a:pt x="6896100" y="0"/>
                 </a:lnTo>
                 <a:lnTo>
-                  <a:pt x="6210300" y="1238250"/>
+                  <a:pt x="6210300" y="885825"/>
                 </a:lnTo>
                 <a:lnTo>
-                  <a:pt x="0" y="1238250"/>
+                  <a:pt x="0" y="885825"/>
                 </a:lnTo>
                 <a:close/>
               </a:path>
@@ -2829,21 +2649,21 @@
       </p:sp>
       <p:sp>
         <p:nvSpPr>
-          <p:cNvPr id="7" name="profile-22">
-            <a:extLst xmlns:a="http://schemas.openxmlformats.org/drawingml/2006/main">
-              <a:ext uri="{FF2B5EF4-FFF2-40B4-BE49-F238E27FC236}">
-                <a16:creationId xmlns:a16="http://schemas.microsoft.com/office/drawing/2014/main" id="{BA4AEAFD-EF4A-41EE-9CB9-D9A04D191402}"/>
-              </a:ext>
-            </a:extLst>
-          </p:cNvPr>
-          <p:cNvSpPr>
-            <a:spLocks xmlns:a="http://schemas.openxmlformats.org/drawingml/2006/main" noGrp="1"/>
-          </p:cNvSpPr>
-          <p:nvPr/>
-        </p:nvSpPr>
-        <p:spPr>
-          <a:xfrm xmlns:a="http://schemas.openxmlformats.org/drawingml/2006/main">
-            <a:off x="733425" y="1724025"/>
+          <p:cNvPr id="4" name="profile-19">
+            <a:extLst xmlns:a="http://schemas.openxmlformats.org/drawingml/2006/main">
+              <a:ext uri="{FF2B5EF4-FFF2-40B4-BE49-F238E27FC236}">
+                <a16:creationId xmlns:a16="http://schemas.microsoft.com/office/drawing/2014/main" id="{748AAC3A-2DA8-4648-9BDB-D5DC4A76F200}"/>
+              </a:ext>
+            </a:extLst>
+          </p:cNvPr>
+          <p:cNvSpPr>
+            <a:spLocks xmlns:a="http://schemas.openxmlformats.org/drawingml/2006/main" noGrp="1"/>
+          </p:cNvSpPr>
+          <p:nvPr/>
+        </p:nvSpPr>
+        <p:spPr>
+          <a:xfrm xmlns:a="http://schemas.openxmlformats.org/drawingml/2006/main">
+            <a:off x="733425" y="2124075"/>
             <a:ext cx="5800725" cy="464820"/>
           </a:xfrm>
           <a:prstGeom xmlns:a="http://schemas.openxmlformats.org/drawingml/2006/main" prst="rect">
@@ -2886,197 +2706,197 @@
       </p:sp>
       <p:sp>
         <p:nvSpPr>
+          <p:cNvPr id="5" name="profile-20">
+            <a:extLst xmlns:a="http://schemas.openxmlformats.org/drawingml/2006/main">
+              <a:ext uri="{FF2B5EF4-FFF2-40B4-BE49-F238E27FC236}">
+                <a16:creationId xmlns:a16="http://schemas.microsoft.com/office/drawing/2014/main" id="{B4F34595-0D38-49DE-8113-1A98D1D42E89}"/>
+              </a:ext>
+            </a:extLst>
+          </p:cNvPr>
+          <p:cNvSpPr>
+            <a:spLocks xmlns:a="http://schemas.openxmlformats.org/drawingml/2006/main" noGrp="1"/>
+          </p:cNvSpPr>
+          <p:nvPr/>
+        </p:nvSpPr>
+        <p:spPr>
+          <a:xfrm xmlns:a="http://schemas.openxmlformats.org/drawingml/2006/main">
+            <a:off x="419100" y="3295650"/>
+            <a:ext cx="6724650" cy="285750"/>
+          </a:xfrm>
+          <a:prstGeom xmlns:a="http://schemas.openxmlformats.org/drawingml/2006/main" prst="rect">
+            <a:avLst/>
+          </a:prstGeom>
+          <a:noFill xmlns:a="http://schemas.openxmlformats.org/drawingml/2006/main"/>
+          <a:ln xmlns:a="http://schemas.openxmlformats.org/drawingml/2006/main" w="0">
+            <a:noFill/>
+          </a:ln>
+        </p:spPr>
+        <p:txBody>
+          <a:bodyPr xmlns:a="http://schemas.openxmlformats.org/drawingml/2006/main" wrap="none" lIns="0" tIns="0" rIns="0" bIns="0" anchor="t">
+            <a:noAutofit/>
+          </a:bodyPr>
+          <a:lstStyle xmlns:a="http://schemas.openxmlformats.org/drawingml/2006/main"/>
+          <a:p xmlns:a="http://schemas.openxmlformats.org/drawingml/2006/main">
+            <a:pPr algn="l">
+              <a:defRPr sz="1425" b="0">
+                <a:solidFill>
+                  <a:srgbClr val="0B1B33"/>
+                </a:solidFill>
+                <a:latin typeface="Arial"/>
+                <a:ea typeface="Arial"/>
+                <a:cs typeface="Arial"/>
+              </a:defRPr>
+            </a:pPr>
+            <a:r>
+              <a:rPr sz="1425" b="0">
+                <a:solidFill>
+                  <a:srgbClr val="0B1B33"/>
+                </a:solidFill>
+                <a:latin typeface="Arial"/>
+                <a:ea typeface="Arial"/>
+                <a:cs typeface="Arial"/>
+              </a:rPr>
+              <a:t>Oceanides coordinates property services for homes, condominiums and company</a:t>
+            </a:r>
+          </a:p>
+        </p:txBody>
+      </p:sp>
+      <p:sp>
+        <p:nvSpPr>
+          <p:cNvPr id="6" name="profile-21">
+            <a:extLst xmlns:a="http://schemas.openxmlformats.org/drawingml/2006/main">
+              <a:ext uri="{FF2B5EF4-FFF2-40B4-BE49-F238E27FC236}">
+                <a16:creationId xmlns:a16="http://schemas.microsoft.com/office/drawing/2014/main" id="{29846BAC-E432-4B21-AF82-7D3368C60302}"/>
+              </a:ext>
+            </a:extLst>
+          </p:cNvPr>
+          <p:cNvSpPr>
+            <a:spLocks xmlns:a="http://schemas.openxmlformats.org/drawingml/2006/main" noGrp="1"/>
+          </p:cNvSpPr>
+          <p:nvPr/>
+        </p:nvSpPr>
+        <p:spPr>
+          <a:xfrm xmlns:a="http://schemas.openxmlformats.org/drawingml/2006/main">
+            <a:off x="419100" y="3562350"/>
+            <a:ext cx="6724650" cy="285750"/>
+          </a:xfrm>
+          <a:prstGeom xmlns:a="http://schemas.openxmlformats.org/drawingml/2006/main" prst="rect">
+            <a:avLst/>
+          </a:prstGeom>
+          <a:noFill xmlns:a="http://schemas.openxmlformats.org/drawingml/2006/main"/>
+          <a:ln xmlns:a="http://schemas.openxmlformats.org/drawingml/2006/main" w="0">
+            <a:noFill/>
+          </a:ln>
+        </p:spPr>
+        <p:txBody>
+          <a:bodyPr xmlns:a="http://schemas.openxmlformats.org/drawingml/2006/main" wrap="none" lIns="0" tIns="0" rIns="0" bIns="0" anchor="t">
+            <a:noAutofit/>
+          </a:bodyPr>
+          <a:lstStyle xmlns:a="http://schemas.openxmlformats.org/drawingml/2006/main"/>
+          <a:p xmlns:a="http://schemas.openxmlformats.org/drawingml/2006/main">
+            <a:pPr algn="l">
+              <a:defRPr sz="1425" b="0">
+                <a:solidFill>
+                  <a:srgbClr val="0B1B33"/>
+                </a:solidFill>
+                <a:latin typeface="Arial"/>
+                <a:ea typeface="Arial"/>
+                <a:cs typeface="Arial"/>
+              </a:defRPr>
+            </a:pPr>
+            <a:r>
+              <a:rPr sz="1425" b="0">
+                <a:solidFill>
+                  <a:srgbClr val="0B1B33"/>
+                </a:solidFill>
+                <a:latin typeface="Arial"/>
+                <a:ea typeface="Arial"/>
+                <a:cs typeface="Arial"/>
+              </a:rPr>
+              <a:t>facilities. Our service offering covers siphoning, plumbing, renovation and</a:t>
+            </a:r>
+          </a:p>
+        </p:txBody>
+      </p:sp>
+      <p:sp>
+        <p:nvSpPr>
+          <p:cNvPr id="7" name="profile-22">
+            <a:extLst xmlns:a="http://schemas.openxmlformats.org/drawingml/2006/main">
+              <a:ext uri="{FF2B5EF4-FFF2-40B4-BE49-F238E27FC236}">
+                <a16:creationId xmlns:a16="http://schemas.microsoft.com/office/drawing/2014/main" id="{4C219619-205A-4A2D-ABDD-3E9419E9AD75}"/>
+              </a:ext>
+            </a:extLst>
+          </p:cNvPr>
+          <p:cNvSpPr>
+            <a:spLocks xmlns:a="http://schemas.openxmlformats.org/drawingml/2006/main" noGrp="1"/>
+          </p:cNvSpPr>
+          <p:nvPr/>
+        </p:nvSpPr>
+        <p:spPr>
+          <a:xfrm xmlns:a="http://schemas.openxmlformats.org/drawingml/2006/main">
+            <a:off x="419100" y="3829050"/>
+            <a:ext cx="6724650" cy="285750"/>
+          </a:xfrm>
+          <a:prstGeom xmlns:a="http://schemas.openxmlformats.org/drawingml/2006/main" prst="rect">
+            <a:avLst/>
+          </a:prstGeom>
+          <a:noFill xmlns:a="http://schemas.openxmlformats.org/drawingml/2006/main"/>
+          <a:ln xmlns:a="http://schemas.openxmlformats.org/drawingml/2006/main" w="0">
+            <a:noFill/>
+          </a:ln>
+        </p:spPr>
+        <p:txBody>
+          <a:bodyPr xmlns:a="http://schemas.openxmlformats.org/drawingml/2006/main" wrap="none" lIns="0" tIns="0" rIns="0" bIns="0" anchor="t">
+            <a:noAutofit/>
+          </a:bodyPr>
+          <a:lstStyle xmlns:a="http://schemas.openxmlformats.org/drawingml/2006/main"/>
+          <a:p xmlns:a="http://schemas.openxmlformats.org/drawingml/2006/main">
+            <a:pPr algn="l">
+              <a:defRPr sz="1425" b="0">
+                <a:solidFill>
+                  <a:srgbClr val="0B1B33"/>
+                </a:solidFill>
+                <a:latin typeface="Arial"/>
+                <a:ea typeface="Arial"/>
+                <a:cs typeface="Arial"/>
+              </a:defRPr>
+            </a:pPr>
+            <a:r>
+              <a:rPr sz="1425" b="0">
+                <a:solidFill>
+                  <a:srgbClr val="0B1B33"/>
+                </a:solidFill>
+                <a:latin typeface="Arial"/>
+                <a:ea typeface="Arial"/>
+                <a:cs typeface="Arial"/>
+              </a:rPr>
+              <a:t>restoration, and pest control.</a:t>
+            </a:r>
+          </a:p>
+        </p:txBody>
+      </p:sp>
+      <p:sp>
+        <p:nvSpPr>
           <p:cNvPr id="8" name="profile-23">
             <a:extLst xmlns:a="http://schemas.openxmlformats.org/drawingml/2006/main">
               <a:ext uri="{FF2B5EF4-FFF2-40B4-BE49-F238E27FC236}">
-                <a16:creationId xmlns:a16="http://schemas.microsoft.com/office/drawing/2014/main" id="{C356F8A7-65AC-4809-A9CE-0E75AC5DAFFE}"/>
-              </a:ext>
-            </a:extLst>
-          </p:cNvPr>
-          <p:cNvSpPr>
-            <a:spLocks xmlns:a="http://schemas.openxmlformats.org/drawingml/2006/main" noGrp="1"/>
-          </p:cNvSpPr>
-          <p:nvPr/>
-        </p:nvSpPr>
-        <p:spPr>
-          <a:xfrm xmlns:a="http://schemas.openxmlformats.org/drawingml/2006/main">
-            <a:off x="419100" y="3171825"/>
-            <a:ext cx="6724650" cy="285750"/>
-          </a:xfrm>
-          <a:prstGeom xmlns:a="http://schemas.openxmlformats.org/drawingml/2006/main" prst="rect">
-            <a:avLst/>
-          </a:prstGeom>
-          <a:noFill xmlns:a="http://schemas.openxmlformats.org/drawingml/2006/main"/>
-          <a:ln xmlns:a="http://schemas.openxmlformats.org/drawingml/2006/main" w="0">
-            <a:noFill/>
-          </a:ln>
-        </p:spPr>
-        <p:txBody>
-          <a:bodyPr xmlns:a="http://schemas.openxmlformats.org/drawingml/2006/main" wrap="none" lIns="0" tIns="0" rIns="0" bIns="0" anchor="t">
-            <a:noAutofit/>
-          </a:bodyPr>
-          <a:lstStyle xmlns:a="http://schemas.openxmlformats.org/drawingml/2006/main"/>
-          <a:p xmlns:a="http://schemas.openxmlformats.org/drawingml/2006/main">
-            <a:pPr algn="l">
-              <a:defRPr sz="1425" b="0">
-                <a:solidFill>
-                  <a:srgbClr val="0B1B33"/>
-                </a:solidFill>
-                <a:latin typeface="Arial"/>
-                <a:ea typeface="Arial"/>
-                <a:cs typeface="Arial"/>
-              </a:defRPr>
-            </a:pPr>
-            <a:r>
-              <a:rPr sz="1425" b="0">
-                <a:solidFill>
-                  <a:srgbClr val="0B1B33"/>
-                </a:solidFill>
-                <a:latin typeface="Arial"/>
-                <a:ea typeface="Arial"/>
-                <a:cs typeface="Arial"/>
-              </a:rPr>
-              <a:t>Oceanides coordinates property services for homes, condominiums and company</a:t>
-            </a:r>
-          </a:p>
-        </p:txBody>
-      </p:sp>
-      <p:sp>
-        <p:nvSpPr>
-          <p:cNvPr id="9" name="profile-24">
-            <a:extLst xmlns:a="http://schemas.openxmlformats.org/drawingml/2006/main">
-              <a:ext uri="{FF2B5EF4-FFF2-40B4-BE49-F238E27FC236}">
-                <a16:creationId xmlns:a16="http://schemas.microsoft.com/office/drawing/2014/main" id="{F2BD2DB5-6255-432B-86CE-EB55CA9C6804}"/>
-              </a:ext>
-            </a:extLst>
-          </p:cNvPr>
-          <p:cNvSpPr>
-            <a:spLocks xmlns:a="http://schemas.openxmlformats.org/drawingml/2006/main" noGrp="1"/>
-          </p:cNvSpPr>
-          <p:nvPr/>
-        </p:nvSpPr>
-        <p:spPr>
-          <a:xfrm xmlns:a="http://schemas.openxmlformats.org/drawingml/2006/main">
-            <a:off x="419100" y="3438525"/>
-            <a:ext cx="6724650" cy="285750"/>
-          </a:xfrm>
-          <a:prstGeom xmlns:a="http://schemas.openxmlformats.org/drawingml/2006/main" prst="rect">
-            <a:avLst/>
-          </a:prstGeom>
-          <a:noFill xmlns:a="http://schemas.openxmlformats.org/drawingml/2006/main"/>
-          <a:ln xmlns:a="http://schemas.openxmlformats.org/drawingml/2006/main" w="0">
-            <a:noFill/>
-          </a:ln>
-        </p:spPr>
-        <p:txBody>
-          <a:bodyPr xmlns:a="http://schemas.openxmlformats.org/drawingml/2006/main" wrap="none" lIns="0" tIns="0" rIns="0" bIns="0" anchor="t">
-            <a:noAutofit/>
-          </a:bodyPr>
-          <a:lstStyle xmlns:a="http://schemas.openxmlformats.org/drawingml/2006/main"/>
-          <a:p xmlns:a="http://schemas.openxmlformats.org/drawingml/2006/main">
-            <a:pPr algn="l">
-              <a:defRPr sz="1425" b="0">
-                <a:solidFill>
-                  <a:srgbClr val="0B1B33"/>
-                </a:solidFill>
-                <a:latin typeface="Arial"/>
-                <a:ea typeface="Arial"/>
-                <a:cs typeface="Arial"/>
-              </a:defRPr>
-            </a:pPr>
-            <a:r>
-              <a:rPr sz="1425" b="0">
-                <a:solidFill>
-                  <a:srgbClr val="0B1B33"/>
-                </a:solidFill>
-                <a:latin typeface="Arial"/>
-                <a:ea typeface="Arial"/>
-                <a:cs typeface="Arial"/>
-              </a:rPr>
-              <a:t>facilities. Our service offering covers siphoning, plumbing, renovation and</a:t>
-            </a:r>
-          </a:p>
-        </p:txBody>
-      </p:sp>
-      <p:sp>
-        <p:nvSpPr>
-          <p:cNvPr id="10" name="profile-25">
-            <a:extLst xmlns:a="http://schemas.openxmlformats.org/drawingml/2006/main">
-              <a:ext uri="{FF2B5EF4-FFF2-40B4-BE49-F238E27FC236}">
-                <a16:creationId xmlns:a16="http://schemas.microsoft.com/office/drawing/2014/main" id="{E73025D9-E8A5-4CF3-A093-9F2A552D6F91}"/>
-              </a:ext>
-            </a:extLst>
-          </p:cNvPr>
-          <p:cNvSpPr>
-            <a:spLocks xmlns:a="http://schemas.openxmlformats.org/drawingml/2006/main" noGrp="1"/>
-          </p:cNvSpPr>
-          <p:nvPr/>
-        </p:nvSpPr>
-        <p:spPr>
-          <a:xfrm xmlns:a="http://schemas.openxmlformats.org/drawingml/2006/main">
-            <a:off x="419100" y="3705225"/>
-            <a:ext cx="6724650" cy="285750"/>
-          </a:xfrm>
-          <a:prstGeom xmlns:a="http://schemas.openxmlformats.org/drawingml/2006/main" prst="rect">
-            <a:avLst/>
-          </a:prstGeom>
-          <a:noFill xmlns:a="http://schemas.openxmlformats.org/drawingml/2006/main"/>
-          <a:ln xmlns:a="http://schemas.openxmlformats.org/drawingml/2006/main" w="0">
-            <a:noFill/>
-          </a:ln>
-        </p:spPr>
-        <p:txBody>
-          <a:bodyPr xmlns:a="http://schemas.openxmlformats.org/drawingml/2006/main" wrap="none" lIns="0" tIns="0" rIns="0" bIns="0" anchor="t">
-            <a:noAutofit/>
-          </a:bodyPr>
-          <a:lstStyle xmlns:a="http://schemas.openxmlformats.org/drawingml/2006/main"/>
-          <a:p xmlns:a="http://schemas.openxmlformats.org/drawingml/2006/main">
-            <a:pPr algn="l">
-              <a:defRPr sz="1425" b="0">
-                <a:solidFill>
-                  <a:srgbClr val="0B1B33"/>
-                </a:solidFill>
-                <a:latin typeface="Arial"/>
-                <a:ea typeface="Arial"/>
-                <a:cs typeface="Arial"/>
-              </a:defRPr>
-            </a:pPr>
-            <a:r>
-              <a:rPr sz="1425" b="0">
-                <a:solidFill>
-                  <a:srgbClr val="0B1B33"/>
-                </a:solidFill>
-                <a:latin typeface="Arial"/>
-                <a:ea typeface="Arial"/>
-                <a:cs typeface="Arial"/>
-              </a:rPr>
-              <a:t>restoration, and pest control.</a:t>
-            </a:r>
-          </a:p>
-        </p:txBody>
-      </p:sp>
-      <p:sp>
-        <p:nvSpPr>
-          <p:cNvPr id="11" name="profile-26">
-            <a:extLst xmlns:a="http://schemas.openxmlformats.org/drawingml/2006/main">
-              <a:ext uri="{FF2B5EF4-FFF2-40B4-BE49-F238E27FC236}">
-                <a16:creationId xmlns:a16="http://schemas.microsoft.com/office/drawing/2014/main" id="{C6925470-09CE-4445-B54B-239E2AA737D9}"/>
-              </a:ext>
-            </a:extLst>
-          </p:cNvPr>
-          <p:cNvSpPr>
-            <a:spLocks xmlns:a="http://schemas.openxmlformats.org/drawingml/2006/main" noGrp="1"/>
-          </p:cNvSpPr>
-          <p:nvPr/>
-        </p:nvSpPr>
-        <p:spPr>
-          <a:xfrm xmlns:a="http://schemas.openxmlformats.org/drawingml/2006/main">
-            <a:off x="0" y="4371975"/>
-            <a:ext cx="7562850" cy="2219325"/>
+                <a16:creationId xmlns:a16="http://schemas.microsoft.com/office/drawing/2014/main" id="{D7F3C403-BEB3-41C9-AD69-01690B4B6A54}"/>
+              </a:ext>
+            </a:extLst>
+          </p:cNvPr>
+          <p:cNvSpPr>
+            <a:spLocks xmlns:a="http://schemas.openxmlformats.org/drawingml/2006/main" noGrp="1"/>
+          </p:cNvSpPr>
+          <p:nvPr/>
+        </p:nvSpPr>
+        <p:spPr>
+          <a:xfrm xmlns:a="http://schemas.openxmlformats.org/drawingml/2006/main">
+            <a:off x="0" y="4524375"/>
+            <a:ext cx="7562850" cy="2143125"/>
           </a:xfrm>
           <a:custGeom xmlns:a="http://schemas.openxmlformats.org/drawingml/2006/main">
             <a:pathLst>
-              <a:path w="7562850" h="2219325">
+              <a:path w="7562850" h="2143125">
                 <a:moveTo>
                   <a:pt x="0" y="0"/>
                 </a:moveTo>
@@ -3084,10 +2904,10 @@
                   <a:pt x="7562850" y="0"/>
                 </a:lnTo>
                 <a:lnTo>
-                  <a:pt x="6715125" y="2219325"/>
+                  <a:pt x="6715125" y="2143125"/>
                 </a:lnTo>
                 <a:lnTo>
-                  <a:pt x="0" y="2219325"/>
+                  <a:pt x="0" y="2143125"/>
                 </a:lnTo>
                 <a:close/>
               </a:path>
@@ -3103,21 +2923,21 @@
       </p:sp>
       <p:sp>
         <p:nvSpPr>
-          <p:cNvPr id="12" name="profile-27">
-            <a:extLst xmlns:a="http://schemas.openxmlformats.org/drawingml/2006/main">
-              <a:ext uri="{FF2B5EF4-FFF2-40B4-BE49-F238E27FC236}">
-                <a16:creationId xmlns:a16="http://schemas.microsoft.com/office/drawing/2014/main" id="{131FF502-D5F7-45F1-8E42-A868E983E053}"/>
-              </a:ext>
-            </a:extLst>
-          </p:cNvPr>
-          <p:cNvSpPr>
-            <a:spLocks xmlns:a="http://schemas.openxmlformats.org/drawingml/2006/main" noGrp="1"/>
-          </p:cNvSpPr>
-          <p:nvPr/>
-        </p:nvSpPr>
-        <p:spPr>
-          <a:xfrm xmlns:a="http://schemas.openxmlformats.org/drawingml/2006/main">
-            <a:off x="419100" y="4638675"/>
+          <p:cNvPr id="9" name="profile-24">
+            <a:extLst xmlns:a="http://schemas.openxmlformats.org/drawingml/2006/main">
+              <a:ext uri="{FF2B5EF4-FFF2-40B4-BE49-F238E27FC236}">
+                <a16:creationId xmlns:a16="http://schemas.microsoft.com/office/drawing/2014/main" id="{604E2F4B-6986-47ED-A98F-1E53C7A151A6}"/>
+              </a:ext>
+            </a:extLst>
+          </p:cNvPr>
+          <p:cNvSpPr>
+            <a:spLocks xmlns:a="http://schemas.openxmlformats.org/drawingml/2006/main" noGrp="1"/>
+          </p:cNvSpPr>
+          <p:nvPr/>
+        </p:nvSpPr>
+        <p:spPr>
+          <a:xfrm xmlns:a="http://schemas.openxmlformats.org/drawingml/2006/main">
+            <a:off x="419100" y="4791075"/>
             <a:ext cx="6334125" cy="378143"/>
           </a:xfrm>
           <a:prstGeom xmlns:a="http://schemas.openxmlformats.org/drawingml/2006/main" prst="rect">
@@ -3160,181 +2980,181 @@
       </p:sp>
       <p:sp>
         <p:nvSpPr>
+          <p:cNvPr id="10" name="profile-25">
+            <a:extLst xmlns:a="http://schemas.openxmlformats.org/drawingml/2006/main">
+              <a:ext uri="{FF2B5EF4-FFF2-40B4-BE49-F238E27FC236}">
+                <a16:creationId xmlns:a16="http://schemas.microsoft.com/office/drawing/2014/main" id="{40A93782-8AFC-4753-AAA2-42C38D1E6FDC}"/>
+              </a:ext>
+            </a:extLst>
+          </p:cNvPr>
+          <p:cNvSpPr>
+            <a:spLocks xmlns:a="http://schemas.openxmlformats.org/drawingml/2006/main" noGrp="1"/>
+          </p:cNvSpPr>
+          <p:nvPr/>
+        </p:nvSpPr>
+        <p:spPr>
+          <a:xfrm xmlns:a="http://schemas.openxmlformats.org/drawingml/2006/main">
+            <a:off x="419100" y="5276850"/>
+            <a:ext cx="6191250" cy="276225"/>
+          </a:xfrm>
+          <a:prstGeom xmlns:a="http://schemas.openxmlformats.org/drawingml/2006/main" prst="rect">
+            <a:avLst/>
+          </a:prstGeom>
+          <a:noFill xmlns:a="http://schemas.openxmlformats.org/drawingml/2006/main"/>
+          <a:ln xmlns:a="http://schemas.openxmlformats.org/drawingml/2006/main" w="0">
+            <a:noFill/>
+          </a:ln>
+        </p:spPr>
+        <p:txBody>
+          <a:bodyPr xmlns:a="http://schemas.openxmlformats.org/drawingml/2006/main" wrap="none" lIns="0" tIns="0" rIns="0" bIns="0" anchor="t">
+            <a:noAutofit/>
+          </a:bodyPr>
+          <a:lstStyle xmlns:a="http://schemas.openxmlformats.org/drawingml/2006/main"/>
+          <a:p xmlns:a="http://schemas.openxmlformats.org/drawingml/2006/main">
+            <a:pPr algn="l">
+              <a:defRPr sz="1350" b="0">
+                <a:solidFill>
+                  <a:srgbClr val="DFE8F5"/>
+                </a:solidFill>
+                <a:latin typeface="Arial"/>
+                <a:ea typeface="Arial"/>
+                <a:cs typeface="Arial"/>
+              </a:defRPr>
+            </a:pPr>
+            <a:r>
+              <a:rPr sz="1350" b="0">
+                <a:solidFill>
+                  <a:srgbClr val="DFE8F5"/>
+                </a:solidFill>
+                <a:latin typeface="Arial"/>
+                <a:ea typeface="Arial"/>
+                <a:cs typeface="Arial"/>
+              </a:rPr>
+              <a:t>Oceanides remains your main contact from the initial inquiry to turnover. We</a:t>
+            </a:r>
+          </a:p>
+        </p:txBody>
+      </p:sp>
+      <p:sp>
+        <p:nvSpPr>
+          <p:cNvPr id="11" name="profile-26">
+            <a:extLst xmlns:a="http://schemas.openxmlformats.org/drawingml/2006/main">
+              <a:ext uri="{FF2B5EF4-FFF2-40B4-BE49-F238E27FC236}">
+                <a16:creationId xmlns:a16="http://schemas.microsoft.com/office/drawing/2014/main" id="{819AE3AF-AC49-45FC-942D-C896FE630446}"/>
+              </a:ext>
+            </a:extLst>
+          </p:cNvPr>
+          <p:cNvSpPr>
+            <a:spLocks xmlns:a="http://schemas.openxmlformats.org/drawingml/2006/main" noGrp="1"/>
+          </p:cNvSpPr>
+          <p:nvPr/>
+        </p:nvSpPr>
+        <p:spPr>
+          <a:xfrm xmlns:a="http://schemas.openxmlformats.org/drawingml/2006/main">
+            <a:off x="419100" y="5534025"/>
+            <a:ext cx="6191250" cy="276225"/>
+          </a:xfrm>
+          <a:prstGeom xmlns:a="http://schemas.openxmlformats.org/drawingml/2006/main" prst="rect">
+            <a:avLst/>
+          </a:prstGeom>
+          <a:noFill xmlns:a="http://schemas.openxmlformats.org/drawingml/2006/main"/>
+          <a:ln xmlns:a="http://schemas.openxmlformats.org/drawingml/2006/main" w="0">
+            <a:noFill/>
+          </a:ln>
+        </p:spPr>
+        <p:txBody>
+          <a:bodyPr xmlns:a="http://schemas.openxmlformats.org/drawingml/2006/main" wrap="none" lIns="0" tIns="0" rIns="0" bIns="0" anchor="t">
+            <a:noAutofit/>
+          </a:bodyPr>
+          <a:lstStyle xmlns:a="http://schemas.openxmlformats.org/drawingml/2006/main"/>
+          <a:p xmlns:a="http://schemas.openxmlformats.org/drawingml/2006/main">
+            <a:pPr algn="l">
+              <a:defRPr sz="1350" b="0">
+                <a:solidFill>
+                  <a:srgbClr val="DFE8F5"/>
+                </a:solidFill>
+                <a:latin typeface="Arial"/>
+                <a:ea typeface="Arial"/>
+                <a:cs typeface="Arial"/>
+              </a:defRPr>
+            </a:pPr>
+            <a:r>
+              <a:rPr sz="1350" b="0">
+                <a:solidFill>
+                  <a:srgbClr val="DFE8F5"/>
+                </a:solidFill>
+                <a:latin typeface="Arial"/>
+                <a:ea typeface="Arial"/>
+                <a:cs typeface="Arial"/>
+              </a:rPr>
+              <a:t>coordinate the site assessment, quotation and service delivery, including</a:t>
+            </a:r>
+          </a:p>
+        </p:txBody>
+      </p:sp>
+      <p:sp>
+        <p:nvSpPr>
+          <p:cNvPr id="12" name="profile-27">
+            <a:extLst xmlns:a="http://schemas.openxmlformats.org/drawingml/2006/main">
+              <a:ext uri="{FF2B5EF4-FFF2-40B4-BE49-F238E27FC236}">
+                <a16:creationId xmlns:a16="http://schemas.microsoft.com/office/drawing/2014/main" id="{9B7C35C3-9DC6-4A17-9089-602E49231AF3}"/>
+              </a:ext>
+            </a:extLst>
+          </p:cNvPr>
+          <p:cNvSpPr>
+            <a:spLocks xmlns:a="http://schemas.openxmlformats.org/drawingml/2006/main" noGrp="1"/>
+          </p:cNvSpPr>
+          <p:nvPr/>
+        </p:nvSpPr>
+        <p:spPr>
+          <a:xfrm xmlns:a="http://schemas.openxmlformats.org/drawingml/2006/main">
+            <a:off x="419100" y="5791200"/>
+            <a:ext cx="6191250" cy="276225"/>
+          </a:xfrm>
+          <a:prstGeom xmlns:a="http://schemas.openxmlformats.org/drawingml/2006/main" prst="rect">
+            <a:avLst/>
+          </a:prstGeom>
+          <a:noFill xmlns:a="http://schemas.openxmlformats.org/drawingml/2006/main"/>
+          <a:ln xmlns:a="http://schemas.openxmlformats.org/drawingml/2006/main" w="0">
+            <a:noFill/>
+          </a:ln>
+        </p:spPr>
+        <p:txBody>
+          <a:bodyPr xmlns:a="http://schemas.openxmlformats.org/drawingml/2006/main" wrap="none" lIns="0" tIns="0" rIns="0" bIns="0" anchor="t">
+            <a:noAutofit/>
+          </a:bodyPr>
+          <a:lstStyle xmlns:a="http://schemas.openxmlformats.org/drawingml/2006/main"/>
+          <a:p xmlns:a="http://schemas.openxmlformats.org/drawingml/2006/main">
+            <a:pPr algn="l">
+              <a:defRPr sz="1350" b="0">
+                <a:solidFill>
+                  <a:srgbClr val="DFE8F5"/>
+                </a:solidFill>
+                <a:latin typeface="Arial"/>
+                <a:ea typeface="Arial"/>
+                <a:cs typeface="Arial"/>
+              </a:defRPr>
+            </a:pPr>
+            <a:r>
+              <a:rPr sz="1350" b="0">
+                <a:solidFill>
+                  <a:srgbClr val="DFE8F5"/>
+                </a:solidFill>
+                <a:latin typeface="Arial"/>
+                <a:ea typeface="Arial"/>
+                <a:cs typeface="Arial"/>
+              </a:rPr>
+              <a:t>specialist contractors where the work requires them.</a:t>
+            </a:r>
+          </a:p>
+        </p:txBody>
+      </p:sp>
+      <p:sp>
+        <p:nvSpPr>
           <p:cNvPr id="13" name="profile-28">
             <a:extLst xmlns:a="http://schemas.openxmlformats.org/drawingml/2006/main">
               <a:ext uri="{FF2B5EF4-FFF2-40B4-BE49-F238E27FC236}">
-                <a16:creationId xmlns:a16="http://schemas.microsoft.com/office/drawing/2014/main" id="{2A18E430-0D4B-4AA7-AEDB-6FEE36FB2BF8}"/>
-              </a:ext>
-            </a:extLst>
-          </p:cNvPr>
-          <p:cNvSpPr>
-            <a:spLocks xmlns:a="http://schemas.openxmlformats.org/drawingml/2006/main" noGrp="1"/>
-          </p:cNvSpPr>
-          <p:nvPr/>
-        </p:nvSpPr>
-        <p:spPr>
-          <a:xfrm xmlns:a="http://schemas.openxmlformats.org/drawingml/2006/main">
-            <a:off x="419100" y="5162550"/>
-            <a:ext cx="6191250" cy="276225"/>
-          </a:xfrm>
-          <a:prstGeom xmlns:a="http://schemas.openxmlformats.org/drawingml/2006/main" prst="rect">
-            <a:avLst/>
-          </a:prstGeom>
-          <a:noFill xmlns:a="http://schemas.openxmlformats.org/drawingml/2006/main"/>
-          <a:ln xmlns:a="http://schemas.openxmlformats.org/drawingml/2006/main" w="0">
-            <a:noFill/>
-          </a:ln>
-        </p:spPr>
-        <p:txBody>
-          <a:bodyPr xmlns:a="http://schemas.openxmlformats.org/drawingml/2006/main" wrap="none" lIns="0" tIns="0" rIns="0" bIns="0" anchor="t">
-            <a:noAutofit/>
-          </a:bodyPr>
-          <a:lstStyle xmlns:a="http://schemas.openxmlformats.org/drawingml/2006/main"/>
-          <a:p xmlns:a="http://schemas.openxmlformats.org/drawingml/2006/main">
-            <a:pPr algn="l">
-              <a:defRPr sz="1350" b="0">
-                <a:solidFill>
-                  <a:srgbClr val="DFE8F5"/>
-                </a:solidFill>
-                <a:latin typeface="Arial"/>
-                <a:ea typeface="Arial"/>
-                <a:cs typeface="Arial"/>
-              </a:defRPr>
-            </a:pPr>
-            <a:r>
-              <a:rPr sz="1350" b="0">
-                <a:solidFill>
-                  <a:srgbClr val="DFE8F5"/>
-                </a:solidFill>
-                <a:latin typeface="Arial"/>
-                <a:ea typeface="Arial"/>
-                <a:cs typeface="Arial"/>
-              </a:rPr>
-              <a:t>Oceanides remains your main contact from the initial inquiry to turnover. We</a:t>
-            </a:r>
-          </a:p>
-        </p:txBody>
-      </p:sp>
-      <p:sp>
-        <p:nvSpPr>
-          <p:cNvPr id="14" name="profile-29">
-            <a:extLst xmlns:a="http://schemas.openxmlformats.org/drawingml/2006/main">
-              <a:ext uri="{FF2B5EF4-FFF2-40B4-BE49-F238E27FC236}">
-                <a16:creationId xmlns:a16="http://schemas.microsoft.com/office/drawing/2014/main" id="{8B460EC9-1918-4D33-9B45-24B09D0913AA}"/>
-              </a:ext>
-            </a:extLst>
-          </p:cNvPr>
-          <p:cNvSpPr>
-            <a:spLocks xmlns:a="http://schemas.openxmlformats.org/drawingml/2006/main" noGrp="1"/>
-          </p:cNvSpPr>
-          <p:nvPr/>
-        </p:nvSpPr>
-        <p:spPr>
-          <a:xfrm xmlns:a="http://schemas.openxmlformats.org/drawingml/2006/main">
-            <a:off x="419100" y="5419725"/>
-            <a:ext cx="6191250" cy="276225"/>
-          </a:xfrm>
-          <a:prstGeom xmlns:a="http://schemas.openxmlformats.org/drawingml/2006/main" prst="rect">
-            <a:avLst/>
-          </a:prstGeom>
-          <a:noFill xmlns:a="http://schemas.openxmlformats.org/drawingml/2006/main"/>
-          <a:ln xmlns:a="http://schemas.openxmlformats.org/drawingml/2006/main" w="0">
-            <a:noFill/>
-          </a:ln>
-        </p:spPr>
-        <p:txBody>
-          <a:bodyPr xmlns:a="http://schemas.openxmlformats.org/drawingml/2006/main" wrap="none" lIns="0" tIns="0" rIns="0" bIns="0" anchor="t">
-            <a:noAutofit/>
-          </a:bodyPr>
-          <a:lstStyle xmlns:a="http://schemas.openxmlformats.org/drawingml/2006/main"/>
-          <a:p xmlns:a="http://schemas.openxmlformats.org/drawingml/2006/main">
-            <a:pPr algn="l">
-              <a:defRPr sz="1350" b="0">
-                <a:solidFill>
-                  <a:srgbClr val="DFE8F5"/>
-                </a:solidFill>
-                <a:latin typeface="Arial"/>
-                <a:ea typeface="Arial"/>
-                <a:cs typeface="Arial"/>
-              </a:defRPr>
-            </a:pPr>
-            <a:r>
-              <a:rPr sz="1350" b="0">
-                <a:solidFill>
-                  <a:srgbClr val="DFE8F5"/>
-                </a:solidFill>
-                <a:latin typeface="Arial"/>
-                <a:ea typeface="Arial"/>
-                <a:cs typeface="Arial"/>
-              </a:rPr>
-              <a:t>coordinate the site assessment, quotation and service delivery, including</a:t>
-            </a:r>
-          </a:p>
-        </p:txBody>
-      </p:sp>
-      <p:sp>
-        <p:nvSpPr>
-          <p:cNvPr id="15" name="profile-30">
-            <a:extLst xmlns:a="http://schemas.openxmlformats.org/drawingml/2006/main">
-              <a:ext uri="{FF2B5EF4-FFF2-40B4-BE49-F238E27FC236}">
-                <a16:creationId xmlns:a16="http://schemas.microsoft.com/office/drawing/2014/main" id="{6241135E-EA48-456C-8A06-CE1C49DFBDC2}"/>
-              </a:ext>
-            </a:extLst>
-          </p:cNvPr>
-          <p:cNvSpPr>
-            <a:spLocks xmlns:a="http://schemas.openxmlformats.org/drawingml/2006/main" noGrp="1"/>
-          </p:cNvSpPr>
-          <p:nvPr/>
-        </p:nvSpPr>
-        <p:spPr>
-          <a:xfrm xmlns:a="http://schemas.openxmlformats.org/drawingml/2006/main">
-            <a:off x="419100" y="5676900"/>
-            <a:ext cx="6191250" cy="276225"/>
-          </a:xfrm>
-          <a:prstGeom xmlns:a="http://schemas.openxmlformats.org/drawingml/2006/main" prst="rect">
-            <a:avLst/>
-          </a:prstGeom>
-          <a:noFill xmlns:a="http://schemas.openxmlformats.org/drawingml/2006/main"/>
-          <a:ln xmlns:a="http://schemas.openxmlformats.org/drawingml/2006/main" w="0">
-            <a:noFill/>
-          </a:ln>
-        </p:spPr>
-        <p:txBody>
-          <a:bodyPr xmlns:a="http://schemas.openxmlformats.org/drawingml/2006/main" wrap="none" lIns="0" tIns="0" rIns="0" bIns="0" anchor="t">
-            <a:noAutofit/>
-          </a:bodyPr>
-          <a:lstStyle xmlns:a="http://schemas.openxmlformats.org/drawingml/2006/main"/>
-          <a:p xmlns:a="http://schemas.openxmlformats.org/drawingml/2006/main">
-            <a:pPr algn="l">
-              <a:defRPr sz="1350" b="0">
-                <a:solidFill>
-                  <a:srgbClr val="DFE8F5"/>
-                </a:solidFill>
-                <a:latin typeface="Arial"/>
-                <a:ea typeface="Arial"/>
-                <a:cs typeface="Arial"/>
-              </a:defRPr>
-            </a:pPr>
-            <a:r>
-              <a:rPr sz="1350" b="0">
-                <a:solidFill>
-                  <a:srgbClr val="DFE8F5"/>
-                </a:solidFill>
-                <a:latin typeface="Arial"/>
-                <a:ea typeface="Arial"/>
-                <a:cs typeface="Arial"/>
-              </a:rPr>
-              <a:t>specialist contractors where the work requires them.</a:t>
-            </a:r>
-          </a:p>
-        </p:txBody>
-      </p:sp>
-      <p:sp>
-        <p:nvSpPr>
-          <p:cNvPr id="16" name="profile-31">
-            <a:extLst xmlns:a="http://schemas.openxmlformats.org/drawingml/2006/main">
-              <a:ext uri="{FF2B5EF4-FFF2-40B4-BE49-F238E27FC236}">
-                <a16:creationId xmlns:a16="http://schemas.microsoft.com/office/drawing/2014/main" id="{4360E7D1-3B4D-46AC-9CCA-C76BA0A8E55E}"/>
+                <a16:creationId xmlns:a16="http://schemas.microsoft.com/office/drawing/2014/main" id="{8022EC4C-197A-4143-A19E-3E1454E33A0B}"/>
               </a:ext>
             </a:extLst>
           </p:cNvPr>
@@ -3388,10 +3208,10 @@
       </p:sp>
       <p:sp>
         <p:nvSpPr>
-          <p:cNvPr id="17" name="profile-32">
-            <a:extLst xmlns:a="http://schemas.openxmlformats.org/drawingml/2006/main">
-              <a:ext uri="{FF2B5EF4-FFF2-40B4-BE49-F238E27FC236}">
-                <a16:creationId xmlns:a16="http://schemas.microsoft.com/office/drawing/2014/main" id="{C2780862-D80F-426F-B802-1DD90838F237}"/>
+          <p:cNvPr id="14" name="profile-29">
+            <a:extLst xmlns:a="http://schemas.openxmlformats.org/drawingml/2006/main">
+              <a:ext uri="{FF2B5EF4-FFF2-40B4-BE49-F238E27FC236}">
+                <a16:creationId xmlns:a16="http://schemas.microsoft.com/office/drawing/2014/main" id="{9F7A0BF6-BF22-4CFE-9CC9-9466D15E7480}"/>
               </a:ext>
             </a:extLst>
           </p:cNvPr>
@@ -3445,10 +3265,10 @@
       </p:sp>
       <p:sp>
         <p:nvSpPr>
-          <p:cNvPr id="18" name="profile-33">
-            <a:extLst xmlns:a="http://schemas.openxmlformats.org/drawingml/2006/main">
-              <a:ext uri="{FF2B5EF4-FFF2-40B4-BE49-F238E27FC236}">
-                <a16:creationId xmlns:a16="http://schemas.microsoft.com/office/drawing/2014/main" id="{CD6BD492-B9A7-4131-8918-26778B63EDC6}"/>
+          <p:cNvPr id="15" name="profile-30">
+            <a:extLst xmlns:a="http://schemas.openxmlformats.org/drawingml/2006/main">
+              <a:ext uri="{FF2B5EF4-FFF2-40B4-BE49-F238E27FC236}">
+                <a16:creationId xmlns:a16="http://schemas.microsoft.com/office/drawing/2014/main" id="{747A536F-3587-4D6F-ACC9-9C726E811931}"/>
               </a:ext>
             </a:extLst>
           </p:cNvPr>
@@ -3502,10 +3322,10 @@
       </p:sp>
       <p:sp>
         <p:nvSpPr>
-          <p:cNvPr id="19" name="profile-34">
-            <a:extLst xmlns:a="http://schemas.openxmlformats.org/drawingml/2006/main">
-              <a:ext uri="{FF2B5EF4-FFF2-40B4-BE49-F238E27FC236}">
-                <a16:creationId xmlns:a16="http://schemas.microsoft.com/office/drawing/2014/main" id="{990CA4C0-510E-4C6A-AB28-51C06A11450C}"/>
+          <p:cNvPr id="16" name="profile-31">
+            <a:extLst xmlns:a="http://schemas.openxmlformats.org/drawingml/2006/main">
+              <a:ext uri="{FF2B5EF4-FFF2-40B4-BE49-F238E27FC236}">
+                <a16:creationId xmlns:a16="http://schemas.microsoft.com/office/drawing/2014/main" id="{FBD49BB7-6459-4B4C-BD42-69AC69DB32A7}"/>
               </a:ext>
             </a:extLst>
           </p:cNvPr>
@@ -3559,10 +3379,10 @@
       </p:sp>
       <p:sp>
         <p:nvSpPr>
-          <p:cNvPr id="20" name="profile-35">
-            <a:extLst xmlns:a="http://schemas.openxmlformats.org/drawingml/2006/main">
-              <a:ext uri="{FF2B5EF4-FFF2-40B4-BE49-F238E27FC236}">
-                <a16:creationId xmlns:a16="http://schemas.microsoft.com/office/drawing/2014/main" id="{65BBFA28-5FDD-4F5C-BC1D-65D8233AA335}"/>
+          <p:cNvPr id="17" name="profile-32">
+            <a:extLst xmlns:a="http://schemas.openxmlformats.org/drawingml/2006/main">
+              <a:ext uri="{FF2B5EF4-FFF2-40B4-BE49-F238E27FC236}">
+                <a16:creationId xmlns:a16="http://schemas.microsoft.com/office/drawing/2014/main" id="{71145EB7-9A2F-4DCB-BCFB-B8A3C3014AC1}"/>
               </a:ext>
             </a:extLst>
           </p:cNvPr>
@@ -3616,10 +3436,10 @@
       </p:sp>
       <p:sp>
         <p:nvSpPr>
-          <p:cNvPr id="21" name="profile-36">
-            <a:extLst xmlns:a="http://schemas.openxmlformats.org/drawingml/2006/main">
-              <a:ext uri="{FF2B5EF4-FFF2-40B4-BE49-F238E27FC236}">
-                <a16:creationId xmlns:a16="http://schemas.microsoft.com/office/drawing/2014/main" id="{FF554122-A172-4A6E-9D90-A5A4A9621868}"/>
+          <p:cNvPr id="18" name="profile-33">
+            <a:extLst xmlns:a="http://schemas.openxmlformats.org/drawingml/2006/main">
+              <a:ext uri="{FF2B5EF4-FFF2-40B4-BE49-F238E27FC236}">
+                <a16:creationId xmlns:a16="http://schemas.microsoft.com/office/drawing/2014/main" id="{F17BEAD3-5657-4F3C-936F-581764E136C5}"/>
               </a:ext>
             </a:extLst>
           </p:cNvPr>
@@ -3673,10 +3493,10 @@
       </p:sp>
       <p:sp>
         <p:nvSpPr>
-          <p:cNvPr id="22" name="profile-37">
-            <a:extLst xmlns:a="http://schemas.openxmlformats.org/drawingml/2006/main">
-              <a:ext uri="{FF2B5EF4-FFF2-40B4-BE49-F238E27FC236}">
-                <a16:creationId xmlns:a16="http://schemas.microsoft.com/office/drawing/2014/main" id="{2749C0A0-14C5-495F-BC6E-C8D8F5DFFDF4}"/>
+          <p:cNvPr id="19" name="profile-34">
+            <a:extLst xmlns:a="http://schemas.openxmlformats.org/drawingml/2006/main">
+              <a:ext uri="{FF2B5EF4-FFF2-40B4-BE49-F238E27FC236}">
+                <a16:creationId xmlns:a16="http://schemas.microsoft.com/office/drawing/2014/main" id="{344A87FE-C5F6-45A2-8422-C9C4ED57ABF3}"/>
               </a:ext>
             </a:extLst>
           </p:cNvPr>
@@ -3730,10 +3550,10 @@
       </p:sp>
       <p:sp>
         <p:nvSpPr>
-          <p:cNvPr id="23" name="profile-38">
-            <a:extLst xmlns:a="http://schemas.openxmlformats.org/drawingml/2006/main">
-              <a:ext uri="{FF2B5EF4-FFF2-40B4-BE49-F238E27FC236}">
-                <a16:creationId xmlns:a16="http://schemas.microsoft.com/office/drawing/2014/main" id="{A5D72ABB-F29C-4DFD-AEBC-BAF68B033FC5}"/>
+          <p:cNvPr id="20" name="profile-35">
+            <a:extLst xmlns:a="http://schemas.openxmlformats.org/drawingml/2006/main">
+              <a:ext uri="{FF2B5EF4-FFF2-40B4-BE49-F238E27FC236}">
+                <a16:creationId xmlns:a16="http://schemas.microsoft.com/office/drawing/2014/main" id="{90685F26-B3F3-4CC3-A5A9-DBF13BC97DE1}"/>
               </a:ext>
             </a:extLst>
           </p:cNvPr>
@@ -3787,10 +3607,10 @@
       </p:sp>
       <p:sp>
         <p:nvSpPr>
-          <p:cNvPr id="24" name="profile-39">
-            <a:extLst xmlns:a="http://schemas.openxmlformats.org/drawingml/2006/main">
-              <a:ext uri="{FF2B5EF4-FFF2-40B4-BE49-F238E27FC236}">
-                <a16:creationId xmlns:a16="http://schemas.microsoft.com/office/drawing/2014/main" id="{5E33A7B5-E766-4B15-9C00-761C872D05C2}"/>
+          <p:cNvPr id="21" name="profile-36">
+            <a:extLst xmlns:a="http://schemas.openxmlformats.org/drawingml/2006/main">
+              <a:ext uri="{FF2B5EF4-FFF2-40B4-BE49-F238E27FC236}">
+                <a16:creationId xmlns:a16="http://schemas.microsoft.com/office/drawing/2014/main" id="{676D706F-5580-4F72-9121-6D82535BCE0C}"/>
               </a:ext>
             </a:extLst>
           </p:cNvPr>
@@ -3844,10 +3664,10 @@
       </p:sp>
       <p:sp>
         <p:nvSpPr>
-          <p:cNvPr id="25" name="profile-40">
-            <a:extLst xmlns:a="http://schemas.openxmlformats.org/drawingml/2006/main">
-              <a:ext uri="{FF2B5EF4-FFF2-40B4-BE49-F238E27FC236}">
-                <a16:creationId xmlns:a16="http://schemas.microsoft.com/office/drawing/2014/main" id="{85DCD665-6C1A-4FA1-98B6-CAB8E588E59D}"/>
+          <p:cNvPr id="22" name="profile-37">
+            <a:extLst xmlns:a="http://schemas.openxmlformats.org/drawingml/2006/main">
+              <a:ext uri="{FF2B5EF4-FFF2-40B4-BE49-F238E27FC236}">
+                <a16:creationId xmlns:a16="http://schemas.microsoft.com/office/drawing/2014/main" id="{C330803B-9523-4392-A481-AAF2AD8CB3EC}"/>
               </a:ext>
             </a:extLst>
           </p:cNvPr>
@@ -3901,10 +3721,10 @@
       </p:sp>
       <p:sp>
         <p:nvSpPr>
-          <p:cNvPr id="26" name="profile-41">
-            <a:extLst xmlns:a="http://schemas.openxmlformats.org/drawingml/2006/main">
-              <a:ext uri="{FF2B5EF4-FFF2-40B4-BE49-F238E27FC236}">
-                <a16:creationId xmlns:a16="http://schemas.microsoft.com/office/drawing/2014/main" id="{B7F546EF-ECCA-4532-9FD9-F353AEF47FC4}"/>
+          <p:cNvPr id="23" name="profile-38">
+            <a:extLst xmlns:a="http://schemas.openxmlformats.org/drawingml/2006/main">
+              <a:ext uri="{FF2B5EF4-FFF2-40B4-BE49-F238E27FC236}">
+                <a16:creationId xmlns:a16="http://schemas.microsoft.com/office/drawing/2014/main" id="{59C95138-7D7F-46BC-8C74-9046589355B8}"/>
               </a:ext>
             </a:extLst>
           </p:cNvPr>
@@ -3931,10 +3751,10 @@
       </p:sp>
       <p:sp>
         <p:nvSpPr>
-          <p:cNvPr id="27" name="profile-42">
-            <a:extLst xmlns:a="http://schemas.openxmlformats.org/drawingml/2006/main">
-              <a:ext uri="{FF2B5EF4-FFF2-40B4-BE49-F238E27FC236}">
-                <a16:creationId xmlns:a16="http://schemas.microsoft.com/office/drawing/2014/main" id="{4507AFC2-E9E6-411C-B2CD-88CCF9658E59}"/>
+          <p:cNvPr id="24" name="profile-39">
+            <a:extLst xmlns:a="http://schemas.openxmlformats.org/drawingml/2006/main">
+              <a:ext uri="{FF2B5EF4-FFF2-40B4-BE49-F238E27FC236}">
+                <a16:creationId xmlns:a16="http://schemas.microsoft.com/office/drawing/2014/main" id="{4A4B33B6-6289-4AF1-B1A0-EE3B9DB0DFC1}"/>
               </a:ext>
             </a:extLst>
           </p:cNvPr>
@@ -3977,10 +3797,10 @@
       </p:sp>
       <p:sp>
         <p:nvSpPr>
-          <p:cNvPr id="28" name="profile-43">
-            <a:extLst xmlns:a="http://schemas.openxmlformats.org/drawingml/2006/main">
-              <a:ext uri="{FF2B5EF4-FFF2-40B4-BE49-F238E27FC236}">
-                <a16:creationId xmlns:a16="http://schemas.microsoft.com/office/drawing/2014/main" id="{10D3C3FA-5B9E-40AE-82D4-745BA849EBE8}"/>
+          <p:cNvPr id="25" name="profile-40">
+            <a:extLst xmlns:a="http://schemas.openxmlformats.org/drawingml/2006/main">
+              <a:ext uri="{FF2B5EF4-FFF2-40B4-BE49-F238E27FC236}">
+                <a16:creationId xmlns:a16="http://schemas.microsoft.com/office/drawing/2014/main" id="{BFC6F8FB-2389-4779-ADE3-CA6B15F7F822}"/>
               </a:ext>
             </a:extLst>
           </p:cNvPr>
@@ -4034,10 +3854,10 @@
       </p:sp>
       <p:sp>
         <p:nvSpPr>
-          <p:cNvPr id="29" name="profile-44">
-            <a:extLst xmlns:a="http://schemas.openxmlformats.org/drawingml/2006/main">
-              <a:ext uri="{FF2B5EF4-FFF2-40B4-BE49-F238E27FC236}">
-                <a16:creationId xmlns:a16="http://schemas.microsoft.com/office/drawing/2014/main" id="{1C583073-A86A-43F5-8603-E033833FA28D}"/>
+          <p:cNvPr id="26" name="profile-41">
+            <a:extLst xmlns:a="http://schemas.openxmlformats.org/drawingml/2006/main">
+              <a:ext uri="{FF2B5EF4-FFF2-40B4-BE49-F238E27FC236}">
+                <a16:creationId xmlns:a16="http://schemas.microsoft.com/office/drawing/2014/main" id="{264EC907-5987-4361-A4BB-A7628CECED63}"/>
               </a:ext>
             </a:extLst>
           </p:cNvPr>
@@ -4091,10 +3911,10 @@
       </p:sp>
       <p:sp>
         <p:nvSpPr>
-          <p:cNvPr id="30" name="profile-45">
-            <a:extLst xmlns:a="http://schemas.openxmlformats.org/drawingml/2006/main">
-              <a:ext uri="{FF2B5EF4-FFF2-40B4-BE49-F238E27FC236}">
-                <a16:creationId xmlns:a16="http://schemas.microsoft.com/office/drawing/2014/main" id="{E5B893F4-184A-4F83-BD6F-826015977624}"/>
+          <p:cNvPr id="27" name="profile-42">
+            <a:extLst xmlns:a="http://schemas.openxmlformats.org/drawingml/2006/main">
+              <a:ext uri="{FF2B5EF4-FFF2-40B4-BE49-F238E27FC236}">
+                <a16:creationId xmlns:a16="http://schemas.microsoft.com/office/drawing/2014/main" id="{F7430329-BA80-4FAF-BDA7-A1B317784D5A}"/>
               </a:ext>
             </a:extLst>
           </p:cNvPr>
@@ -4148,10 +3968,10 @@
       </p:sp>
       <p:sp>
         <p:nvSpPr>
-          <p:cNvPr id="31" name="profile-46">
-            <a:extLst xmlns:a="http://schemas.openxmlformats.org/drawingml/2006/main">
-              <a:ext uri="{FF2B5EF4-FFF2-40B4-BE49-F238E27FC236}">
-                <a16:creationId xmlns:a16="http://schemas.microsoft.com/office/drawing/2014/main" id="{FA009375-CD61-44FF-98BC-0D6693DF675B}"/>
+          <p:cNvPr id="28" name="profile-43">
+            <a:extLst xmlns:a="http://schemas.openxmlformats.org/drawingml/2006/main">
+              <a:ext uri="{FF2B5EF4-FFF2-40B4-BE49-F238E27FC236}">
+                <a16:creationId xmlns:a16="http://schemas.microsoft.com/office/drawing/2014/main" id="{FAA3BAB3-442C-4D7D-958D-00724A2FD329}"/>
               </a:ext>
             </a:extLst>
           </p:cNvPr>
@@ -4206,7 +4026,7 @@
     </p:spTree>
     <p:extLst>
       <p:ext uri="{BB962C8B-B14F-4D97-AF65-F5344CB8AC3E}">
-        <p14:creationId xmlns:p14="http://schemas.microsoft.com/office/powerpoint/2010/main" val="1641293404"/>
+        <p14:creationId xmlns:p14="http://schemas.microsoft.com/office/powerpoint/2010/main" val="1779448793"/>
       </p:ext>
     </p:extLst>
   </p:cSld>
@@ -4234,23 +4054,20 @@
       </p:grpSpPr>
       <p:pic>
         <p:nvPicPr>
-          <p:cNvPr id="38" name=""/>
+          <p:cNvPr id="34" name=""/>
           <p:cNvPicPr>
             <a:picLocks xmlns:a="http://schemas.openxmlformats.org/drawingml/2006/main" noChangeAspect="1"/>
           </p:cNvPicPr>
           <p:nvPr/>
         </p:nvPicPr>
         <p:blipFill>
-          <a:blip xmlns:r="http://schemas.openxmlformats.org/officeDocument/2006/relationships" xmlns:a="http://schemas.openxmlformats.org/drawingml/2006/main" r:embed="R7616935f7a8f4ab7"/>
-          <a:srcRect xmlns:a="http://schemas.openxmlformats.org/drawingml/2006/main" l="0" t="36566" r="0" b="36566"/>
-          <a:stretch xmlns:a="http://schemas.openxmlformats.org/drawingml/2006/main">
-            <a:fillRect l="0" t="0" r="0" b="0"/>
-          </a:stretch>
+          <a:blip xmlns:r="http://schemas.openxmlformats.org/officeDocument/2006/relationships" xmlns:a="http://schemas.openxmlformats.org/drawingml/2006/main" r:embed="R627519197d184678"/>
+          <a:stretch xmlns:a="http://schemas.openxmlformats.org/drawingml/2006/main"/>
         </p:blipFill>
         <p:spPr>
           <a:xfrm xmlns:a="http://schemas.openxmlformats.org/drawingml/2006/main">
             <a:off x="0" y="0"/>
-            <a:ext cx="7562850" cy="3048000"/>
+            <a:ext cx="7562850" cy="5041900"/>
           </a:xfrm>
           <a:prstGeom xmlns:a="http://schemas.openxmlformats.org/drawingml/2006/main" prst="rect">
             <a:avLst/>
@@ -4259,21 +4076,51 @@
       </p:pic>
       <p:sp>
         <p:nvSpPr>
-          <p:cNvPr id="2" name="profile-47">
-            <a:extLst xmlns:a="http://schemas.openxmlformats.org/drawingml/2006/main">
-              <a:ext uri="{FF2B5EF4-FFF2-40B4-BE49-F238E27FC236}">
-                <a16:creationId xmlns:a16="http://schemas.microsoft.com/office/drawing/2014/main" id="{38AF6E53-B324-4698-B9AF-7D8B353CFBA2}"/>
-              </a:ext>
-            </a:extLst>
-          </p:cNvPr>
-          <p:cNvSpPr>
-            <a:spLocks xmlns:a="http://schemas.openxmlformats.org/drawingml/2006/main" noGrp="1"/>
-          </p:cNvSpPr>
-          <p:nvPr/>
-        </p:nvSpPr>
-        <p:spPr>
-          <a:xfrm xmlns:a="http://schemas.openxmlformats.org/drawingml/2006/main">
-            <a:off x="257175" y="2324100"/>
+          <p:cNvPr id="2" name="profile-44">
+            <a:extLst xmlns:a="http://schemas.openxmlformats.org/drawingml/2006/main">
+              <a:ext uri="{FF2B5EF4-FFF2-40B4-BE49-F238E27FC236}">
+                <a16:creationId xmlns:a16="http://schemas.microsoft.com/office/drawing/2014/main" id="{6944B9AC-BAF4-46EF-AD07-65297A3F26D1}"/>
+              </a:ext>
+            </a:extLst>
+          </p:cNvPr>
+          <p:cNvSpPr>
+            <a:spLocks xmlns:a="http://schemas.openxmlformats.org/drawingml/2006/main" noGrp="1"/>
+          </p:cNvSpPr>
+          <p:nvPr/>
+        </p:nvSpPr>
+        <p:spPr>
+          <a:xfrm xmlns:a="http://schemas.openxmlformats.org/drawingml/2006/main">
+            <a:off x="0" y="4000500"/>
+            <a:ext cx="7562850" cy="1238250"/>
+          </a:xfrm>
+          <a:prstGeom xmlns:a="http://schemas.openxmlformats.org/drawingml/2006/main" prst="rect">
+            <a:avLst/>
+          </a:prstGeom>
+          <a:solidFill xmlns:a="http://schemas.openxmlformats.org/drawingml/2006/main">
+            <a:srgbClr val="F4F6FA"/>
+          </a:solidFill>
+          <a:ln xmlns:a="http://schemas.openxmlformats.org/drawingml/2006/main" w="0">
+            <a:noFill/>
+          </a:ln>
+        </p:spPr>
+      </p:sp>
+      <p:sp>
+        <p:nvSpPr>
+          <p:cNvPr id="3" name="profile-45">
+            <a:extLst xmlns:a="http://schemas.openxmlformats.org/drawingml/2006/main">
+              <a:ext uri="{FF2B5EF4-FFF2-40B4-BE49-F238E27FC236}">
+                <a16:creationId xmlns:a16="http://schemas.microsoft.com/office/drawing/2014/main" id="{317E9128-ADE1-4E50-BA45-0029481B5235}"/>
+              </a:ext>
+            </a:extLst>
+          </p:cNvPr>
+          <p:cNvSpPr>
+            <a:spLocks xmlns:a="http://schemas.openxmlformats.org/drawingml/2006/main" noGrp="1"/>
+          </p:cNvSpPr>
+          <p:nvPr/>
+        </p:nvSpPr>
+        <p:spPr>
+          <a:xfrm xmlns:a="http://schemas.openxmlformats.org/drawingml/2006/main">
+            <a:off x="257175" y="3276600"/>
             <a:ext cx="7000875" cy="1323975"/>
           </a:xfrm>
           <a:custGeom xmlns:a="http://schemas.openxmlformats.org/drawingml/2006/main">
@@ -4305,21 +4152,21 @@
       </p:sp>
       <p:sp>
         <p:nvSpPr>
-          <p:cNvPr id="3" name="profile-48">
-            <a:extLst xmlns:a="http://schemas.openxmlformats.org/drawingml/2006/main">
-              <a:ext uri="{FF2B5EF4-FFF2-40B4-BE49-F238E27FC236}">
-                <a16:creationId xmlns:a16="http://schemas.microsoft.com/office/drawing/2014/main" id="{88E13AA5-A4B8-4983-A18D-67C941B22894}"/>
-              </a:ext>
-            </a:extLst>
-          </p:cNvPr>
-          <p:cNvSpPr>
-            <a:spLocks xmlns:a="http://schemas.openxmlformats.org/drawingml/2006/main" noGrp="1"/>
-          </p:cNvSpPr>
-          <p:nvPr/>
-        </p:nvSpPr>
-        <p:spPr>
-          <a:xfrm xmlns:a="http://schemas.openxmlformats.org/drawingml/2006/main">
-            <a:off x="257175" y="2324100"/>
+          <p:cNvPr id="4" name="profile-46">
+            <a:extLst xmlns:a="http://schemas.openxmlformats.org/drawingml/2006/main">
+              <a:ext uri="{FF2B5EF4-FFF2-40B4-BE49-F238E27FC236}">
+                <a16:creationId xmlns:a16="http://schemas.microsoft.com/office/drawing/2014/main" id="{515B9FFE-6C85-4347-91F8-ED1978806FE8}"/>
+              </a:ext>
+            </a:extLst>
+          </p:cNvPr>
+          <p:cNvSpPr>
+            <a:spLocks xmlns:a="http://schemas.openxmlformats.org/drawingml/2006/main" noGrp="1"/>
+          </p:cNvSpPr>
+          <p:nvPr/>
+        </p:nvSpPr>
+        <p:spPr>
+          <a:xfrm xmlns:a="http://schemas.openxmlformats.org/drawingml/2006/main">
+            <a:off x="257175" y="3276600"/>
             <a:ext cx="6896100" cy="1238250"/>
           </a:xfrm>
           <a:custGeom xmlns:a="http://schemas.openxmlformats.org/drawingml/2006/main">
@@ -4351,21 +4198,21 @@
       </p:sp>
       <p:sp>
         <p:nvSpPr>
-          <p:cNvPr id="4" name="profile-49">
-            <a:extLst xmlns:a="http://schemas.openxmlformats.org/drawingml/2006/main">
-              <a:ext uri="{FF2B5EF4-FFF2-40B4-BE49-F238E27FC236}">
-                <a16:creationId xmlns:a16="http://schemas.microsoft.com/office/drawing/2014/main" id="{51442250-6687-4BEA-8285-EF07BEE9DEB8}"/>
-              </a:ext>
-            </a:extLst>
-          </p:cNvPr>
-          <p:cNvSpPr>
-            <a:spLocks xmlns:a="http://schemas.openxmlformats.org/drawingml/2006/main" noGrp="1"/>
-          </p:cNvSpPr>
-          <p:nvPr/>
-        </p:nvSpPr>
-        <p:spPr>
-          <a:xfrm xmlns:a="http://schemas.openxmlformats.org/drawingml/2006/main">
-            <a:off x="733425" y="2495550"/>
+          <p:cNvPr id="5" name="profile-47">
+            <a:extLst xmlns:a="http://schemas.openxmlformats.org/drawingml/2006/main">
+              <a:ext uri="{FF2B5EF4-FFF2-40B4-BE49-F238E27FC236}">
+                <a16:creationId xmlns:a16="http://schemas.microsoft.com/office/drawing/2014/main" id="{145C24C2-DCB6-4D55-A301-AF2539ECD28C}"/>
+              </a:ext>
+            </a:extLst>
+          </p:cNvPr>
+          <p:cNvSpPr>
+            <a:spLocks xmlns:a="http://schemas.openxmlformats.org/drawingml/2006/main" noGrp="1"/>
+          </p:cNvSpPr>
+          <p:nvPr/>
+        </p:nvSpPr>
+        <p:spPr>
+          <a:xfrm xmlns:a="http://schemas.openxmlformats.org/drawingml/2006/main">
+            <a:off x="733425" y="3448050"/>
             <a:ext cx="5800725" cy="445008"/>
           </a:xfrm>
           <a:prstGeom xmlns:a="http://schemas.openxmlformats.org/drawingml/2006/main" prst="rect">
@@ -4408,21 +4255,21 @@
       </p:sp>
       <p:sp>
         <p:nvSpPr>
-          <p:cNvPr id="5" name="profile-50">
-            <a:extLst xmlns:a="http://schemas.openxmlformats.org/drawingml/2006/main">
-              <a:ext uri="{FF2B5EF4-FFF2-40B4-BE49-F238E27FC236}">
-                <a16:creationId xmlns:a16="http://schemas.microsoft.com/office/drawing/2014/main" id="{5E9F668C-F024-4119-94F6-A8450D17AC29}"/>
-              </a:ext>
-            </a:extLst>
-          </p:cNvPr>
-          <p:cNvSpPr>
-            <a:spLocks xmlns:a="http://schemas.openxmlformats.org/drawingml/2006/main" noGrp="1"/>
-          </p:cNvSpPr>
-          <p:nvPr/>
-        </p:nvSpPr>
-        <p:spPr>
-          <a:xfrm xmlns:a="http://schemas.openxmlformats.org/drawingml/2006/main">
-            <a:off x="733425" y="2921508"/>
+          <p:cNvPr id="6" name="profile-48">
+            <a:extLst xmlns:a="http://schemas.openxmlformats.org/drawingml/2006/main">
+              <a:ext uri="{FF2B5EF4-FFF2-40B4-BE49-F238E27FC236}">
+                <a16:creationId xmlns:a16="http://schemas.microsoft.com/office/drawing/2014/main" id="{C4AFE0B7-B1F5-4315-A66F-D492749BDB49}"/>
+              </a:ext>
+            </a:extLst>
+          </p:cNvPr>
+          <p:cNvSpPr>
+            <a:spLocks xmlns:a="http://schemas.openxmlformats.org/drawingml/2006/main" noGrp="1"/>
+          </p:cNvSpPr>
+          <p:nvPr/>
+        </p:nvSpPr>
+        <p:spPr>
+          <a:xfrm xmlns:a="http://schemas.openxmlformats.org/drawingml/2006/main">
+            <a:off x="733425" y="3874008"/>
             <a:ext cx="5800725" cy="445008"/>
           </a:xfrm>
           <a:prstGeom xmlns:a="http://schemas.openxmlformats.org/drawingml/2006/main" prst="rect">
@@ -4465,21 +4312,21 @@
       </p:sp>
       <p:sp>
         <p:nvSpPr>
-          <p:cNvPr id="6" name="profile-51">
-            <a:extLst xmlns:a="http://schemas.openxmlformats.org/drawingml/2006/main">
-              <a:ext uri="{FF2B5EF4-FFF2-40B4-BE49-F238E27FC236}">
-                <a16:creationId xmlns:a16="http://schemas.microsoft.com/office/drawing/2014/main" id="{55EA9590-741E-4A9A-B4A7-B2298EC86786}"/>
-              </a:ext>
-            </a:extLst>
-          </p:cNvPr>
-          <p:cNvSpPr>
-            <a:spLocks xmlns:a="http://schemas.openxmlformats.org/drawingml/2006/main" noGrp="1"/>
-          </p:cNvSpPr>
-          <p:nvPr/>
-        </p:nvSpPr>
-        <p:spPr>
-          <a:xfrm xmlns:a="http://schemas.openxmlformats.org/drawingml/2006/main">
-            <a:off x="419100" y="3724275"/>
+          <p:cNvPr id="7" name="profile-49">
+            <a:extLst xmlns:a="http://schemas.openxmlformats.org/drawingml/2006/main">
+              <a:ext uri="{FF2B5EF4-FFF2-40B4-BE49-F238E27FC236}">
+                <a16:creationId xmlns:a16="http://schemas.microsoft.com/office/drawing/2014/main" id="{6DFC71FF-2DAB-4FA6-94FF-2AC9C386BD92}"/>
+              </a:ext>
+            </a:extLst>
+          </p:cNvPr>
+          <p:cNvSpPr>
+            <a:spLocks xmlns:a="http://schemas.openxmlformats.org/drawingml/2006/main" noGrp="1"/>
+          </p:cNvSpPr>
+          <p:nvPr/>
+        </p:nvSpPr>
+        <p:spPr>
+          <a:xfrm xmlns:a="http://schemas.openxmlformats.org/drawingml/2006/main">
+            <a:off x="419100" y="4733925"/>
             <a:ext cx="6724650" cy="155258"/>
           </a:xfrm>
           <a:prstGeom xmlns:a="http://schemas.openxmlformats.org/drawingml/2006/main" prst="rect">
@@ -4497,47 +4344,47 @@
           <a:lstStyle xmlns:a="http://schemas.openxmlformats.org/drawingml/2006/main"/>
           <a:p xmlns:a="http://schemas.openxmlformats.org/drawingml/2006/main">
             <a:pPr algn="l">
-              <a:defRPr sz="825" b="1">
-                <a:solidFill>
-                  <a:srgbClr val="1C63AD"/>
-                </a:solidFill>
-                <a:latin typeface="Arial"/>
-                <a:ea typeface="Arial"/>
-                <a:cs typeface="Arial"/>
-              </a:defRPr>
-            </a:pPr>
-            <a:r>
-              <a:rPr sz="825" b="1">
-                <a:solidFill>
-                  <a:srgbClr val="1C63AD"/>
-                </a:solidFill>
-                <a:latin typeface="Arial"/>
-                <a:ea typeface="Arial"/>
-                <a:cs typeface="Arial"/>
-              </a:rPr>
-              <a:t>BEFORE SERVICE / SAME SITE</a:t>
-            </a:r>
-          </a:p>
-        </p:txBody>
-      </p:sp>
-      <p:sp>
-        <p:nvSpPr>
-          <p:cNvPr id="7" name="profile-52">
-            <a:extLst xmlns:a="http://schemas.openxmlformats.org/drawingml/2006/main">
-              <a:ext uri="{FF2B5EF4-FFF2-40B4-BE49-F238E27FC236}">
-                <a16:creationId xmlns:a16="http://schemas.microsoft.com/office/drawing/2014/main" id="{F0C4E20E-71E5-4BF5-A55E-DC5154E00348}"/>
-              </a:ext>
-            </a:extLst>
-          </p:cNvPr>
-          <p:cNvSpPr>
-            <a:spLocks xmlns:a="http://schemas.openxmlformats.org/drawingml/2006/main" noGrp="1"/>
-          </p:cNvSpPr>
-          <p:nvPr/>
-        </p:nvSpPr>
-        <p:spPr>
-          <a:xfrm xmlns:a="http://schemas.openxmlformats.org/drawingml/2006/main">
-            <a:off x="0" y="3933825"/>
-            <a:ext cx="7562850" cy="2857500"/>
+              <a:defRPr sz="825" b="0">
+                <a:solidFill>
+                  <a:srgbClr val="5B6B85"/>
+                </a:solidFill>
+                <a:latin typeface="Arial"/>
+                <a:ea typeface="Arial"/>
+                <a:cs typeface="Arial"/>
+              </a:defRPr>
+            </a:pPr>
+            <a:r>
+              <a:rPr sz="825" b="0">
+                <a:solidFill>
+                  <a:srgbClr val="5B6B85"/>
+                </a:solidFill>
+                <a:latin typeface="Arial"/>
+                <a:ea typeface="Arial"/>
+                <a:cs typeface="Arial"/>
+              </a:rPr>
+              <a:t>AI-generated service illustration</a:t>
+            </a:r>
+          </a:p>
+        </p:txBody>
+      </p:sp>
+      <p:sp>
+        <p:nvSpPr>
+          <p:cNvPr id="8" name="profile-50">
+            <a:extLst xmlns:a="http://schemas.openxmlformats.org/drawingml/2006/main">
+              <a:ext uri="{FF2B5EF4-FFF2-40B4-BE49-F238E27FC236}">
+                <a16:creationId xmlns:a16="http://schemas.microsoft.com/office/drawing/2014/main" id="{898ECA28-E26E-4EE6-A134-9F1D3C6BFFCD}"/>
+              </a:ext>
+            </a:extLst>
+          </p:cNvPr>
+          <p:cNvSpPr>
+            <a:spLocks xmlns:a="http://schemas.openxmlformats.org/drawingml/2006/main" noGrp="1"/>
+          </p:cNvSpPr>
+          <p:nvPr/>
+        </p:nvSpPr>
+        <p:spPr>
+          <a:xfrm xmlns:a="http://schemas.openxmlformats.org/drawingml/2006/main">
+            <a:off x="0" y="5105400"/>
+            <a:ext cx="7562850" cy="2305050"/>
           </a:xfrm>
           <a:prstGeom xmlns:a="http://schemas.openxmlformats.org/drawingml/2006/main" prst="rect">
             <a:avLst/>
@@ -4552,39 +4399,39 @@
       </p:sp>
       <p:sp>
         <p:nvSpPr>
-          <p:cNvPr id="8" name="profile-53">
-            <a:extLst xmlns:a="http://schemas.openxmlformats.org/drawingml/2006/main">
-              <a:ext uri="{FF2B5EF4-FFF2-40B4-BE49-F238E27FC236}">
-                <a16:creationId xmlns:a16="http://schemas.microsoft.com/office/drawing/2014/main" id="{095CC7C7-B7B3-439D-A932-F61AC444F071}"/>
-              </a:ext>
-            </a:extLst>
-          </p:cNvPr>
-          <p:cNvSpPr>
-            <a:spLocks xmlns:a="http://schemas.openxmlformats.org/drawingml/2006/main" noGrp="1"/>
-          </p:cNvSpPr>
-          <p:nvPr/>
-        </p:nvSpPr>
-        <p:spPr>
-          <a:xfrm xmlns:a="http://schemas.openxmlformats.org/drawingml/2006/main">
-            <a:off x="419100" y="4229100"/>
-            <a:ext cx="3171825" cy="353378"/>
-          </a:xfrm>
-          <a:prstGeom xmlns:a="http://schemas.openxmlformats.org/drawingml/2006/main" prst="rect">
-            <a:avLst/>
-          </a:prstGeom>
-          <a:noFill xmlns:a="http://schemas.openxmlformats.org/drawingml/2006/main"/>
-          <a:ln xmlns:a="http://schemas.openxmlformats.org/drawingml/2006/main" w="0">
-            <a:noFill/>
-          </a:ln>
-        </p:spPr>
-        <p:txBody>
-          <a:bodyPr xmlns:a="http://schemas.openxmlformats.org/drawingml/2006/main" wrap="none" lIns="0" tIns="0" rIns="0" bIns="0" anchor="t">
-            <a:noAutofit/>
-          </a:bodyPr>
-          <a:lstStyle xmlns:a="http://schemas.openxmlformats.org/drawingml/2006/main"/>
-          <a:p xmlns:a="http://schemas.openxmlformats.org/drawingml/2006/main">
-            <a:pPr algn="l">
-              <a:defRPr sz="2025" b="1">
+          <p:cNvPr id="9" name="profile-51">
+            <a:extLst xmlns:a="http://schemas.openxmlformats.org/drawingml/2006/main">
+              <a:ext uri="{FF2B5EF4-FFF2-40B4-BE49-F238E27FC236}">
+                <a16:creationId xmlns:a16="http://schemas.microsoft.com/office/drawing/2014/main" id="{39CE4EC9-BD9A-4C92-A243-AB3806ABA27B}"/>
+              </a:ext>
+            </a:extLst>
+          </p:cNvPr>
+          <p:cNvSpPr>
+            <a:spLocks xmlns:a="http://schemas.openxmlformats.org/drawingml/2006/main" noGrp="1"/>
+          </p:cNvSpPr>
+          <p:nvPr/>
+        </p:nvSpPr>
+        <p:spPr>
+          <a:xfrm xmlns:a="http://schemas.openxmlformats.org/drawingml/2006/main">
+            <a:off x="419100" y="5343525"/>
+            <a:ext cx="3171825" cy="328613"/>
+          </a:xfrm>
+          <a:prstGeom xmlns:a="http://schemas.openxmlformats.org/drawingml/2006/main" prst="rect">
+            <a:avLst/>
+          </a:prstGeom>
+          <a:noFill xmlns:a="http://schemas.openxmlformats.org/drawingml/2006/main"/>
+          <a:ln xmlns:a="http://schemas.openxmlformats.org/drawingml/2006/main" w="0">
+            <a:noFill/>
+          </a:ln>
+        </p:spPr>
+        <p:txBody>
+          <a:bodyPr xmlns:a="http://schemas.openxmlformats.org/drawingml/2006/main" wrap="none" lIns="0" tIns="0" rIns="0" bIns="0" anchor="t">
+            <a:noAutofit/>
+          </a:bodyPr>
+          <a:lstStyle xmlns:a="http://schemas.openxmlformats.org/drawingml/2006/main"/>
+          <a:p xmlns:a="http://schemas.openxmlformats.org/drawingml/2006/main">
+            <a:pPr algn="l">
+              <a:defRPr sz="1875" b="1">
                 <a:solidFill>
                   <a:srgbClr val="FFFFFF"/>
                 </a:solidFill>
@@ -4594,7 +4441,7 @@
               </a:defRPr>
             </a:pPr>
             <a:r>
-              <a:rPr sz="2025" b="1">
+              <a:rPr sz="1875" b="1">
                 <a:solidFill>
                   <a:srgbClr val="FFFFFF"/>
                 </a:solidFill>
@@ -4609,39 +4456,39 @@
       </p:sp>
       <p:sp>
         <p:nvSpPr>
-          <p:cNvPr id="9" name="profile-54">
-            <a:extLst xmlns:a="http://schemas.openxmlformats.org/drawingml/2006/main">
-              <a:ext uri="{FF2B5EF4-FFF2-40B4-BE49-F238E27FC236}">
-                <a16:creationId xmlns:a16="http://schemas.microsoft.com/office/drawing/2014/main" id="{13A25ECC-B841-4219-A315-6137B5BCF5FE}"/>
-              </a:ext>
-            </a:extLst>
-          </p:cNvPr>
-          <p:cNvSpPr>
-            <a:spLocks xmlns:a="http://schemas.openxmlformats.org/drawingml/2006/main" noGrp="1"/>
-          </p:cNvSpPr>
-          <p:nvPr/>
-        </p:nvSpPr>
-        <p:spPr>
-          <a:xfrm xmlns:a="http://schemas.openxmlformats.org/drawingml/2006/main">
-            <a:off x="3981450" y="4229100"/>
-            <a:ext cx="3162300" cy="353378"/>
-          </a:xfrm>
-          <a:prstGeom xmlns:a="http://schemas.openxmlformats.org/drawingml/2006/main" prst="rect">
-            <a:avLst/>
-          </a:prstGeom>
-          <a:noFill xmlns:a="http://schemas.openxmlformats.org/drawingml/2006/main"/>
-          <a:ln xmlns:a="http://schemas.openxmlformats.org/drawingml/2006/main" w="0">
-            <a:noFill/>
-          </a:ln>
-        </p:spPr>
-        <p:txBody>
-          <a:bodyPr xmlns:a="http://schemas.openxmlformats.org/drawingml/2006/main" wrap="none" lIns="0" tIns="0" rIns="0" bIns="0" anchor="t">
-            <a:noAutofit/>
-          </a:bodyPr>
-          <a:lstStyle xmlns:a="http://schemas.openxmlformats.org/drawingml/2006/main"/>
-          <a:p xmlns:a="http://schemas.openxmlformats.org/drawingml/2006/main">
-            <a:pPr algn="l">
-              <a:defRPr sz="2025" b="1">
+          <p:cNvPr id="10" name="profile-52">
+            <a:extLst xmlns:a="http://schemas.openxmlformats.org/drawingml/2006/main">
+              <a:ext uri="{FF2B5EF4-FFF2-40B4-BE49-F238E27FC236}">
+                <a16:creationId xmlns:a16="http://schemas.microsoft.com/office/drawing/2014/main" id="{6C9D6589-334A-463B-A4EB-8D2CB1872DE9}"/>
+              </a:ext>
+            </a:extLst>
+          </p:cNvPr>
+          <p:cNvSpPr>
+            <a:spLocks xmlns:a="http://schemas.openxmlformats.org/drawingml/2006/main" noGrp="1"/>
+          </p:cNvSpPr>
+          <p:nvPr/>
+        </p:nvSpPr>
+        <p:spPr>
+          <a:xfrm xmlns:a="http://schemas.openxmlformats.org/drawingml/2006/main">
+            <a:off x="3981450" y="5343525"/>
+            <a:ext cx="3162300" cy="328613"/>
+          </a:xfrm>
+          <a:prstGeom xmlns:a="http://schemas.openxmlformats.org/drawingml/2006/main" prst="rect">
+            <a:avLst/>
+          </a:prstGeom>
+          <a:noFill xmlns:a="http://schemas.openxmlformats.org/drawingml/2006/main"/>
+          <a:ln xmlns:a="http://schemas.openxmlformats.org/drawingml/2006/main" w="0">
+            <a:noFill/>
+          </a:ln>
+        </p:spPr>
+        <p:txBody>
+          <a:bodyPr xmlns:a="http://schemas.openxmlformats.org/drawingml/2006/main" wrap="none" lIns="0" tIns="0" rIns="0" bIns="0" anchor="t">
+            <a:noAutofit/>
+          </a:bodyPr>
+          <a:lstStyle xmlns:a="http://schemas.openxmlformats.org/drawingml/2006/main"/>
+          <a:p xmlns:a="http://schemas.openxmlformats.org/drawingml/2006/main">
+            <a:pPr algn="l">
+              <a:defRPr sz="1875" b="1">
                 <a:solidFill>
                   <a:srgbClr val="FFFFFF"/>
                 </a:solidFill>
@@ -4651,7 +4498,7 @@
               </a:defRPr>
             </a:pPr>
             <a:r>
-              <a:rPr sz="2025" b="1">
+              <a:rPr sz="1875" b="1">
                 <a:solidFill>
                   <a:srgbClr val="FFFFFF"/>
                 </a:solidFill>
@@ -4666,21 +4513,21 @@
       </p:sp>
       <p:sp>
         <p:nvSpPr>
-          <p:cNvPr id="10" name="profile-55">
-            <a:extLst xmlns:a="http://schemas.openxmlformats.org/drawingml/2006/main">
-              <a:ext uri="{FF2B5EF4-FFF2-40B4-BE49-F238E27FC236}">
-                <a16:creationId xmlns:a16="http://schemas.microsoft.com/office/drawing/2014/main" id="{354A69CD-0C11-4C34-B769-0E523D617440}"/>
-              </a:ext>
-            </a:extLst>
-          </p:cNvPr>
-          <p:cNvSpPr>
-            <a:spLocks xmlns:a="http://schemas.openxmlformats.org/drawingml/2006/main" noGrp="1"/>
-          </p:cNvSpPr>
-          <p:nvPr/>
-        </p:nvSpPr>
-        <p:spPr>
-          <a:xfrm xmlns:a="http://schemas.openxmlformats.org/drawingml/2006/main">
-            <a:off x="419100" y="4781550"/>
+          <p:cNvPr id="11" name="profile-53">
+            <a:extLst xmlns:a="http://schemas.openxmlformats.org/drawingml/2006/main">
+              <a:ext uri="{FF2B5EF4-FFF2-40B4-BE49-F238E27FC236}">
+                <a16:creationId xmlns:a16="http://schemas.microsoft.com/office/drawing/2014/main" id="{768B696F-1482-4A0E-BE51-C1DA902D1DE0}"/>
+              </a:ext>
+            </a:extLst>
+          </p:cNvPr>
+          <p:cNvSpPr>
+            <a:spLocks xmlns:a="http://schemas.openxmlformats.org/drawingml/2006/main" noGrp="1"/>
+          </p:cNvSpPr>
+          <p:nvPr/>
+        </p:nvSpPr>
+        <p:spPr>
+          <a:xfrm xmlns:a="http://schemas.openxmlformats.org/drawingml/2006/main">
+            <a:off x="419100" y="5876925"/>
             <a:ext cx="47625" cy="47625"/>
           </a:xfrm>
           <a:prstGeom xmlns:a="http://schemas.openxmlformats.org/drawingml/2006/main" prst="rect">
@@ -4696,39 +4543,39 @@
       </p:sp>
       <p:sp>
         <p:nvSpPr>
-          <p:cNvPr id="11" name="profile-56">
-            <a:extLst xmlns:a="http://schemas.openxmlformats.org/drawingml/2006/main">
-              <a:ext uri="{FF2B5EF4-FFF2-40B4-BE49-F238E27FC236}">
-                <a16:creationId xmlns:a16="http://schemas.microsoft.com/office/drawing/2014/main" id="{47408EA3-B87B-4C78-BE8B-C9A4500BD5A5}"/>
-              </a:ext>
-            </a:extLst>
-          </p:cNvPr>
-          <p:cNvSpPr>
-            <a:spLocks xmlns:a="http://schemas.openxmlformats.org/drawingml/2006/main" noGrp="1"/>
-          </p:cNvSpPr>
-          <p:nvPr/>
-        </p:nvSpPr>
-        <p:spPr>
-          <a:xfrm xmlns:a="http://schemas.openxmlformats.org/drawingml/2006/main">
-            <a:off x="600075" y="4705350"/>
-            <a:ext cx="2838450" cy="242506"/>
-          </a:xfrm>
-          <a:prstGeom xmlns:a="http://schemas.openxmlformats.org/drawingml/2006/main" prst="rect">
-            <a:avLst/>
-          </a:prstGeom>
-          <a:noFill xmlns:a="http://schemas.openxmlformats.org/drawingml/2006/main"/>
-          <a:ln xmlns:a="http://schemas.openxmlformats.org/drawingml/2006/main" w="0">
-            <a:noFill/>
-          </a:ln>
-        </p:spPr>
-        <p:txBody>
-          <a:bodyPr xmlns:a="http://schemas.openxmlformats.org/drawingml/2006/main" wrap="none" lIns="0" tIns="0" rIns="0" bIns="0" anchor="t">
-            <a:noAutofit/>
-          </a:bodyPr>
-          <a:lstStyle xmlns:a="http://schemas.openxmlformats.org/drawingml/2006/main"/>
-          <a:p xmlns:a="http://schemas.openxmlformats.org/drawingml/2006/main">
-            <a:pPr algn="l">
-              <a:defRPr sz="1275" b="0">
+          <p:cNvPr id="12" name="profile-54">
+            <a:extLst xmlns:a="http://schemas.openxmlformats.org/drawingml/2006/main">
+              <a:ext uri="{FF2B5EF4-FFF2-40B4-BE49-F238E27FC236}">
+                <a16:creationId xmlns:a16="http://schemas.microsoft.com/office/drawing/2014/main" id="{A0307AA0-FF89-4957-9D09-CA9AF6F2AF66}"/>
+              </a:ext>
+            </a:extLst>
+          </p:cNvPr>
+          <p:cNvSpPr>
+            <a:spLocks xmlns:a="http://schemas.openxmlformats.org/drawingml/2006/main" noGrp="1"/>
+          </p:cNvSpPr>
+          <p:nvPr/>
+        </p:nvSpPr>
+        <p:spPr>
+          <a:xfrm xmlns:a="http://schemas.openxmlformats.org/drawingml/2006/main">
+            <a:off x="600075" y="5800725"/>
+            <a:ext cx="2838450" cy="229362"/>
+          </a:xfrm>
+          <a:prstGeom xmlns:a="http://schemas.openxmlformats.org/drawingml/2006/main" prst="rect">
+            <a:avLst/>
+          </a:prstGeom>
+          <a:noFill xmlns:a="http://schemas.openxmlformats.org/drawingml/2006/main"/>
+          <a:ln xmlns:a="http://schemas.openxmlformats.org/drawingml/2006/main" w="0">
+            <a:noFill/>
+          </a:ln>
+        </p:spPr>
+        <p:txBody>
+          <a:bodyPr xmlns:a="http://schemas.openxmlformats.org/drawingml/2006/main" wrap="none" lIns="0" tIns="0" rIns="0" bIns="0" anchor="t">
+            <a:noAutofit/>
+          </a:bodyPr>
+          <a:lstStyle xmlns:a="http://schemas.openxmlformats.org/drawingml/2006/main"/>
+          <a:p xmlns:a="http://schemas.openxmlformats.org/drawingml/2006/main">
+            <a:pPr algn="l">
+              <a:defRPr sz="1200" b="0">
                 <a:solidFill>
                   <a:srgbClr val="FFFFFF"/>
                 </a:solidFill>
@@ -4738,7 +4585,7 @@
               </a:defRPr>
             </a:pPr>
             <a:r>
-              <a:rPr sz="1275" b="0">
+              <a:rPr sz="1200" b="0">
                 <a:solidFill>
                   <a:srgbClr val="FFFFFF"/>
                 </a:solidFill>
@@ -4753,21 +4600,21 @@
       </p:sp>
       <p:sp>
         <p:nvSpPr>
-          <p:cNvPr id="12" name="profile-57">
-            <a:extLst xmlns:a="http://schemas.openxmlformats.org/drawingml/2006/main">
-              <a:ext uri="{FF2B5EF4-FFF2-40B4-BE49-F238E27FC236}">
-                <a16:creationId xmlns:a16="http://schemas.microsoft.com/office/drawing/2014/main" id="{6C1FEF1E-BE88-4BF0-9F6E-F256DE644F7E}"/>
-              </a:ext>
-            </a:extLst>
-          </p:cNvPr>
-          <p:cNvSpPr>
-            <a:spLocks xmlns:a="http://schemas.openxmlformats.org/drawingml/2006/main" noGrp="1"/>
-          </p:cNvSpPr>
-          <p:nvPr/>
-        </p:nvSpPr>
-        <p:spPr>
-          <a:xfrm xmlns:a="http://schemas.openxmlformats.org/drawingml/2006/main">
-            <a:off x="419100" y="5147882"/>
+          <p:cNvPr id="13" name="profile-55">
+            <a:extLst xmlns:a="http://schemas.openxmlformats.org/drawingml/2006/main">
+              <a:ext uri="{FF2B5EF4-FFF2-40B4-BE49-F238E27FC236}">
+                <a16:creationId xmlns:a16="http://schemas.microsoft.com/office/drawing/2014/main" id="{5F038DC6-1E9A-4B7E-8BF4-5E68964301BC}"/>
+              </a:ext>
+            </a:extLst>
+          </p:cNvPr>
+          <p:cNvSpPr>
+            <a:spLocks xmlns:a="http://schemas.openxmlformats.org/drawingml/2006/main" noGrp="1"/>
+          </p:cNvSpPr>
+          <p:nvPr/>
+        </p:nvSpPr>
+        <p:spPr>
+          <a:xfrm xmlns:a="http://schemas.openxmlformats.org/drawingml/2006/main">
+            <a:off x="419100" y="6201537"/>
             <a:ext cx="47625" cy="47625"/>
           </a:xfrm>
           <a:prstGeom xmlns:a="http://schemas.openxmlformats.org/drawingml/2006/main" prst="rect">
@@ -4783,39 +4630,39 @@
       </p:sp>
       <p:sp>
         <p:nvSpPr>
-          <p:cNvPr id="13" name="profile-58">
-            <a:extLst xmlns:a="http://schemas.openxmlformats.org/drawingml/2006/main">
-              <a:ext uri="{FF2B5EF4-FFF2-40B4-BE49-F238E27FC236}">
-                <a16:creationId xmlns:a16="http://schemas.microsoft.com/office/drawing/2014/main" id="{04D0DBE5-AB11-44B6-BE14-A43F417717E7}"/>
-              </a:ext>
-            </a:extLst>
-          </p:cNvPr>
-          <p:cNvSpPr>
-            <a:spLocks xmlns:a="http://schemas.openxmlformats.org/drawingml/2006/main" noGrp="1"/>
-          </p:cNvSpPr>
-          <p:nvPr/>
-        </p:nvSpPr>
-        <p:spPr>
-          <a:xfrm xmlns:a="http://schemas.openxmlformats.org/drawingml/2006/main">
-            <a:off x="600075" y="5071682"/>
-            <a:ext cx="2838450" cy="242506"/>
-          </a:xfrm>
-          <a:prstGeom xmlns:a="http://schemas.openxmlformats.org/drawingml/2006/main" prst="rect">
-            <a:avLst/>
-          </a:prstGeom>
-          <a:noFill xmlns:a="http://schemas.openxmlformats.org/drawingml/2006/main"/>
-          <a:ln xmlns:a="http://schemas.openxmlformats.org/drawingml/2006/main" w="0">
-            <a:noFill/>
-          </a:ln>
-        </p:spPr>
-        <p:txBody>
-          <a:bodyPr xmlns:a="http://schemas.openxmlformats.org/drawingml/2006/main" wrap="none" lIns="0" tIns="0" rIns="0" bIns="0" anchor="t">
-            <a:noAutofit/>
-          </a:bodyPr>
-          <a:lstStyle xmlns:a="http://schemas.openxmlformats.org/drawingml/2006/main"/>
-          <a:p xmlns:a="http://schemas.openxmlformats.org/drawingml/2006/main">
-            <a:pPr algn="l">
-              <a:defRPr sz="1275" b="0">
+          <p:cNvPr id="14" name="profile-56">
+            <a:extLst xmlns:a="http://schemas.openxmlformats.org/drawingml/2006/main">
+              <a:ext uri="{FF2B5EF4-FFF2-40B4-BE49-F238E27FC236}">
+                <a16:creationId xmlns:a16="http://schemas.microsoft.com/office/drawing/2014/main" id="{5314A759-4D9D-4B3A-AF6B-C0138CC77E16}"/>
+              </a:ext>
+            </a:extLst>
+          </p:cNvPr>
+          <p:cNvSpPr>
+            <a:spLocks xmlns:a="http://schemas.openxmlformats.org/drawingml/2006/main" noGrp="1"/>
+          </p:cNvSpPr>
+          <p:nvPr/>
+        </p:nvSpPr>
+        <p:spPr>
+          <a:xfrm xmlns:a="http://schemas.openxmlformats.org/drawingml/2006/main">
+            <a:off x="600075" y="6125337"/>
+            <a:ext cx="2838450" cy="229362"/>
+          </a:xfrm>
+          <a:prstGeom xmlns:a="http://schemas.openxmlformats.org/drawingml/2006/main" prst="rect">
+            <a:avLst/>
+          </a:prstGeom>
+          <a:noFill xmlns:a="http://schemas.openxmlformats.org/drawingml/2006/main"/>
+          <a:ln xmlns:a="http://schemas.openxmlformats.org/drawingml/2006/main" w="0">
+            <a:noFill/>
+          </a:ln>
+        </p:spPr>
+        <p:txBody>
+          <a:bodyPr xmlns:a="http://schemas.openxmlformats.org/drawingml/2006/main" wrap="none" lIns="0" tIns="0" rIns="0" bIns="0" anchor="t">
+            <a:noAutofit/>
+          </a:bodyPr>
+          <a:lstStyle xmlns:a="http://schemas.openxmlformats.org/drawingml/2006/main"/>
+          <a:p xmlns:a="http://schemas.openxmlformats.org/drawingml/2006/main">
+            <a:pPr algn="l">
+              <a:defRPr sz="1200" b="0">
                 <a:solidFill>
                   <a:srgbClr val="FFFFFF"/>
                 </a:solidFill>
@@ -4825,7 +4672,7 @@
               </a:defRPr>
             </a:pPr>
             <a:r>
-              <a:rPr sz="1275" b="0">
+              <a:rPr sz="1200" b="0">
                 <a:solidFill>
                   <a:srgbClr val="FFFFFF"/>
                 </a:solidFill>
@@ -4840,21 +4687,21 @@
       </p:sp>
       <p:sp>
         <p:nvSpPr>
-          <p:cNvPr id="14" name="profile-59">
-            <a:extLst xmlns:a="http://schemas.openxmlformats.org/drawingml/2006/main">
-              <a:ext uri="{FF2B5EF4-FFF2-40B4-BE49-F238E27FC236}">
-                <a16:creationId xmlns:a16="http://schemas.microsoft.com/office/drawing/2014/main" id="{A9B989D5-57A6-41DA-A39B-D26B14CA923E}"/>
-              </a:ext>
-            </a:extLst>
-          </p:cNvPr>
-          <p:cNvSpPr>
-            <a:spLocks xmlns:a="http://schemas.openxmlformats.org/drawingml/2006/main" noGrp="1"/>
-          </p:cNvSpPr>
-          <p:nvPr/>
-        </p:nvSpPr>
-        <p:spPr>
-          <a:xfrm xmlns:a="http://schemas.openxmlformats.org/drawingml/2006/main">
-            <a:off x="419100" y="5514213"/>
+          <p:cNvPr id="15" name="profile-57">
+            <a:extLst xmlns:a="http://schemas.openxmlformats.org/drawingml/2006/main">
+              <a:ext uri="{FF2B5EF4-FFF2-40B4-BE49-F238E27FC236}">
+                <a16:creationId xmlns:a16="http://schemas.microsoft.com/office/drawing/2014/main" id="{5690692F-D944-4338-818D-D5F6F718C9A5}"/>
+              </a:ext>
+            </a:extLst>
+          </p:cNvPr>
+          <p:cNvSpPr>
+            <a:spLocks xmlns:a="http://schemas.openxmlformats.org/drawingml/2006/main" noGrp="1"/>
+          </p:cNvSpPr>
+          <p:nvPr/>
+        </p:nvSpPr>
+        <p:spPr>
+          <a:xfrm xmlns:a="http://schemas.openxmlformats.org/drawingml/2006/main">
+            <a:off x="419100" y="6526149"/>
             <a:ext cx="47625" cy="47625"/>
           </a:xfrm>
           <a:prstGeom xmlns:a="http://schemas.openxmlformats.org/drawingml/2006/main" prst="rect">
@@ -4870,39 +4717,39 @@
       </p:sp>
       <p:sp>
         <p:nvSpPr>
-          <p:cNvPr id="15" name="profile-60">
-            <a:extLst xmlns:a="http://schemas.openxmlformats.org/drawingml/2006/main">
-              <a:ext uri="{FF2B5EF4-FFF2-40B4-BE49-F238E27FC236}">
-                <a16:creationId xmlns:a16="http://schemas.microsoft.com/office/drawing/2014/main" id="{8E10F15F-01B8-4777-B7A5-BB9E439C841E}"/>
-              </a:ext>
-            </a:extLst>
-          </p:cNvPr>
-          <p:cNvSpPr>
-            <a:spLocks xmlns:a="http://schemas.openxmlformats.org/drawingml/2006/main" noGrp="1"/>
-          </p:cNvSpPr>
-          <p:nvPr/>
-        </p:nvSpPr>
-        <p:spPr>
-          <a:xfrm xmlns:a="http://schemas.openxmlformats.org/drawingml/2006/main">
-            <a:off x="600075" y="5438013"/>
-            <a:ext cx="2838450" cy="242506"/>
-          </a:xfrm>
-          <a:prstGeom xmlns:a="http://schemas.openxmlformats.org/drawingml/2006/main" prst="rect">
-            <a:avLst/>
-          </a:prstGeom>
-          <a:noFill xmlns:a="http://schemas.openxmlformats.org/drawingml/2006/main"/>
-          <a:ln xmlns:a="http://schemas.openxmlformats.org/drawingml/2006/main" w="0">
-            <a:noFill/>
-          </a:ln>
-        </p:spPr>
-        <p:txBody>
-          <a:bodyPr xmlns:a="http://schemas.openxmlformats.org/drawingml/2006/main" wrap="none" lIns="0" tIns="0" rIns="0" bIns="0" anchor="t">
-            <a:noAutofit/>
-          </a:bodyPr>
-          <a:lstStyle xmlns:a="http://schemas.openxmlformats.org/drawingml/2006/main"/>
-          <a:p xmlns:a="http://schemas.openxmlformats.org/drawingml/2006/main">
-            <a:pPr algn="l">
-              <a:defRPr sz="1275" b="0">
+          <p:cNvPr id="16" name="profile-58">
+            <a:extLst xmlns:a="http://schemas.openxmlformats.org/drawingml/2006/main">
+              <a:ext uri="{FF2B5EF4-FFF2-40B4-BE49-F238E27FC236}">
+                <a16:creationId xmlns:a16="http://schemas.microsoft.com/office/drawing/2014/main" id="{CFC80574-3A0F-4B3F-9E95-F6F298094D97}"/>
+              </a:ext>
+            </a:extLst>
+          </p:cNvPr>
+          <p:cNvSpPr>
+            <a:spLocks xmlns:a="http://schemas.openxmlformats.org/drawingml/2006/main" noGrp="1"/>
+          </p:cNvSpPr>
+          <p:nvPr/>
+        </p:nvSpPr>
+        <p:spPr>
+          <a:xfrm xmlns:a="http://schemas.openxmlformats.org/drawingml/2006/main">
+            <a:off x="600075" y="6449949"/>
+            <a:ext cx="2838450" cy="229362"/>
+          </a:xfrm>
+          <a:prstGeom xmlns:a="http://schemas.openxmlformats.org/drawingml/2006/main" prst="rect">
+            <a:avLst/>
+          </a:prstGeom>
+          <a:noFill xmlns:a="http://schemas.openxmlformats.org/drawingml/2006/main"/>
+          <a:ln xmlns:a="http://schemas.openxmlformats.org/drawingml/2006/main" w="0">
+            <a:noFill/>
+          </a:ln>
+        </p:spPr>
+        <p:txBody>
+          <a:bodyPr xmlns:a="http://schemas.openxmlformats.org/drawingml/2006/main" wrap="none" lIns="0" tIns="0" rIns="0" bIns="0" anchor="t">
+            <a:noAutofit/>
+          </a:bodyPr>
+          <a:lstStyle xmlns:a="http://schemas.openxmlformats.org/drawingml/2006/main"/>
+          <a:p xmlns:a="http://schemas.openxmlformats.org/drawingml/2006/main">
+            <a:pPr algn="l">
+              <a:defRPr sz="1200" b="0">
                 <a:solidFill>
                   <a:srgbClr val="FFFFFF"/>
                 </a:solidFill>
@@ -4912,7 +4759,7 @@
               </a:defRPr>
             </a:pPr>
             <a:r>
-              <a:rPr sz="1275" b="0">
+              <a:rPr sz="1200" b="0">
                 <a:solidFill>
                   <a:srgbClr val="FFFFFF"/>
                 </a:solidFill>
@@ -4920,85 +4767,28 @@
                 <a:ea typeface="Arial"/>
                 <a:cs typeface="Arial"/>
               </a:rPr>
-              <a:t>Service coordination and site</a:t>
-            </a:r>
-          </a:p>
-        </p:txBody>
-      </p:sp>
-      <p:sp>
-        <p:nvSpPr>
-          <p:cNvPr id="16" name="profile-61">
-            <a:extLst xmlns:a="http://schemas.openxmlformats.org/drawingml/2006/main">
-              <a:ext uri="{FF2B5EF4-FFF2-40B4-BE49-F238E27FC236}">
-                <a16:creationId xmlns:a16="http://schemas.microsoft.com/office/drawing/2014/main" id="{C51C73A9-F29F-4DC9-899C-58B2FC0DDB89}"/>
-              </a:ext>
-            </a:extLst>
-          </p:cNvPr>
-          <p:cNvSpPr>
-            <a:spLocks xmlns:a="http://schemas.openxmlformats.org/drawingml/2006/main" noGrp="1"/>
-          </p:cNvSpPr>
-          <p:nvPr/>
-        </p:nvSpPr>
-        <p:spPr>
-          <a:xfrm xmlns:a="http://schemas.openxmlformats.org/drawingml/2006/main">
-            <a:off x="600075" y="5661470"/>
-            <a:ext cx="2838450" cy="242506"/>
-          </a:xfrm>
-          <a:prstGeom xmlns:a="http://schemas.openxmlformats.org/drawingml/2006/main" prst="rect">
-            <a:avLst/>
-          </a:prstGeom>
-          <a:noFill xmlns:a="http://schemas.openxmlformats.org/drawingml/2006/main"/>
-          <a:ln xmlns:a="http://schemas.openxmlformats.org/drawingml/2006/main" w="0">
-            <a:noFill/>
-          </a:ln>
-        </p:spPr>
-        <p:txBody>
-          <a:bodyPr xmlns:a="http://schemas.openxmlformats.org/drawingml/2006/main" wrap="none" lIns="0" tIns="0" rIns="0" bIns="0" anchor="t">
-            <a:noAutofit/>
-          </a:bodyPr>
-          <a:lstStyle xmlns:a="http://schemas.openxmlformats.org/drawingml/2006/main"/>
-          <a:p xmlns:a="http://schemas.openxmlformats.org/drawingml/2006/main">
-            <a:pPr algn="l">
-              <a:defRPr sz="1275" b="0">
-                <a:solidFill>
-                  <a:srgbClr val="FFFFFF"/>
-                </a:solidFill>
-                <a:latin typeface="Arial"/>
-                <a:ea typeface="Arial"/>
-                <a:cs typeface="Arial"/>
-              </a:defRPr>
-            </a:pPr>
-            <a:r>
-              <a:rPr sz="1275" b="0">
-                <a:solidFill>
-                  <a:srgbClr val="FFFFFF"/>
-                </a:solidFill>
-                <a:latin typeface="Arial"/>
-                <a:ea typeface="Arial"/>
-                <a:cs typeface="Arial"/>
-              </a:rPr>
-              <a:t>assessment</a:t>
-            </a:r>
-          </a:p>
-        </p:txBody>
-      </p:sp>
-      <p:sp>
-        <p:nvSpPr>
-          <p:cNvPr id="17" name="profile-62">
-            <a:extLst xmlns:a="http://schemas.openxmlformats.org/drawingml/2006/main">
-              <a:ext uri="{FF2B5EF4-FFF2-40B4-BE49-F238E27FC236}">
-                <a16:creationId xmlns:a16="http://schemas.microsoft.com/office/drawing/2014/main" id="{3E7D188A-48CA-4420-9957-CC1BCE272903}"/>
-              </a:ext>
-            </a:extLst>
-          </p:cNvPr>
-          <p:cNvSpPr>
-            <a:spLocks xmlns:a="http://schemas.openxmlformats.org/drawingml/2006/main" noGrp="1"/>
-          </p:cNvSpPr>
-          <p:nvPr/>
-        </p:nvSpPr>
-        <p:spPr>
-          <a:xfrm xmlns:a="http://schemas.openxmlformats.org/drawingml/2006/main">
-            <a:off x="3981450" y="4781550"/>
+              <a:t>Service coordination and site assessment</a:t>
+            </a:r>
+          </a:p>
+        </p:txBody>
+      </p:sp>
+      <p:sp>
+        <p:nvSpPr>
+          <p:cNvPr id="17" name="profile-59">
+            <a:extLst xmlns:a="http://schemas.openxmlformats.org/drawingml/2006/main">
+              <a:ext uri="{FF2B5EF4-FFF2-40B4-BE49-F238E27FC236}">
+                <a16:creationId xmlns:a16="http://schemas.microsoft.com/office/drawing/2014/main" id="{B2A5F5E7-FAAF-415F-A2EA-14A44CF6D535}"/>
+              </a:ext>
+            </a:extLst>
+          </p:cNvPr>
+          <p:cNvSpPr>
+            <a:spLocks xmlns:a="http://schemas.openxmlformats.org/drawingml/2006/main" noGrp="1"/>
+          </p:cNvSpPr>
+          <p:nvPr/>
+        </p:nvSpPr>
+        <p:spPr>
+          <a:xfrm xmlns:a="http://schemas.openxmlformats.org/drawingml/2006/main">
+            <a:off x="3981450" y="5876925"/>
             <a:ext cx="47625" cy="47625"/>
           </a:xfrm>
           <a:prstGeom xmlns:a="http://schemas.openxmlformats.org/drawingml/2006/main" prst="rect">
@@ -5014,39 +4804,39 @@
       </p:sp>
       <p:sp>
         <p:nvSpPr>
-          <p:cNvPr id="18" name="profile-63">
-            <a:extLst xmlns:a="http://schemas.openxmlformats.org/drawingml/2006/main">
-              <a:ext uri="{FF2B5EF4-FFF2-40B4-BE49-F238E27FC236}">
-                <a16:creationId xmlns:a16="http://schemas.microsoft.com/office/drawing/2014/main" id="{24932383-2FEF-4DB5-B6FF-2F43D208D2C4}"/>
-              </a:ext>
-            </a:extLst>
-          </p:cNvPr>
-          <p:cNvSpPr>
-            <a:spLocks xmlns:a="http://schemas.openxmlformats.org/drawingml/2006/main" noGrp="1"/>
-          </p:cNvSpPr>
-          <p:nvPr/>
-        </p:nvSpPr>
-        <p:spPr>
-          <a:xfrm xmlns:a="http://schemas.openxmlformats.org/drawingml/2006/main">
-            <a:off x="4162425" y="4705350"/>
-            <a:ext cx="2924175" cy="242506"/>
-          </a:xfrm>
-          <a:prstGeom xmlns:a="http://schemas.openxmlformats.org/drawingml/2006/main" prst="rect">
-            <a:avLst/>
-          </a:prstGeom>
-          <a:noFill xmlns:a="http://schemas.openxmlformats.org/drawingml/2006/main"/>
-          <a:ln xmlns:a="http://schemas.openxmlformats.org/drawingml/2006/main" w="0">
-            <a:noFill/>
-          </a:ln>
-        </p:spPr>
-        <p:txBody>
-          <a:bodyPr xmlns:a="http://schemas.openxmlformats.org/drawingml/2006/main" wrap="none" lIns="0" tIns="0" rIns="0" bIns="0" anchor="t">
-            <a:noAutofit/>
-          </a:bodyPr>
-          <a:lstStyle xmlns:a="http://schemas.openxmlformats.org/drawingml/2006/main"/>
-          <a:p xmlns:a="http://schemas.openxmlformats.org/drawingml/2006/main">
-            <a:pPr algn="l">
-              <a:defRPr sz="1275" b="0">
+          <p:cNvPr id="18" name="profile-60">
+            <a:extLst xmlns:a="http://schemas.openxmlformats.org/drawingml/2006/main">
+              <a:ext uri="{FF2B5EF4-FFF2-40B4-BE49-F238E27FC236}">
+                <a16:creationId xmlns:a16="http://schemas.microsoft.com/office/drawing/2014/main" id="{395FB902-AF66-4191-9D48-CD5E45E9D873}"/>
+              </a:ext>
+            </a:extLst>
+          </p:cNvPr>
+          <p:cNvSpPr>
+            <a:spLocks xmlns:a="http://schemas.openxmlformats.org/drawingml/2006/main" noGrp="1"/>
+          </p:cNvSpPr>
+          <p:nvPr/>
+        </p:nvSpPr>
+        <p:spPr>
+          <a:xfrm xmlns:a="http://schemas.openxmlformats.org/drawingml/2006/main">
+            <a:off x="4162425" y="5800725"/>
+            <a:ext cx="2924175" cy="229362"/>
+          </a:xfrm>
+          <a:prstGeom xmlns:a="http://schemas.openxmlformats.org/drawingml/2006/main" prst="rect">
+            <a:avLst/>
+          </a:prstGeom>
+          <a:noFill xmlns:a="http://schemas.openxmlformats.org/drawingml/2006/main"/>
+          <a:ln xmlns:a="http://schemas.openxmlformats.org/drawingml/2006/main" w="0">
+            <a:noFill/>
+          </a:ln>
+        </p:spPr>
+        <p:txBody>
+          <a:bodyPr xmlns:a="http://schemas.openxmlformats.org/drawingml/2006/main" wrap="none" lIns="0" tIns="0" rIns="0" bIns="0" anchor="t">
+            <a:noAutofit/>
+          </a:bodyPr>
+          <a:lstStyle xmlns:a="http://schemas.openxmlformats.org/drawingml/2006/main"/>
+          <a:p xmlns:a="http://schemas.openxmlformats.org/drawingml/2006/main">
+            <a:pPr algn="l">
+              <a:defRPr sz="1200" b="0">
                 <a:solidFill>
                   <a:srgbClr val="FFFFFF"/>
                 </a:solidFill>
@@ -5056,7 +4846,7 @@
               </a:defRPr>
             </a:pPr>
             <a:r>
-              <a:rPr sz="1275" b="0">
+              <a:rPr sz="1200" b="0">
                 <a:solidFill>
                   <a:srgbClr val="FFFFFF"/>
                 </a:solidFill>
@@ -5071,21 +4861,21 @@
       </p:sp>
       <p:sp>
         <p:nvSpPr>
-          <p:cNvPr id="19" name="profile-64">
-            <a:extLst xmlns:a="http://schemas.openxmlformats.org/drawingml/2006/main">
-              <a:ext uri="{FF2B5EF4-FFF2-40B4-BE49-F238E27FC236}">
-                <a16:creationId xmlns:a16="http://schemas.microsoft.com/office/drawing/2014/main" id="{6BE2D7AA-7F97-46EE-965C-D3921F8EB770}"/>
-              </a:ext>
-            </a:extLst>
-          </p:cNvPr>
-          <p:cNvSpPr>
-            <a:spLocks xmlns:a="http://schemas.openxmlformats.org/drawingml/2006/main" noGrp="1"/>
-          </p:cNvSpPr>
-          <p:nvPr/>
-        </p:nvSpPr>
-        <p:spPr>
-          <a:xfrm xmlns:a="http://schemas.openxmlformats.org/drawingml/2006/main">
-            <a:off x="3981450" y="5147882"/>
+          <p:cNvPr id="19" name="profile-61">
+            <a:extLst xmlns:a="http://schemas.openxmlformats.org/drawingml/2006/main">
+              <a:ext uri="{FF2B5EF4-FFF2-40B4-BE49-F238E27FC236}">
+                <a16:creationId xmlns:a16="http://schemas.microsoft.com/office/drawing/2014/main" id="{E83B2B0A-3A73-4A6C-86BE-7FA39345FA4A}"/>
+              </a:ext>
+            </a:extLst>
+          </p:cNvPr>
+          <p:cNvSpPr>
+            <a:spLocks xmlns:a="http://schemas.openxmlformats.org/drawingml/2006/main" noGrp="1"/>
+          </p:cNvSpPr>
+          <p:nvPr/>
+        </p:nvSpPr>
+        <p:spPr>
+          <a:xfrm xmlns:a="http://schemas.openxmlformats.org/drawingml/2006/main">
+            <a:off x="3981450" y="6201537"/>
             <a:ext cx="47625" cy="47625"/>
           </a:xfrm>
           <a:prstGeom xmlns:a="http://schemas.openxmlformats.org/drawingml/2006/main" prst="rect">
@@ -5101,39 +4891,39 @@
       </p:sp>
       <p:sp>
         <p:nvSpPr>
-          <p:cNvPr id="20" name="profile-65">
-            <a:extLst xmlns:a="http://schemas.openxmlformats.org/drawingml/2006/main">
-              <a:ext uri="{FF2B5EF4-FFF2-40B4-BE49-F238E27FC236}">
-                <a16:creationId xmlns:a16="http://schemas.microsoft.com/office/drawing/2014/main" id="{0F385AC9-B4AE-476C-B494-575A2E77A69A}"/>
-              </a:ext>
-            </a:extLst>
-          </p:cNvPr>
-          <p:cNvSpPr>
-            <a:spLocks xmlns:a="http://schemas.openxmlformats.org/drawingml/2006/main" noGrp="1"/>
-          </p:cNvSpPr>
-          <p:nvPr/>
-        </p:nvSpPr>
-        <p:spPr>
-          <a:xfrm xmlns:a="http://schemas.openxmlformats.org/drawingml/2006/main">
-            <a:off x="4162425" y="5071682"/>
-            <a:ext cx="2924175" cy="242506"/>
-          </a:xfrm>
-          <a:prstGeom xmlns:a="http://schemas.openxmlformats.org/drawingml/2006/main" prst="rect">
-            <a:avLst/>
-          </a:prstGeom>
-          <a:noFill xmlns:a="http://schemas.openxmlformats.org/drawingml/2006/main"/>
-          <a:ln xmlns:a="http://schemas.openxmlformats.org/drawingml/2006/main" w="0">
-            <a:noFill/>
-          </a:ln>
-        </p:spPr>
-        <p:txBody>
-          <a:bodyPr xmlns:a="http://schemas.openxmlformats.org/drawingml/2006/main" wrap="none" lIns="0" tIns="0" rIns="0" bIns="0" anchor="t">
-            <a:noAutofit/>
-          </a:bodyPr>
-          <a:lstStyle xmlns:a="http://schemas.openxmlformats.org/drawingml/2006/main"/>
-          <a:p xmlns:a="http://schemas.openxmlformats.org/drawingml/2006/main">
-            <a:pPr algn="l">
-              <a:defRPr sz="1275" b="0">
+          <p:cNvPr id="20" name="profile-62">
+            <a:extLst xmlns:a="http://schemas.openxmlformats.org/drawingml/2006/main">
+              <a:ext uri="{FF2B5EF4-FFF2-40B4-BE49-F238E27FC236}">
+                <a16:creationId xmlns:a16="http://schemas.microsoft.com/office/drawing/2014/main" id="{B63B0C1E-8AF8-4E3E-AFAA-0ECD471B721B}"/>
+              </a:ext>
+            </a:extLst>
+          </p:cNvPr>
+          <p:cNvSpPr>
+            <a:spLocks xmlns:a="http://schemas.openxmlformats.org/drawingml/2006/main" noGrp="1"/>
+          </p:cNvSpPr>
+          <p:nvPr/>
+        </p:nvSpPr>
+        <p:spPr>
+          <a:xfrm xmlns:a="http://schemas.openxmlformats.org/drawingml/2006/main">
+            <a:off x="4162425" y="6125337"/>
+            <a:ext cx="2924175" cy="229362"/>
+          </a:xfrm>
+          <a:prstGeom xmlns:a="http://schemas.openxmlformats.org/drawingml/2006/main" prst="rect">
+            <a:avLst/>
+          </a:prstGeom>
+          <a:noFill xmlns:a="http://schemas.openxmlformats.org/drawingml/2006/main"/>
+          <a:ln xmlns:a="http://schemas.openxmlformats.org/drawingml/2006/main" w="0">
+            <a:noFill/>
+          </a:ln>
+        </p:spPr>
+        <p:txBody>
+          <a:bodyPr xmlns:a="http://schemas.openxmlformats.org/drawingml/2006/main" wrap="none" lIns="0" tIns="0" rIns="0" bIns="0" anchor="t">
+            <a:noAutofit/>
+          </a:bodyPr>
+          <a:lstStyle xmlns:a="http://schemas.openxmlformats.org/drawingml/2006/main"/>
+          <a:p xmlns:a="http://schemas.openxmlformats.org/drawingml/2006/main">
+            <a:pPr algn="l">
+              <a:defRPr sz="1200" b="0">
                 <a:solidFill>
                   <a:srgbClr val="FFFFFF"/>
                 </a:solidFill>
@@ -5143,7 +4933,7 @@
               </a:defRPr>
             </a:pPr>
             <a:r>
-              <a:rPr sz="1275" b="0">
+              <a:rPr sz="1200" b="0">
                 <a:solidFill>
                   <a:srgbClr val="FFFFFF"/>
                 </a:solidFill>
@@ -5158,21 +4948,21 @@
       </p:sp>
       <p:sp>
         <p:nvSpPr>
-          <p:cNvPr id="21" name="profile-66">
-            <a:extLst xmlns:a="http://schemas.openxmlformats.org/drawingml/2006/main">
-              <a:ext uri="{FF2B5EF4-FFF2-40B4-BE49-F238E27FC236}">
-                <a16:creationId xmlns:a16="http://schemas.microsoft.com/office/drawing/2014/main" id="{FC012F15-4493-45D0-81F6-B0611AC07767}"/>
-              </a:ext>
-            </a:extLst>
-          </p:cNvPr>
-          <p:cNvSpPr>
-            <a:spLocks xmlns:a="http://schemas.openxmlformats.org/drawingml/2006/main" noGrp="1"/>
-          </p:cNvSpPr>
-          <p:nvPr/>
-        </p:nvSpPr>
-        <p:spPr>
-          <a:xfrm xmlns:a="http://schemas.openxmlformats.org/drawingml/2006/main">
-            <a:off x="3981450" y="5514213"/>
+          <p:cNvPr id="21" name="profile-63">
+            <a:extLst xmlns:a="http://schemas.openxmlformats.org/drawingml/2006/main">
+              <a:ext uri="{FF2B5EF4-FFF2-40B4-BE49-F238E27FC236}">
+                <a16:creationId xmlns:a16="http://schemas.microsoft.com/office/drawing/2014/main" id="{901D5F25-C230-4305-8424-16975A3B9BE7}"/>
+              </a:ext>
+            </a:extLst>
+          </p:cNvPr>
+          <p:cNvSpPr>
+            <a:spLocks xmlns:a="http://schemas.openxmlformats.org/drawingml/2006/main" noGrp="1"/>
+          </p:cNvSpPr>
+          <p:nvPr/>
+        </p:nvSpPr>
+        <p:spPr>
+          <a:xfrm xmlns:a="http://schemas.openxmlformats.org/drawingml/2006/main">
+            <a:off x="3981450" y="6526149"/>
             <a:ext cx="47625" cy="47625"/>
           </a:xfrm>
           <a:prstGeom xmlns:a="http://schemas.openxmlformats.org/drawingml/2006/main" prst="rect">
@@ -5188,39 +4978,39 @@
       </p:sp>
       <p:sp>
         <p:nvSpPr>
-          <p:cNvPr id="22" name="profile-67">
-            <a:extLst xmlns:a="http://schemas.openxmlformats.org/drawingml/2006/main">
-              <a:ext uri="{FF2B5EF4-FFF2-40B4-BE49-F238E27FC236}">
-                <a16:creationId xmlns:a16="http://schemas.microsoft.com/office/drawing/2014/main" id="{0535F654-8822-44E3-A7E5-21B55CC2B4AD}"/>
-              </a:ext>
-            </a:extLst>
-          </p:cNvPr>
-          <p:cNvSpPr>
-            <a:spLocks xmlns:a="http://schemas.openxmlformats.org/drawingml/2006/main" noGrp="1"/>
-          </p:cNvSpPr>
-          <p:nvPr/>
-        </p:nvSpPr>
-        <p:spPr>
-          <a:xfrm xmlns:a="http://schemas.openxmlformats.org/drawingml/2006/main">
-            <a:off x="4162425" y="5438013"/>
-            <a:ext cx="2924175" cy="242506"/>
-          </a:xfrm>
-          <a:prstGeom xmlns:a="http://schemas.openxmlformats.org/drawingml/2006/main" prst="rect">
-            <a:avLst/>
-          </a:prstGeom>
-          <a:noFill xmlns:a="http://schemas.openxmlformats.org/drawingml/2006/main"/>
-          <a:ln xmlns:a="http://schemas.openxmlformats.org/drawingml/2006/main" w="0">
-            <a:noFill/>
-          </a:ln>
-        </p:spPr>
-        <p:txBody>
-          <a:bodyPr xmlns:a="http://schemas.openxmlformats.org/drawingml/2006/main" wrap="none" lIns="0" tIns="0" rIns="0" bIns="0" anchor="t">
-            <a:noAutofit/>
-          </a:bodyPr>
-          <a:lstStyle xmlns:a="http://schemas.openxmlformats.org/drawingml/2006/main"/>
-          <a:p xmlns:a="http://schemas.openxmlformats.org/drawingml/2006/main">
-            <a:pPr algn="l">
-              <a:defRPr sz="1275" b="0">
+          <p:cNvPr id="22" name="profile-64">
+            <a:extLst xmlns:a="http://schemas.openxmlformats.org/drawingml/2006/main">
+              <a:ext uri="{FF2B5EF4-FFF2-40B4-BE49-F238E27FC236}">
+                <a16:creationId xmlns:a16="http://schemas.microsoft.com/office/drawing/2014/main" id="{CA131075-BF56-4286-B8FC-529541822093}"/>
+              </a:ext>
+            </a:extLst>
+          </p:cNvPr>
+          <p:cNvSpPr>
+            <a:spLocks xmlns:a="http://schemas.openxmlformats.org/drawingml/2006/main" noGrp="1"/>
+          </p:cNvSpPr>
+          <p:nvPr/>
+        </p:nvSpPr>
+        <p:spPr>
+          <a:xfrm xmlns:a="http://schemas.openxmlformats.org/drawingml/2006/main">
+            <a:off x="4162425" y="6449949"/>
+            <a:ext cx="2924175" cy="229362"/>
+          </a:xfrm>
+          <a:prstGeom xmlns:a="http://schemas.openxmlformats.org/drawingml/2006/main" prst="rect">
+            <a:avLst/>
+          </a:prstGeom>
+          <a:noFill xmlns:a="http://schemas.openxmlformats.org/drawingml/2006/main"/>
+          <a:ln xmlns:a="http://schemas.openxmlformats.org/drawingml/2006/main" w="0">
+            <a:noFill/>
+          </a:ln>
+        </p:spPr>
+        <p:txBody>
+          <a:bodyPr xmlns:a="http://schemas.openxmlformats.org/drawingml/2006/main" wrap="none" lIns="0" tIns="0" rIns="0" bIns="0" anchor="t">
+            <a:noAutofit/>
+          </a:bodyPr>
+          <a:lstStyle xmlns:a="http://schemas.openxmlformats.org/drawingml/2006/main"/>
+          <a:p xmlns:a="http://schemas.openxmlformats.org/drawingml/2006/main">
+            <a:pPr algn="l">
+              <a:defRPr sz="1200" b="0">
                 <a:solidFill>
                   <a:srgbClr val="FFFFFF"/>
                 </a:solidFill>
@@ -5230,7 +5020,7 @@
               </a:defRPr>
             </a:pPr>
             <a:r>
-              <a:rPr sz="1275" b="0">
+              <a:rPr sz="1200" b="0">
                 <a:solidFill>
                   <a:srgbClr val="FFFFFF"/>
                 </a:solidFill>
@@ -5239,53 +5029,135 @@
                 <a:cs typeface="Arial"/>
               </a:rPr>
               <a:t>Troubleshooting based on site findings</a:t>
+            </a:r>
+          </a:p>
+        </p:txBody>
+      </p:sp>
+      <p:sp>
+        <p:nvSpPr>
+          <p:cNvPr id="23" name="profile-65">
+            <a:extLst xmlns:a="http://schemas.openxmlformats.org/drawingml/2006/main">
+              <a:ext uri="{FF2B5EF4-FFF2-40B4-BE49-F238E27FC236}">
+                <a16:creationId xmlns:a16="http://schemas.microsoft.com/office/drawing/2014/main" id="{9337FA4D-2893-4C83-A8B4-10F76683B0DA}"/>
+              </a:ext>
+            </a:extLst>
+          </p:cNvPr>
+          <p:cNvSpPr>
+            <a:spLocks xmlns:a="http://schemas.openxmlformats.org/drawingml/2006/main" noGrp="1"/>
+          </p:cNvSpPr>
+          <p:nvPr/>
+        </p:nvSpPr>
+        <p:spPr>
+          <a:xfrm xmlns:a="http://schemas.openxmlformats.org/drawingml/2006/main">
+            <a:off x="419100" y="7629525"/>
+            <a:ext cx="6724650" cy="180023"/>
+          </a:xfrm>
+          <a:prstGeom xmlns:a="http://schemas.openxmlformats.org/drawingml/2006/main" prst="rect">
+            <a:avLst/>
+          </a:prstGeom>
+          <a:noFill xmlns:a="http://schemas.openxmlformats.org/drawingml/2006/main"/>
+          <a:ln xmlns:a="http://schemas.openxmlformats.org/drawingml/2006/main" w="0">
+            <a:noFill/>
+          </a:ln>
+        </p:spPr>
+        <p:txBody>
+          <a:bodyPr xmlns:a="http://schemas.openxmlformats.org/drawingml/2006/main" wrap="none" lIns="0" tIns="0" rIns="0" bIns="0" anchor="t">
+            <a:noAutofit/>
+          </a:bodyPr>
+          <a:lstStyle xmlns:a="http://schemas.openxmlformats.org/drawingml/2006/main"/>
+          <a:p xmlns:a="http://schemas.openxmlformats.org/drawingml/2006/main">
+            <a:pPr algn="l">
+              <a:defRPr sz="975" b="1">
+                <a:solidFill>
+                  <a:srgbClr val="1C63AD"/>
+                </a:solidFill>
+                <a:latin typeface="Arial"/>
+                <a:ea typeface="Arial"/>
+                <a:cs typeface="Arial"/>
+              </a:defRPr>
+            </a:pPr>
+            <a:r>
+              <a:rPr sz="975" b="1">
+                <a:solidFill>
+                  <a:srgbClr val="1C63AD"/>
+                </a:solidFill>
+                <a:latin typeface="Arial"/>
+                <a:ea typeface="Arial"/>
+                <a:cs typeface="Arial"/>
+              </a:rPr>
+              <a:t>ACTUAL SIPHONING WORK / SAME SITE</a:t>
             </a:r>
           </a:p>
         </p:txBody>
       </p:sp>
       <p:pic>
         <p:nvPicPr>
-          <p:cNvPr id="60" name=""/>
+          <p:cNvPr id="57" name=""/>
           <p:cNvPicPr>
             <a:picLocks xmlns:a="http://schemas.openxmlformats.org/drawingml/2006/main" noChangeAspect="1"/>
           </p:cNvPicPr>
           <p:nvPr/>
         </p:nvPicPr>
         <p:blipFill>
-          <a:blip xmlns:r="http://schemas.openxmlformats.org/officeDocument/2006/relationships" xmlns:a="http://schemas.openxmlformats.org/drawingml/2006/main" r:embed="R9a2927edefb343cc"/>
-          <a:srcRect xmlns:a="http://schemas.openxmlformats.org/drawingml/2006/main" l="0" t="27184" r="0" b="27184"/>
+          <a:blip xmlns:r="http://schemas.openxmlformats.org/officeDocument/2006/relationships" xmlns:a="http://schemas.openxmlformats.org/drawingml/2006/main" r:embed="R8b5e84de4cc5430d"/>
+          <a:srcRect xmlns:a="http://schemas.openxmlformats.org/drawingml/2006/main" l="0" t="35185" r="0" b="35185"/>
           <a:stretch xmlns:a="http://schemas.openxmlformats.org/drawingml/2006/main">
             <a:fillRect l="0" t="0" r="0" b="0"/>
           </a:stretch>
         </p:blipFill>
         <p:spPr>
           <a:xfrm xmlns:a="http://schemas.openxmlformats.org/drawingml/2006/main">
-            <a:off x="3819525" y="7038975"/>
-            <a:ext cx="3743325" cy="2562225"/>
+            <a:off x="419100" y="7972425"/>
+            <a:ext cx="3257550" cy="1447800"/>
           </a:xfrm>
           <a:prstGeom xmlns:a="http://schemas.openxmlformats.org/drawingml/2006/main" prst="rect">
             <a:avLst/>
           </a:prstGeom>
         </p:spPr>
       </p:pic>
-      <p:sp>
-        <p:nvSpPr>
-          <p:cNvPr id="24" name="profile-68">
-            <a:extLst xmlns:a="http://schemas.openxmlformats.org/drawingml/2006/main">
-              <a:ext uri="{FF2B5EF4-FFF2-40B4-BE49-F238E27FC236}">
-                <a16:creationId xmlns:a16="http://schemas.microsoft.com/office/drawing/2014/main" id="{FDC357D6-CAEF-47B7-B330-810565000C47}"/>
-              </a:ext>
-            </a:extLst>
-          </p:cNvPr>
-          <p:cNvSpPr>
-            <a:spLocks xmlns:a="http://schemas.openxmlformats.org/drawingml/2006/main" noGrp="1"/>
-          </p:cNvSpPr>
-          <p:nvPr/>
-        </p:nvSpPr>
-        <p:spPr>
-          <a:xfrm xmlns:a="http://schemas.openxmlformats.org/drawingml/2006/main">
-            <a:off x="3990975" y="9667875"/>
-            <a:ext cx="3400425" cy="155258"/>
+      <p:pic>
+        <p:nvPicPr>
+          <p:cNvPr id="58" name=""/>
+          <p:cNvPicPr>
+            <a:picLocks xmlns:a="http://schemas.openxmlformats.org/drawingml/2006/main" noChangeAspect="1"/>
+          </p:cNvPicPr>
+          <p:nvPr/>
+        </p:nvPicPr>
+        <p:blipFill>
+          <a:blip xmlns:r="http://schemas.openxmlformats.org/officeDocument/2006/relationships" xmlns:a="http://schemas.openxmlformats.org/drawingml/2006/main" r:embed="R928110dc7fca4e88"/>
+          <a:srcRect xmlns:a="http://schemas.openxmlformats.org/drawingml/2006/main" l="0" t="35185" r="0" b="35185"/>
+          <a:stretch xmlns:a="http://schemas.openxmlformats.org/drawingml/2006/main">
+            <a:fillRect l="0" t="0" r="0" b="0"/>
+          </a:stretch>
+        </p:blipFill>
+        <p:spPr>
+          <a:xfrm xmlns:a="http://schemas.openxmlformats.org/drawingml/2006/main">
+            <a:off x="3886200" y="7972425"/>
+            <a:ext cx="3257550" cy="1447800"/>
+          </a:xfrm>
+          <a:prstGeom xmlns:a="http://schemas.openxmlformats.org/drawingml/2006/main" prst="rect">
+            <a:avLst/>
+          </a:prstGeom>
+        </p:spPr>
+      </p:pic>
+      <p:sp>
+        <p:nvSpPr>
+          <p:cNvPr id="26" name="profile-66">
+            <a:extLst xmlns:a="http://schemas.openxmlformats.org/drawingml/2006/main">
+              <a:ext uri="{FF2B5EF4-FFF2-40B4-BE49-F238E27FC236}">
+                <a16:creationId xmlns:a16="http://schemas.microsoft.com/office/drawing/2014/main" id="{91AD4684-ADCA-4FD1-96A1-6CC407FC2CA0}"/>
+              </a:ext>
+            </a:extLst>
+          </p:cNvPr>
+          <p:cNvSpPr>
+            <a:spLocks xmlns:a="http://schemas.openxmlformats.org/drawingml/2006/main" noGrp="1"/>
+          </p:cNvSpPr>
+          <p:nvPr/>
+        </p:nvSpPr>
+        <p:spPr>
+          <a:xfrm xmlns:a="http://schemas.openxmlformats.org/drawingml/2006/main">
+            <a:off x="419100" y="9544050"/>
+            <a:ext cx="3257550" cy="155258"/>
           </a:xfrm>
           <a:prstGeom xmlns:a="http://schemas.openxmlformats.org/drawingml/2006/main" prst="rect">
             <a:avLst/>
@@ -5320,46 +5192,46 @@
                 <a:ea typeface="Arial"/>
                 <a:cs typeface="Arial"/>
               </a:rPr>
-              <a:t>AFTER SERVICE / SAME SITE</a:t>
-            </a:r>
-          </a:p>
-        </p:txBody>
-      </p:sp>
-      <p:sp>
-        <p:nvSpPr>
-          <p:cNvPr id="25" name="profile-69">
-            <a:extLst xmlns:a="http://schemas.openxmlformats.org/drawingml/2006/main">
-              <a:ext uri="{FF2B5EF4-FFF2-40B4-BE49-F238E27FC236}">
-                <a16:creationId xmlns:a16="http://schemas.microsoft.com/office/drawing/2014/main" id="{F9D07E09-8C00-4A54-89F3-2EB7E60DF531}"/>
-              </a:ext>
-            </a:extLst>
-          </p:cNvPr>
-          <p:cNvSpPr>
-            <a:spLocks xmlns:a="http://schemas.openxmlformats.org/drawingml/2006/main" noGrp="1"/>
-          </p:cNvSpPr>
-          <p:nvPr/>
-        </p:nvSpPr>
-        <p:spPr>
-          <a:xfrm xmlns:a="http://schemas.openxmlformats.org/drawingml/2006/main">
-            <a:off x="419100" y="7258050"/>
-            <a:ext cx="3133725" cy="192405"/>
-          </a:xfrm>
-          <a:prstGeom xmlns:a="http://schemas.openxmlformats.org/drawingml/2006/main" prst="rect">
-            <a:avLst/>
-          </a:prstGeom>
-          <a:noFill xmlns:a="http://schemas.openxmlformats.org/drawingml/2006/main"/>
-          <a:ln xmlns:a="http://schemas.openxmlformats.org/drawingml/2006/main" w="0">
-            <a:noFill/>
-          </a:ln>
-        </p:spPr>
-        <p:txBody>
-          <a:bodyPr xmlns:a="http://schemas.openxmlformats.org/drawingml/2006/main" wrap="none" lIns="0" tIns="0" rIns="0" bIns="0" anchor="t">
-            <a:noAutofit/>
-          </a:bodyPr>
-          <a:lstStyle xmlns:a="http://schemas.openxmlformats.org/drawingml/2006/main"/>
-          <a:p xmlns:a="http://schemas.openxmlformats.org/drawingml/2006/main">
-            <a:pPr algn="l">
-              <a:defRPr sz="1050" b="1">
+              <a:t>BEFORE SERVICE</a:t>
+            </a:r>
+          </a:p>
+        </p:txBody>
+      </p:sp>
+      <p:sp>
+        <p:nvSpPr>
+          <p:cNvPr id="27" name="profile-67">
+            <a:extLst xmlns:a="http://schemas.openxmlformats.org/drawingml/2006/main">
+              <a:ext uri="{FF2B5EF4-FFF2-40B4-BE49-F238E27FC236}">
+                <a16:creationId xmlns:a16="http://schemas.microsoft.com/office/drawing/2014/main" id="{4DAD8FA9-9148-4976-BB80-D7CB9FDF3D1A}"/>
+              </a:ext>
+            </a:extLst>
+          </p:cNvPr>
+          <p:cNvSpPr>
+            <a:spLocks xmlns:a="http://schemas.openxmlformats.org/drawingml/2006/main" noGrp="1"/>
+          </p:cNvSpPr>
+          <p:nvPr/>
+        </p:nvSpPr>
+        <p:spPr>
+          <a:xfrm xmlns:a="http://schemas.openxmlformats.org/drawingml/2006/main">
+            <a:off x="3886200" y="9544050"/>
+            <a:ext cx="3257550" cy="155258"/>
+          </a:xfrm>
+          <a:prstGeom xmlns:a="http://schemas.openxmlformats.org/drawingml/2006/main" prst="rect">
+            <a:avLst/>
+          </a:prstGeom>
+          <a:noFill xmlns:a="http://schemas.openxmlformats.org/drawingml/2006/main"/>
+          <a:ln xmlns:a="http://schemas.openxmlformats.org/drawingml/2006/main" w="0">
+            <a:noFill/>
+          </a:ln>
+        </p:spPr>
+        <p:txBody>
+          <a:bodyPr xmlns:a="http://schemas.openxmlformats.org/drawingml/2006/main" wrap="none" lIns="0" tIns="0" rIns="0" bIns="0" anchor="t">
+            <a:noAutofit/>
+          </a:bodyPr>
+          <a:lstStyle xmlns:a="http://schemas.openxmlformats.org/drawingml/2006/main"/>
+          <a:p xmlns:a="http://schemas.openxmlformats.org/drawingml/2006/main">
+            <a:pPr algn="l">
+              <a:defRPr sz="825" b="1">
                 <a:solidFill>
                   <a:srgbClr val="1C63AD"/>
                 </a:solidFill>
@@ -5369,7 +5241,7 @@
               </a:defRPr>
             </a:pPr>
             <a:r>
-              <a:rPr sz="1050" b="1">
+              <a:rPr sz="825" b="1">
                 <a:solidFill>
                   <a:srgbClr val="1C63AD"/>
                 </a:solidFill>
@@ -5377,359 +5249,17 @@
                 <a:ea typeface="Arial"/>
                 <a:cs typeface="Arial"/>
               </a:rPr>
-              <a:t>ACTUAL SITE WORK</a:t>
-            </a:r>
-          </a:p>
-        </p:txBody>
-      </p:sp>
-      <p:sp>
-        <p:nvSpPr>
-          <p:cNvPr id="26" name="profile-70">
-            <a:extLst xmlns:a="http://schemas.openxmlformats.org/drawingml/2006/main">
-              <a:ext uri="{FF2B5EF4-FFF2-40B4-BE49-F238E27FC236}">
-                <a16:creationId xmlns:a16="http://schemas.microsoft.com/office/drawing/2014/main" id="{AEEB2C10-4423-46F8-A4D4-1215E40F31AB}"/>
-              </a:ext>
-            </a:extLst>
-          </p:cNvPr>
-          <p:cNvSpPr>
-            <a:spLocks xmlns:a="http://schemas.openxmlformats.org/drawingml/2006/main" noGrp="1"/>
-          </p:cNvSpPr>
-          <p:nvPr/>
-        </p:nvSpPr>
-        <p:spPr>
-          <a:xfrm xmlns:a="http://schemas.openxmlformats.org/drawingml/2006/main">
-            <a:off x="419100" y="7629525"/>
-            <a:ext cx="3133725" cy="400050"/>
-          </a:xfrm>
-          <a:prstGeom xmlns:a="http://schemas.openxmlformats.org/drawingml/2006/main" prst="rect">
-            <a:avLst/>
-          </a:prstGeom>
-          <a:noFill xmlns:a="http://schemas.openxmlformats.org/drawingml/2006/main"/>
-          <a:ln xmlns:a="http://schemas.openxmlformats.org/drawingml/2006/main" w="0">
-            <a:noFill/>
-          </a:ln>
-        </p:spPr>
-        <p:txBody>
-          <a:bodyPr xmlns:a="http://schemas.openxmlformats.org/drawingml/2006/main" wrap="none" lIns="0" tIns="0" rIns="0" bIns="0" anchor="t">
-            <a:noAutofit/>
-          </a:bodyPr>
-          <a:lstStyle xmlns:a="http://schemas.openxmlformats.org/drawingml/2006/main"/>
-          <a:p xmlns:a="http://schemas.openxmlformats.org/drawingml/2006/main">
-            <a:pPr algn="l">
-              <a:defRPr sz="2925" b="1">
-                <a:solidFill>
-                  <a:srgbClr val="0A1F45"/>
-                </a:solidFill>
-                <a:latin typeface="Arial Narrow"/>
-                <a:ea typeface="Arial Narrow"/>
-                <a:cs typeface="Arial Narrow"/>
-              </a:defRPr>
-            </a:pPr>
-            <a:r>
-              <a:rPr sz="2925" b="1">
-                <a:solidFill>
-                  <a:srgbClr val="0A1F45"/>
-                </a:solidFill>
-                <a:latin typeface="Arial Narrow"/>
-                <a:ea typeface="Arial Narrow"/>
-                <a:cs typeface="Arial Narrow"/>
-              </a:rPr>
-              <a:t>BEFORE</a:t>
-            </a:r>
-          </a:p>
-        </p:txBody>
-      </p:sp>
-      <p:sp>
-        <p:nvSpPr>
-          <p:cNvPr id="27" name="profile-71">
-            <a:extLst xmlns:a="http://schemas.openxmlformats.org/drawingml/2006/main">
-              <a:ext uri="{FF2B5EF4-FFF2-40B4-BE49-F238E27FC236}">
-                <a16:creationId xmlns:a16="http://schemas.microsoft.com/office/drawing/2014/main" id="{F437392F-E429-49C9-A4CA-EF8B8F8C8DB5}"/>
-              </a:ext>
-            </a:extLst>
-          </p:cNvPr>
-          <p:cNvSpPr>
-            <a:spLocks xmlns:a="http://schemas.openxmlformats.org/drawingml/2006/main" noGrp="1"/>
-          </p:cNvSpPr>
-          <p:nvPr/>
-        </p:nvSpPr>
-        <p:spPr>
-          <a:xfrm xmlns:a="http://schemas.openxmlformats.org/drawingml/2006/main">
-            <a:off x="419100" y="8010525"/>
-            <a:ext cx="3133725" cy="400050"/>
-          </a:xfrm>
-          <a:prstGeom xmlns:a="http://schemas.openxmlformats.org/drawingml/2006/main" prst="rect">
-            <a:avLst/>
-          </a:prstGeom>
-          <a:noFill xmlns:a="http://schemas.openxmlformats.org/drawingml/2006/main"/>
-          <a:ln xmlns:a="http://schemas.openxmlformats.org/drawingml/2006/main" w="0">
-            <a:noFill/>
-          </a:ln>
-        </p:spPr>
-        <p:txBody>
-          <a:bodyPr xmlns:a="http://schemas.openxmlformats.org/drawingml/2006/main" wrap="none" lIns="0" tIns="0" rIns="0" bIns="0" anchor="t">
-            <a:noAutofit/>
-          </a:bodyPr>
-          <a:lstStyle xmlns:a="http://schemas.openxmlformats.org/drawingml/2006/main"/>
-          <a:p xmlns:a="http://schemas.openxmlformats.org/drawingml/2006/main">
-            <a:pPr algn="l">
-              <a:defRPr sz="2925" b="1">
-                <a:solidFill>
-                  <a:srgbClr val="0A1F45"/>
-                </a:solidFill>
-                <a:latin typeface="Arial Narrow"/>
-                <a:ea typeface="Arial Narrow"/>
-                <a:cs typeface="Arial Narrow"/>
-              </a:defRPr>
-            </a:pPr>
-            <a:r>
-              <a:rPr sz="2925" b="1">
-                <a:solidFill>
-                  <a:srgbClr val="0A1F45"/>
-                </a:solidFill>
-                <a:latin typeface="Arial Narrow"/>
-                <a:ea typeface="Arial Narrow"/>
-                <a:cs typeface="Arial Narrow"/>
-              </a:rPr>
-              <a:t>&amp; AFTER</a:t>
-            </a:r>
-          </a:p>
-        </p:txBody>
-      </p:sp>
-      <p:sp>
-        <p:nvSpPr>
-          <p:cNvPr id="28" name="profile-72">
-            <a:extLst xmlns:a="http://schemas.openxmlformats.org/drawingml/2006/main">
-              <a:ext uri="{FF2B5EF4-FFF2-40B4-BE49-F238E27FC236}">
-                <a16:creationId xmlns:a16="http://schemas.microsoft.com/office/drawing/2014/main" id="{22460EA4-2ECA-433C-8D2D-ABE9AF58C257}"/>
-              </a:ext>
-            </a:extLst>
-          </p:cNvPr>
-          <p:cNvSpPr>
-            <a:spLocks xmlns:a="http://schemas.openxmlformats.org/drawingml/2006/main" noGrp="1"/>
-          </p:cNvSpPr>
-          <p:nvPr/>
-        </p:nvSpPr>
-        <p:spPr>
-          <a:xfrm xmlns:a="http://schemas.openxmlformats.org/drawingml/2006/main">
-            <a:off x="419100" y="8639175"/>
-            <a:ext cx="2971800" cy="257175"/>
-          </a:xfrm>
-          <a:prstGeom xmlns:a="http://schemas.openxmlformats.org/drawingml/2006/main" prst="rect">
-            <a:avLst/>
-          </a:prstGeom>
-          <a:noFill xmlns:a="http://schemas.openxmlformats.org/drawingml/2006/main"/>
-          <a:ln xmlns:a="http://schemas.openxmlformats.org/drawingml/2006/main" w="0">
-            <a:noFill/>
-          </a:ln>
-        </p:spPr>
-        <p:txBody>
-          <a:bodyPr xmlns:a="http://schemas.openxmlformats.org/drawingml/2006/main" wrap="none" lIns="0" tIns="0" rIns="0" bIns="0" anchor="t">
-            <a:noAutofit/>
-          </a:bodyPr>
-          <a:lstStyle xmlns:a="http://schemas.openxmlformats.org/drawingml/2006/main"/>
-          <a:p xmlns:a="http://schemas.openxmlformats.org/drawingml/2006/main">
-            <a:pPr algn="l">
-              <a:defRPr sz="1275" b="0">
-                <a:solidFill>
-                  <a:srgbClr val="0B1B33"/>
-                </a:solidFill>
-                <a:latin typeface="Arial"/>
-                <a:ea typeface="Arial"/>
-                <a:cs typeface="Arial"/>
-              </a:defRPr>
-            </a:pPr>
-            <a:r>
-              <a:rPr sz="1275" b="0">
-                <a:solidFill>
-                  <a:srgbClr val="0B1B33"/>
-                </a:solidFill>
-                <a:latin typeface="Arial"/>
-                <a:ea typeface="Arial"/>
-                <a:cs typeface="Arial"/>
-              </a:rPr>
-              <a:t>The photographs show the same site</a:t>
-            </a:r>
-          </a:p>
-        </p:txBody>
-      </p:sp>
-      <p:sp>
-        <p:nvSpPr>
-          <p:cNvPr id="29" name="profile-73">
-            <a:extLst xmlns:a="http://schemas.openxmlformats.org/drawingml/2006/main">
-              <a:ext uri="{FF2B5EF4-FFF2-40B4-BE49-F238E27FC236}">
-                <a16:creationId xmlns:a16="http://schemas.microsoft.com/office/drawing/2014/main" id="{9BAB3489-C492-437D-AF17-216108054B8A}"/>
-              </a:ext>
-            </a:extLst>
-          </p:cNvPr>
-          <p:cNvSpPr>
-            <a:spLocks xmlns:a="http://schemas.openxmlformats.org/drawingml/2006/main" noGrp="1"/>
-          </p:cNvSpPr>
-          <p:nvPr/>
-        </p:nvSpPr>
-        <p:spPr>
-          <a:xfrm xmlns:a="http://schemas.openxmlformats.org/drawingml/2006/main">
-            <a:off x="419100" y="8877300"/>
-            <a:ext cx="2971800" cy="257175"/>
-          </a:xfrm>
-          <a:prstGeom xmlns:a="http://schemas.openxmlformats.org/drawingml/2006/main" prst="rect">
-            <a:avLst/>
-          </a:prstGeom>
-          <a:noFill xmlns:a="http://schemas.openxmlformats.org/drawingml/2006/main"/>
-          <a:ln xmlns:a="http://schemas.openxmlformats.org/drawingml/2006/main" w="0">
-            <a:noFill/>
-          </a:ln>
-        </p:spPr>
-        <p:txBody>
-          <a:bodyPr xmlns:a="http://schemas.openxmlformats.org/drawingml/2006/main" wrap="none" lIns="0" tIns="0" rIns="0" bIns="0" anchor="t">
-            <a:noAutofit/>
-          </a:bodyPr>
-          <a:lstStyle xmlns:a="http://schemas.openxmlformats.org/drawingml/2006/main"/>
-          <a:p xmlns:a="http://schemas.openxmlformats.org/drawingml/2006/main">
-            <a:pPr algn="l">
-              <a:defRPr sz="1275" b="0">
-                <a:solidFill>
-                  <a:srgbClr val="0B1B33"/>
-                </a:solidFill>
-                <a:latin typeface="Arial"/>
-                <a:ea typeface="Arial"/>
-                <a:cs typeface="Arial"/>
-              </a:defRPr>
-            </a:pPr>
-            <a:r>
-              <a:rPr sz="1275" b="0">
-                <a:solidFill>
-                  <a:srgbClr val="0B1B33"/>
-                </a:solidFill>
-                <a:latin typeface="Arial"/>
-                <a:ea typeface="Arial"/>
-                <a:cs typeface="Arial"/>
-              </a:rPr>
-              <a:t>before and after service.</a:t>
-            </a:r>
-          </a:p>
-        </p:txBody>
-      </p:sp>
-      <p:sp>
-        <p:nvSpPr>
-          <p:cNvPr id="30" name="profile-74">
-            <a:extLst xmlns:a="http://schemas.openxmlformats.org/drawingml/2006/main">
-              <a:ext uri="{FF2B5EF4-FFF2-40B4-BE49-F238E27FC236}">
-                <a16:creationId xmlns:a16="http://schemas.microsoft.com/office/drawing/2014/main" id="{88760E0D-D47D-41FB-8222-D6ADCC4AC0DC}"/>
-              </a:ext>
-            </a:extLst>
-          </p:cNvPr>
-          <p:cNvSpPr>
-            <a:spLocks xmlns:a="http://schemas.openxmlformats.org/drawingml/2006/main" noGrp="1"/>
-          </p:cNvSpPr>
-          <p:nvPr/>
-        </p:nvSpPr>
-        <p:spPr>
-          <a:xfrm xmlns:a="http://schemas.openxmlformats.org/drawingml/2006/main">
-            <a:off x="419100" y="9315450"/>
-            <a:ext cx="2971800" cy="190500"/>
-          </a:xfrm>
-          <a:prstGeom xmlns:a="http://schemas.openxmlformats.org/drawingml/2006/main" prst="rect">
-            <a:avLst/>
-          </a:prstGeom>
-          <a:noFill xmlns:a="http://schemas.openxmlformats.org/drawingml/2006/main"/>
-          <a:ln xmlns:a="http://schemas.openxmlformats.org/drawingml/2006/main" w="0">
-            <a:noFill/>
-          </a:ln>
-        </p:spPr>
-        <p:txBody>
-          <a:bodyPr xmlns:a="http://schemas.openxmlformats.org/drawingml/2006/main" wrap="none" lIns="0" tIns="0" rIns="0" bIns="0" anchor="t">
-            <a:noAutofit/>
-          </a:bodyPr>
-          <a:lstStyle xmlns:a="http://schemas.openxmlformats.org/drawingml/2006/main"/>
-          <a:p xmlns:a="http://schemas.openxmlformats.org/drawingml/2006/main">
-            <a:pPr algn="l">
-              <a:defRPr sz="975" b="0">
-                <a:solidFill>
-                  <a:srgbClr val="5B6B85"/>
-                </a:solidFill>
-                <a:latin typeface="Arial"/>
-                <a:ea typeface="Arial"/>
-                <a:cs typeface="Arial"/>
-              </a:defRPr>
-            </a:pPr>
-            <a:r>
-              <a:rPr sz="975" b="0">
-                <a:solidFill>
-                  <a:srgbClr val="5B6B85"/>
-                </a:solidFill>
-                <a:latin typeface="Arial"/>
-                <a:ea typeface="Arial"/>
-                <a:cs typeface="Arial"/>
-              </a:rPr>
-              <a:t>Final scope follows site access and tank or pipe</a:t>
-            </a:r>
-          </a:p>
-        </p:txBody>
-      </p:sp>
-      <p:sp>
-        <p:nvSpPr>
-          <p:cNvPr id="31" name="profile-75">
-            <a:extLst xmlns:a="http://schemas.openxmlformats.org/drawingml/2006/main">
-              <a:ext uri="{FF2B5EF4-FFF2-40B4-BE49-F238E27FC236}">
-                <a16:creationId xmlns:a16="http://schemas.microsoft.com/office/drawing/2014/main" id="{4F0C40DB-5F69-4AD5-BCC3-C06C1A967AC5}"/>
-              </a:ext>
-            </a:extLst>
-          </p:cNvPr>
-          <p:cNvSpPr>
-            <a:spLocks xmlns:a="http://schemas.openxmlformats.org/drawingml/2006/main" noGrp="1"/>
-          </p:cNvSpPr>
-          <p:nvPr/>
-        </p:nvSpPr>
-        <p:spPr>
-          <a:xfrm xmlns:a="http://schemas.openxmlformats.org/drawingml/2006/main">
-            <a:off x="419100" y="9486900"/>
-            <a:ext cx="2971800" cy="190500"/>
-          </a:xfrm>
-          <a:prstGeom xmlns:a="http://schemas.openxmlformats.org/drawingml/2006/main" prst="rect">
-            <a:avLst/>
-          </a:prstGeom>
-          <a:noFill xmlns:a="http://schemas.openxmlformats.org/drawingml/2006/main"/>
-          <a:ln xmlns:a="http://schemas.openxmlformats.org/drawingml/2006/main" w="0">
-            <a:noFill/>
-          </a:ln>
-        </p:spPr>
-        <p:txBody>
-          <a:bodyPr xmlns:a="http://schemas.openxmlformats.org/drawingml/2006/main" wrap="none" lIns="0" tIns="0" rIns="0" bIns="0" anchor="t">
-            <a:noAutofit/>
-          </a:bodyPr>
-          <a:lstStyle xmlns:a="http://schemas.openxmlformats.org/drawingml/2006/main"/>
-          <a:p xmlns:a="http://schemas.openxmlformats.org/drawingml/2006/main">
-            <a:pPr algn="l">
-              <a:defRPr sz="975" b="0">
-                <a:solidFill>
-                  <a:srgbClr val="5B6B85"/>
-                </a:solidFill>
-                <a:latin typeface="Arial"/>
-                <a:ea typeface="Arial"/>
-                <a:cs typeface="Arial"/>
-              </a:defRPr>
-            </a:pPr>
-            <a:r>
-              <a:rPr sz="975" b="0">
-                <a:solidFill>
-                  <a:srgbClr val="5B6B85"/>
-                </a:solidFill>
-                <a:latin typeface="Arial"/>
-                <a:ea typeface="Arial"/>
-                <a:cs typeface="Arial"/>
-              </a:rPr>
-              <a:t>conditions.</a:t>
-            </a:r>
-          </a:p>
-        </p:txBody>
-      </p:sp>
-      <p:sp>
-        <p:nvSpPr>
-          <p:cNvPr id="32" name="profile-76">
-            <a:extLst xmlns:a="http://schemas.openxmlformats.org/drawingml/2006/main">
-              <a:ext uri="{FF2B5EF4-FFF2-40B4-BE49-F238E27FC236}">
-                <a16:creationId xmlns:a16="http://schemas.microsoft.com/office/drawing/2014/main" id="{F473F7B6-A16A-4A8C-A75F-8DCA09FA225A}"/>
+              <a:t>AFTER SERVICE</a:t>
+            </a:r>
+          </a:p>
+        </p:txBody>
+      </p:sp>
+      <p:sp>
+        <p:nvSpPr>
+          <p:cNvPr id="28" name="profile-68">
+            <a:extLst xmlns:a="http://schemas.openxmlformats.org/drawingml/2006/main">
+              <a:ext uri="{FF2B5EF4-FFF2-40B4-BE49-F238E27FC236}">
+                <a16:creationId xmlns:a16="http://schemas.microsoft.com/office/drawing/2014/main" id="{18E8212D-8546-433B-AD18-8F707AC571BD}"/>
               </a:ext>
             </a:extLst>
           </p:cNvPr>
@@ -5756,10 +5286,10 @@
       </p:sp>
       <p:sp>
         <p:nvSpPr>
-          <p:cNvPr id="33" name="profile-77">
-            <a:extLst xmlns:a="http://schemas.openxmlformats.org/drawingml/2006/main">
-              <a:ext uri="{FF2B5EF4-FFF2-40B4-BE49-F238E27FC236}">
-                <a16:creationId xmlns:a16="http://schemas.microsoft.com/office/drawing/2014/main" id="{505EF952-92FC-497D-A007-942D32F310DC}"/>
+          <p:cNvPr id="29" name="profile-69">
+            <a:extLst xmlns:a="http://schemas.openxmlformats.org/drawingml/2006/main">
+              <a:ext uri="{FF2B5EF4-FFF2-40B4-BE49-F238E27FC236}">
+                <a16:creationId xmlns:a16="http://schemas.microsoft.com/office/drawing/2014/main" id="{391F27DB-9D69-4D6D-94BF-82C981C3D833}"/>
               </a:ext>
             </a:extLst>
           </p:cNvPr>
@@ -5802,10 +5332,10 @@
       </p:sp>
       <p:sp>
         <p:nvSpPr>
-          <p:cNvPr id="34" name="profile-78">
-            <a:extLst xmlns:a="http://schemas.openxmlformats.org/drawingml/2006/main">
-              <a:ext uri="{FF2B5EF4-FFF2-40B4-BE49-F238E27FC236}">
-                <a16:creationId xmlns:a16="http://schemas.microsoft.com/office/drawing/2014/main" id="{6B618D14-4FEF-411A-97AB-E93CE577B232}"/>
+          <p:cNvPr id="30" name="profile-70">
+            <a:extLst xmlns:a="http://schemas.openxmlformats.org/drawingml/2006/main">
+              <a:ext uri="{FF2B5EF4-FFF2-40B4-BE49-F238E27FC236}">
+                <a16:creationId xmlns:a16="http://schemas.microsoft.com/office/drawing/2014/main" id="{BEAEADE8-0B21-4AAE-88D1-A22213024253}"/>
               </a:ext>
             </a:extLst>
           </p:cNvPr>
@@ -5859,10 +5389,10 @@
       </p:sp>
       <p:sp>
         <p:nvSpPr>
-          <p:cNvPr id="35" name="profile-79">
-            <a:extLst xmlns:a="http://schemas.openxmlformats.org/drawingml/2006/main">
-              <a:ext uri="{FF2B5EF4-FFF2-40B4-BE49-F238E27FC236}">
-                <a16:creationId xmlns:a16="http://schemas.microsoft.com/office/drawing/2014/main" id="{B8D36C87-17FD-4334-830A-4D1ABA1C9E1F}"/>
+          <p:cNvPr id="31" name="profile-71">
+            <a:extLst xmlns:a="http://schemas.openxmlformats.org/drawingml/2006/main">
+              <a:ext uri="{FF2B5EF4-FFF2-40B4-BE49-F238E27FC236}">
+                <a16:creationId xmlns:a16="http://schemas.microsoft.com/office/drawing/2014/main" id="{7E90334D-159E-4365-8F18-B7E14AB1E2B1}"/>
               </a:ext>
             </a:extLst>
           </p:cNvPr>
@@ -5916,10 +5446,10 @@
       </p:sp>
       <p:sp>
         <p:nvSpPr>
-          <p:cNvPr id="36" name="profile-80">
-            <a:extLst xmlns:a="http://schemas.openxmlformats.org/drawingml/2006/main">
-              <a:ext uri="{FF2B5EF4-FFF2-40B4-BE49-F238E27FC236}">
-                <a16:creationId xmlns:a16="http://schemas.microsoft.com/office/drawing/2014/main" id="{76086125-4036-42A7-8530-21944755EE7A}"/>
+          <p:cNvPr id="32" name="profile-72">
+            <a:extLst xmlns:a="http://schemas.openxmlformats.org/drawingml/2006/main">
+              <a:ext uri="{FF2B5EF4-FFF2-40B4-BE49-F238E27FC236}">
+                <a16:creationId xmlns:a16="http://schemas.microsoft.com/office/drawing/2014/main" id="{5FB373A7-92A2-4263-B3C1-FDE7637911D3}"/>
               </a:ext>
             </a:extLst>
           </p:cNvPr>
@@ -5973,10 +5503,10 @@
       </p:sp>
       <p:sp>
         <p:nvSpPr>
-          <p:cNvPr id="37" name="profile-81">
-            <a:extLst xmlns:a="http://schemas.openxmlformats.org/drawingml/2006/main">
-              <a:ext uri="{FF2B5EF4-FFF2-40B4-BE49-F238E27FC236}">
-                <a16:creationId xmlns:a16="http://schemas.microsoft.com/office/drawing/2014/main" id="{DD2C7F45-FE71-4D5E-B232-8B8EEBC38606}"/>
+          <p:cNvPr id="33" name="profile-73">
+            <a:extLst xmlns:a="http://schemas.openxmlformats.org/drawingml/2006/main">
+              <a:ext uri="{FF2B5EF4-FFF2-40B4-BE49-F238E27FC236}">
+                <a16:creationId xmlns:a16="http://schemas.microsoft.com/office/drawing/2014/main" id="{D3DB19D0-DFC2-4A7D-BCFB-5A543545A13E}"/>
               </a:ext>
             </a:extLst>
           </p:cNvPr>
@@ -6031,7 +5561,7 @@
     </p:spTree>
     <p:extLst>
       <p:ext uri="{BB962C8B-B14F-4D97-AF65-F5344CB8AC3E}">
-        <p14:creationId xmlns:p14="http://schemas.microsoft.com/office/powerpoint/2010/main" val="972431799"/>
+        <p14:creationId xmlns:p14="http://schemas.microsoft.com/office/powerpoint/2010/main" val="575450076"/>
       </p:ext>
     </p:extLst>
   </p:cSld>
@@ -6059,23 +5589,20 @@
       </p:grpSpPr>
       <p:pic>
         <p:nvPicPr>
-          <p:cNvPr id="26" name=""/>
+          <p:cNvPr id="27" name=""/>
           <p:cNvPicPr>
             <a:picLocks xmlns:a="http://schemas.openxmlformats.org/drawingml/2006/main" noChangeAspect="1"/>
           </p:cNvPicPr>
           <p:nvPr/>
         </p:nvPicPr>
         <p:blipFill>
-          <a:blip xmlns:r="http://schemas.openxmlformats.org/officeDocument/2006/relationships" xmlns:a="http://schemas.openxmlformats.org/drawingml/2006/main" r:embed="R6dbe4942db9b4c05"/>
-          <a:srcRect xmlns:a="http://schemas.openxmlformats.org/drawingml/2006/main" l="0" t="17439" r="0" b="17439"/>
-          <a:stretch xmlns:a="http://schemas.openxmlformats.org/drawingml/2006/main">
-            <a:fillRect l="0" t="0" r="0" b="0"/>
-          </a:stretch>
+          <a:blip xmlns:r="http://schemas.openxmlformats.org/officeDocument/2006/relationships" xmlns:a="http://schemas.openxmlformats.org/drawingml/2006/main" r:embed="R09ddc44bae55426c"/>
+          <a:stretch xmlns:a="http://schemas.openxmlformats.org/drawingml/2006/main"/>
         </p:blipFill>
         <p:spPr>
           <a:xfrm xmlns:a="http://schemas.openxmlformats.org/drawingml/2006/main">
             <a:off x="0" y="0"/>
-            <a:ext cx="7562850" cy="3286125"/>
+            <a:ext cx="7562850" cy="5041900"/>
           </a:xfrm>
           <a:prstGeom xmlns:a="http://schemas.openxmlformats.org/drawingml/2006/main" prst="rect">
             <a:avLst/>
@@ -6084,21 +5611,51 @@
       </p:pic>
       <p:sp>
         <p:nvSpPr>
-          <p:cNvPr id="2" name="profile-82">
-            <a:extLst xmlns:a="http://schemas.openxmlformats.org/drawingml/2006/main">
-              <a:ext uri="{FF2B5EF4-FFF2-40B4-BE49-F238E27FC236}">
-                <a16:creationId xmlns:a16="http://schemas.microsoft.com/office/drawing/2014/main" id="{A26DF3A3-D889-4DCB-9F57-F5BDC2E3AF56}"/>
-              </a:ext>
-            </a:extLst>
-          </p:cNvPr>
-          <p:cNvSpPr>
-            <a:spLocks xmlns:a="http://schemas.openxmlformats.org/drawingml/2006/main" noGrp="1"/>
-          </p:cNvSpPr>
-          <p:nvPr/>
-        </p:nvSpPr>
-        <p:spPr>
-          <a:xfrm xmlns:a="http://schemas.openxmlformats.org/drawingml/2006/main">
-            <a:off x="257175" y="2552700"/>
+          <p:cNvPr id="2" name="profile-74">
+            <a:extLst xmlns:a="http://schemas.openxmlformats.org/drawingml/2006/main">
+              <a:ext uri="{FF2B5EF4-FFF2-40B4-BE49-F238E27FC236}">
+                <a16:creationId xmlns:a16="http://schemas.microsoft.com/office/drawing/2014/main" id="{9182A3FD-C239-4EA6-ACC8-5474659F335E}"/>
+              </a:ext>
+            </a:extLst>
+          </p:cNvPr>
+          <p:cNvSpPr>
+            <a:spLocks xmlns:a="http://schemas.openxmlformats.org/drawingml/2006/main" noGrp="1"/>
+          </p:cNvSpPr>
+          <p:nvPr/>
+        </p:nvSpPr>
+        <p:spPr>
+          <a:xfrm xmlns:a="http://schemas.openxmlformats.org/drawingml/2006/main">
+            <a:off x="0" y="4000500"/>
+            <a:ext cx="7562850" cy="1238250"/>
+          </a:xfrm>
+          <a:prstGeom xmlns:a="http://schemas.openxmlformats.org/drawingml/2006/main" prst="rect">
+            <a:avLst/>
+          </a:prstGeom>
+          <a:solidFill xmlns:a="http://schemas.openxmlformats.org/drawingml/2006/main">
+            <a:srgbClr val="F4F6FA"/>
+          </a:solidFill>
+          <a:ln xmlns:a="http://schemas.openxmlformats.org/drawingml/2006/main" w="0">
+            <a:noFill/>
+          </a:ln>
+        </p:spPr>
+      </p:sp>
+      <p:sp>
+        <p:nvSpPr>
+          <p:cNvPr id="3" name="profile-75">
+            <a:extLst xmlns:a="http://schemas.openxmlformats.org/drawingml/2006/main">
+              <a:ext uri="{FF2B5EF4-FFF2-40B4-BE49-F238E27FC236}">
+                <a16:creationId xmlns:a16="http://schemas.microsoft.com/office/drawing/2014/main" id="{34FC4688-9A4B-4A13-8F63-1148972DAD91}"/>
+              </a:ext>
+            </a:extLst>
+          </p:cNvPr>
+          <p:cNvSpPr>
+            <a:spLocks xmlns:a="http://schemas.openxmlformats.org/drawingml/2006/main" noGrp="1"/>
+          </p:cNvSpPr>
+          <p:nvPr/>
+        </p:nvSpPr>
+        <p:spPr>
+          <a:xfrm xmlns:a="http://schemas.openxmlformats.org/drawingml/2006/main">
+            <a:off x="257175" y="3276600"/>
             <a:ext cx="7000875" cy="1323975"/>
           </a:xfrm>
           <a:custGeom xmlns:a="http://schemas.openxmlformats.org/drawingml/2006/main">
@@ -6130,21 +5687,21 @@
       </p:sp>
       <p:sp>
         <p:nvSpPr>
-          <p:cNvPr id="3" name="profile-83">
-            <a:extLst xmlns:a="http://schemas.openxmlformats.org/drawingml/2006/main">
-              <a:ext uri="{FF2B5EF4-FFF2-40B4-BE49-F238E27FC236}">
-                <a16:creationId xmlns:a16="http://schemas.microsoft.com/office/drawing/2014/main" id="{5227BFE6-6304-4F29-9997-FAE82C5D7E0D}"/>
-              </a:ext>
-            </a:extLst>
-          </p:cNvPr>
-          <p:cNvSpPr>
-            <a:spLocks xmlns:a="http://schemas.openxmlformats.org/drawingml/2006/main" noGrp="1"/>
-          </p:cNvSpPr>
-          <p:nvPr/>
-        </p:nvSpPr>
-        <p:spPr>
-          <a:xfrm xmlns:a="http://schemas.openxmlformats.org/drawingml/2006/main">
-            <a:off x="257175" y="2552700"/>
+          <p:cNvPr id="4" name="profile-76">
+            <a:extLst xmlns:a="http://schemas.openxmlformats.org/drawingml/2006/main">
+              <a:ext uri="{FF2B5EF4-FFF2-40B4-BE49-F238E27FC236}">
+                <a16:creationId xmlns:a16="http://schemas.microsoft.com/office/drawing/2014/main" id="{DC97A207-4377-4C6A-A9A7-57CBDC2C7424}"/>
+              </a:ext>
+            </a:extLst>
+          </p:cNvPr>
+          <p:cNvSpPr>
+            <a:spLocks xmlns:a="http://schemas.openxmlformats.org/drawingml/2006/main" noGrp="1"/>
+          </p:cNvSpPr>
+          <p:nvPr/>
+        </p:nvSpPr>
+        <p:spPr>
+          <a:xfrm xmlns:a="http://schemas.openxmlformats.org/drawingml/2006/main">
+            <a:off x="257175" y="3276600"/>
             <a:ext cx="6896100" cy="1238250"/>
           </a:xfrm>
           <a:custGeom xmlns:a="http://schemas.openxmlformats.org/drawingml/2006/main">
@@ -6176,21 +5733,21 @@
       </p:sp>
       <p:sp>
         <p:nvSpPr>
-          <p:cNvPr id="4" name="profile-84">
-            <a:extLst xmlns:a="http://schemas.openxmlformats.org/drawingml/2006/main">
-              <a:ext uri="{FF2B5EF4-FFF2-40B4-BE49-F238E27FC236}">
-                <a16:creationId xmlns:a16="http://schemas.microsoft.com/office/drawing/2014/main" id="{20477DC3-B396-4888-9A59-FA4E2941754D}"/>
-              </a:ext>
-            </a:extLst>
-          </p:cNvPr>
-          <p:cNvSpPr>
-            <a:spLocks xmlns:a="http://schemas.openxmlformats.org/drawingml/2006/main" noGrp="1"/>
-          </p:cNvSpPr>
-          <p:nvPr/>
-        </p:nvSpPr>
-        <p:spPr>
-          <a:xfrm xmlns:a="http://schemas.openxmlformats.org/drawingml/2006/main">
-            <a:off x="733425" y="2724150"/>
+          <p:cNvPr id="5" name="profile-77">
+            <a:extLst xmlns:a="http://schemas.openxmlformats.org/drawingml/2006/main">
+              <a:ext uri="{FF2B5EF4-FFF2-40B4-BE49-F238E27FC236}">
+                <a16:creationId xmlns:a16="http://schemas.microsoft.com/office/drawing/2014/main" id="{3C62740F-59F6-4500-BCB9-EA4C83E2F2D6}"/>
+              </a:ext>
+            </a:extLst>
+          </p:cNvPr>
+          <p:cNvSpPr>
+            <a:spLocks xmlns:a="http://schemas.openxmlformats.org/drawingml/2006/main" noGrp="1"/>
+          </p:cNvSpPr>
+          <p:nvPr/>
+        </p:nvSpPr>
+        <p:spPr>
+          <a:xfrm xmlns:a="http://schemas.openxmlformats.org/drawingml/2006/main">
+            <a:off x="733425" y="3448050"/>
             <a:ext cx="5800725" cy="445008"/>
           </a:xfrm>
           <a:prstGeom xmlns:a="http://schemas.openxmlformats.org/drawingml/2006/main" prst="rect">
@@ -6233,21 +5790,21 @@
       </p:sp>
       <p:sp>
         <p:nvSpPr>
-          <p:cNvPr id="5" name="profile-85">
-            <a:extLst xmlns:a="http://schemas.openxmlformats.org/drawingml/2006/main">
-              <a:ext uri="{FF2B5EF4-FFF2-40B4-BE49-F238E27FC236}">
-                <a16:creationId xmlns:a16="http://schemas.microsoft.com/office/drawing/2014/main" id="{7AF22ED0-5295-41D1-8112-889C46A3D090}"/>
-              </a:ext>
-            </a:extLst>
-          </p:cNvPr>
-          <p:cNvSpPr>
-            <a:spLocks xmlns:a="http://schemas.openxmlformats.org/drawingml/2006/main" noGrp="1"/>
-          </p:cNvSpPr>
-          <p:nvPr/>
-        </p:nvSpPr>
-        <p:spPr>
-          <a:xfrm xmlns:a="http://schemas.openxmlformats.org/drawingml/2006/main">
-            <a:off x="733425" y="3150108"/>
+          <p:cNvPr id="6" name="profile-78">
+            <a:extLst xmlns:a="http://schemas.openxmlformats.org/drawingml/2006/main">
+              <a:ext uri="{FF2B5EF4-FFF2-40B4-BE49-F238E27FC236}">
+                <a16:creationId xmlns:a16="http://schemas.microsoft.com/office/drawing/2014/main" id="{F727ADBC-1402-4814-9965-C0B254DB1F6D}"/>
+              </a:ext>
+            </a:extLst>
+          </p:cNvPr>
+          <p:cNvSpPr>
+            <a:spLocks xmlns:a="http://schemas.openxmlformats.org/drawingml/2006/main" noGrp="1"/>
+          </p:cNvSpPr>
+          <p:nvPr/>
+        </p:nvSpPr>
+        <p:spPr>
+          <a:xfrm xmlns:a="http://schemas.openxmlformats.org/drawingml/2006/main">
+            <a:off x="733425" y="3874008"/>
             <a:ext cx="5800725" cy="445008"/>
           </a:xfrm>
           <a:prstGeom xmlns:a="http://schemas.openxmlformats.org/drawingml/2006/main" prst="rect">
@@ -6290,21 +5847,21 @@
       </p:sp>
       <p:sp>
         <p:nvSpPr>
-          <p:cNvPr id="6" name="profile-86">
-            <a:extLst xmlns:a="http://schemas.openxmlformats.org/drawingml/2006/main">
-              <a:ext uri="{FF2B5EF4-FFF2-40B4-BE49-F238E27FC236}">
-                <a16:creationId xmlns:a16="http://schemas.microsoft.com/office/drawing/2014/main" id="{2C88F35E-9163-4F9A-B211-EBB27BC97D5B}"/>
-              </a:ext>
-            </a:extLst>
-          </p:cNvPr>
-          <p:cNvSpPr>
-            <a:spLocks xmlns:a="http://schemas.openxmlformats.org/drawingml/2006/main" noGrp="1"/>
-          </p:cNvSpPr>
-          <p:nvPr/>
-        </p:nvSpPr>
-        <p:spPr>
-          <a:xfrm xmlns:a="http://schemas.openxmlformats.org/drawingml/2006/main">
-            <a:off x="419100" y="4010025"/>
+          <p:cNvPr id="7" name="profile-79">
+            <a:extLst xmlns:a="http://schemas.openxmlformats.org/drawingml/2006/main">
+              <a:ext uri="{FF2B5EF4-FFF2-40B4-BE49-F238E27FC236}">
+                <a16:creationId xmlns:a16="http://schemas.microsoft.com/office/drawing/2014/main" id="{122579A9-C25C-4DD9-B600-D8F7AADB936E}"/>
+              </a:ext>
+            </a:extLst>
+          </p:cNvPr>
+          <p:cNvSpPr>
+            <a:spLocks xmlns:a="http://schemas.openxmlformats.org/drawingml/2006/main" noGrp="1"/>
+          </p:cNvSpPr>
+          <p:nvPr/>
+        </p:nvSpPr>
+        <p:spPr>
+          <a:xfrm xmlns:a="http://schemas.openxmlformats.org/drawingml/2006/main">
+            <a:off x="419100" y="4733925"/>
             <a:ext cx="6724650" cy="155258"/>
           </a:xfrm>
           <a:prstGeom xmlns:a="http://schemas.openxmlformats.org/drawingml/2006/main" prst="rect">
@@ -6340,28 +5897,28 @@
                 <a:ea typeface="Arial"/>
                 <a:cs typeface="Arial"/>
               </a:rPr>
-              <a:t>Illustrative interior photograph / Max Vakhtbovych, Pexels</a:t>
-            </a:r>
-          </a:p>
-        </p:txBody>
-      </p:sp>
-      <p:sp>
-        <p:nvSpPr>
-          <p:cNvPr id="7" name="profile-87">
-            <a:extLst xmlns:a="http://schemas.openxmlformats.org/drawingml/2006/main">
-              <a:ext uri="{FF2B5EF4-FFF2-40B4-BE49-F238E27FC236}">
-                <a16:creationId xmlns:a16="http://schemas.microsoft.com/office/drawing/2014/main" id="{07A656D3-EF93-43CB-9F61-19FB33486E78}"/>
-              </a:ext>
-            </a:extLst>
-          </p:cNvPr>
-          <p:cNvSpPr>
-            <a:spLocks xmlns:a="http://schemas.openxmlformats.org/drawingml/2006/main" noGrp="1"/>
-          </p:cNvSpPr>
-          <p:nvPr/>
-        </p:nvSpPr>
-        <p:spPr>
-          <a:xfrm xmlns:a="http://schemas.openxmlformats.org/drawingml/2006/main">
-            <a:off x="419100" y="4467225"/>
+              <a:t>AI-generated service illustration</a:t>
+            </a:r>
+          </a:p>
+        </p:txBody>
+      </p:sp>
+      <p:sp>
+        <p:nvSpPr>
+          <p:cNvPr id="8" name="profile-80">
+            <a:extLst xmlns:a="http://schemas.openxmlformats.org/drawingml/2006/main">
+              <a:ext uri="{FF2B5EF4-FFF2-40B4-BE49-F238E27FC236}">
+                <a16:creationId xmlns:a16="http://schemas.microsoft.com/office/drawing/2014/main" id="{10AE0855-F6D9-467C-80A1-0F277C65646E}"/>
+              </a:ext>
+            </a:extLst>
+          </p:cNvPr>
+          <p:cNvSpPr>
+            <a:spLocks xmlns:a="http://schemas.openxmlformats.org/drawingml/2006/main" noGrp="1"/>
+          </p:cNvSpPr>
+          <p:nvPr/>
+        </p:nvSpPr>
+        <p:spPr>
+          <a:xfrm xmlns:a="http://schemas.openxmlformats.org/drawingml/2006/main">
+            <a:off x="419100" y="5172075"/>
             <a:ext cx="6724650" cy="365760"/>
           </a:xfrm>
           <a:prstGeom xmlns:a="http://schemas.openxmlformats.org/drawingml/2006/main" prst="rect">
@@ -6404,39 +5961,39 @@
       </p:sp>
       <p:sp>
         <p:nvSpPr>
-          <p:cNvPr id="8" name="profile-88">
-            <a:extLst xmlns:a="http://schemas.openxmlformats.org/drawingml/2006/main">
-              <a:ext uri="{FF2B5EF4-FFF2-40B4-BE49-F238E27FC236}">
-                <a16:creationId xmlns:a16="http://schemas.microsoft.com/office/drawing/2014/main" id="{251A57C1-631A-4F92-A88B-809400576A67}"/>
-              </a:ext>
-            </a:extLst>
-          </p:cNvPr>
-          <p:cNvSpPr>
-            <a:spLocks xmlns:a="http://schemas.openxmlformats.org/drawingml/2006/main" noGrp="1"/>
-          </p:cNvSpPr>
-          <p:nvPr/>
-        </p:nvSpPr>
-        <p:spPr>
-          <a:xfrm xmlns:a="http://schemas.openxmlformats.org/drawingml/2006/main">
-            <a:off x="419100" y="4972050"/>
-            <a:ext cx="6724650" cy="285750"/>
-          </a:xfrm>
-          <a:prstGeom xmlns:a="http://schemas.openxmlformats.org/drawingml/2006/main" prst="rect">
-            <a:avLst/>
-          </a:prstGeom>
-          <a:noFill xmlns:a="http://schemas.openxmlformats.org/drawingml/2006/main"/>
-          <a:ln xmlns:a="http://schemas.openxmlformats.org/drawingml/2006/main" w="0">
-            <a:noFill/>
-          </a:ln>
-        </p:spPr>
-        <p:txBody>
-          <a:bodyPr xmlns:a="http://schemas.openxmlformats.org/drawingml/2006/main" wrap="none" lIns="0" tIns="0" rIns="0" bIns="0" anchor="t">
-            <a:noAutofit/>
-          </a:bodyPr>
-          <a:lstStyle xmlns:a="http://schemas.openxmlformats.org/drawingml/2006/main"/>
-          <a:p xmlns:a="http://schemas.openxmlformats.org/drawingml/2006/main">
-            <a:pPr algn="l">
-              <a:defRPr sz="1425" b="0">
+          <p:cNvPr id="9" name="profile-81">
+            <a:extLst xmlns:a="http://schemas.openxmlformats.org/drawingml/2006/main">
+              <a:ext uri="{FF2B5EF4-FFF2-40B4-BE49-F238E27FC236}">
+                <a16:creationId xmlns:a16="http://schemas.microsoft.com/office/drawing/2014/main" id="{60BD586D-289B-4360-91D6-7D5D433920C9}"/>
+              </a:ext>
+            </a:extLst>
+          </p:cNvPr>
+          <p:cNvSpPr>
+            <a:spLocks xmlns:a="http://schemas.openxmlformats.org/drawingml/2006/main" noGrp="1"/>
+          </p:cNvSpPr>
+          <p:nvPr/>
+        </p:nvSpPr>
+        <p:spPr>
+          <a:xfrm xmlns:a="http://schemas.openxmlformats.org/drawingml/2006/main">
+            <a:off x="419100" y="5638800"/>
+            <a:ext cx="6724650" cy="266700"/>
+          </a:xfrm>
+          <a:prstGeom xmlns:a="http://schemas.openxmlformats.org/drawingml/2006/main" prst="rect">
+            <a:avLst/>
+          </a:prstGeom>
+          <a:noFill xmlns:a="http://schemas.openxmlformats.org/drawingml/2006/main"/>
+          <a:ln xmlns:a="http://schemas.openxmlformats.org/drawingml/2006/main" w="0">
+            <a:noFill/>
+          </a:ln>
+        </p:spPr>
+        <p:txBody>
+          <a:bodyPr xmlns:a="http://schemas.openxmlformats.org/drawingml/2006/main" wrap="none" lIns="0" tIns="0" rIns="0" bIns="0" anchor="t">
+            <a:noAutofit/>
+          </a:bodyPr>
+          <a:lstStyle xmlns:a="http://schemas.openxmlformats.org/drawingml/2006/main"/>
+          <a:p xmlns:a="http://schemas.openxmlformats.org/drawingml/2006/main">
+            <a:pPr algn="l">
+              <a:defRPr sz="1350" b="0">
                 <a:solidFill>
                   <a:srgbClr val="0B1B33"/>
                 </a:solidFill>
@@ -6446,7 +6003,7 @@
               </a:defRPr>
             </a:pPr>
             <a:r>
-              <a:rPr sz="1425" b="0">
+              <a:rPr sz="1350" b="0">
                 <a:solidFill>
                   <a:srgbClr val="0B1B33"/>
                 </a:solidFill>
@@ -6454,46 +6011,46 @@
                 <a:ea typeface="Arial"/>
                 <a:cs typeface="Arial"/>
               </a:rPr>
-              <a:t>Repair and improvement work for houses and condominiums, with a quotation</a:t>
-            </a:r>
-          </a:p>
-        </p:txBody>
-      </p:sp>
-      <p:sp>
-        <p:nvSpPr>
-          <p:cNvPr id="9" name="profile-89">
-            <a:extLst xmlns:a="http://schemas.openxmlformats.org/drawingml/2006/main">
-              <a:ext uri="{FF2B5EF4-FFF2-40B4-BE49-F238E27FC236}">
-                <a16:creationId xmlns:a16="http://schemas.microsoft.com/office/drawing/2014/main" id="{3A4417E3-622E-464E-9DBA-E465C7141159}"/>
-              </a:ext>
-            </a:extLst>
-          </p:cNvPr>
-          <p:cNvSpPr>
-            <a:spLocks xmlns:a="http://schemas.openxmlformats.org/drawingml/2006/main" noGrp="1"/>
-          </p:cNvSpPr>
-          <p:nvPr/>
-        </p:nvSpPr>
-        <p:spPr>
-          <a:xfrm xmlns:a="http://schemas.openxmlformats.org/drawingml/2006/main">
-            <a:off x="419100" y="5238750"/>
-            <a:ext cx="6724650" cy="285750"/>
-          </a:xfrm>
-          <a:prstGeom xmlns:a="http://schemas.openxmlformats.org/drawingml/2006/main" prst="rect">
-            <a:avLst/>
-          </a:prstGeom>
-          <a:noFill xmlns:a="http://schemas.openxmlformats.org/drawingml/2006/main"/>
-          <a:ln xmlns:a="http://schemas.openxmlformats.org/drawingml/2006/main" w="0">
-            <a:noFill/>
-          </a:ln>
-        </p:spPr>
-        <p:txBody>
-          <a:bodyPr xmlns:a="http://schemas.openxmlformats.org/drawingml/2006/main" wrap="none" lIns="0" tIns="0" rIns="0" bIns="0" anchor="t">
-            <a:noAutofit/>
-          </a:bodyPr>
-          <a:lstStyle xmlns:a="http://schemas.openxmlformats.org/drawingml/2006/main"/>
-          <a:p xmlns:a="http://schemas.openxmlformats.org/drawingml/2006/main">
-            <a:pPr algn="l">
-              <a:defRPr sz="1425" b="0">
+              <a:t>Repair and improvement work for houses and condominiums, with a quotation tailored to</a:t>
+            </a:r>
+          </a:p>
+        </p:txBody>
+      </p:sp>
+      <p:sp>
+        <p:nvSpPr>
+          <p:cNvPr id="10" name="profile-82">
+            <a:extLst xmlns:a="http://schemas.openxmlformats.org/drawingml/2006/main">
+              <a:ext uri="{FF2B5EF4-FFF2-40B4-BE49-F238E27FC236}">
+                <a16:creationId xmlns:a16="http://schemas.microsoft.com/office/drawing/2014/main" id="{B9A3A1FC-EDA3-4E97-B9CE-F4943BE1C395}"/>
+              </a:ext>
+            </a:extLst>
+          </p:cNvPr>
+          <p:cNvSpPr>
+            <a:spLocks xmlns:a="http://schemas.openxmlformats.org/drawingml/2006/main" noGrp="1"/>
+          </p:cNvSpPr>
+          <p:nvPr/>
+        </p:nvSpPr>
+        <p:spPr>
+          <a:xfrm xmlns:a="http://schemas.openxmlformats.org/drawingml/2006/main">
+            <a:off x="419100" y="5886450"/>
+            <a:ext cx="6724650" cy="266700"/>
+          </a:xfrm>
+          <a:prstGeom xmlns:a="http://schemas.openxmlformats.org/drawingml/2006/main" prst="rect">
+            <a:avLst/>
+          </a:prstGeom>
+          <a:noFill xmlns:a="http://schemas.openxmlformats.org/drawingml/2006/main"/>
+          <a:ln xmlns:a="http://schemas.openxmlformats.org/drawingml/2006/main" w="0">
+            <a:noFill/>
+          </a:ln>
+        </p:spPr>
+        <p:txBody>
+          <a:bodyPr xmlns:a="http://schemas.openxmlformats.org/drawingml/2006/main" wrap="none" lIns="0" tIns="0" rIns="0" bIns="0" anchor="t">
+            <a:noAutofit/>
+          </a:bodyPr>
+          <a:lstStyle xmlns:a="http://schemas.openxmlformats.org/drawingml/2006/main"/>
+          <a:p xmlns:a="http://schemas.openxmlformats.org/drawingml/2006/main">
+            <a:pPr algn="l">
+              <a:defRPr sz="1350" b="0">
                 <a:solidFill>
                   <a:srgbClr val="0B1B33"/>
                 </a:solidFill>
@@ -6503,7 +6060,7 @@
               </a:defRPr>
             </a:pPr>
             <a:r>
-              <a:rPr sz="1425" b="0">
+              <a:rPr sz="1350" b="0">
                 <a:solidFill>
                   <a:srgbClr val="0B1B33"/>
                 </a:solidFill>
@@ -6511,17 +6068,17 @@
                 <a:ea typeface="Arial"/>
                 <a:cs typeface="Arial"/>
               </a:rPr>
-              <a:t>tailored to the site and the agreed scope.</a:t>
-            </a:r>
-          </a:p>
-        </p:txBody>
-      </p:sp>
-      <p:sp>
-        <p:nvSpPr>
-          <p:cNvPr id="10" name="profile-90">
-            <a:extLst xmlns:a="http://schemas.openxmlformats.org/drawingml/2006/main">
-              <a:ext uri="{FF2B5EF4-FFF2-40B4-BE49-F238E27FC236}">
-                <a16:creationId xmlns:a16="http://schemas.microsoft.com/office/drawing/2014/main" id="{8086686B-C529-4B50-BC90-49F43B3FC24E}"/>
+              <a:t>the site and the agreed scope.</a:t>
+            </a:r>
+          </a:p>
+        </p:txBody>
+      </p:sp>
+      <p:sp>
+        <p:nvSpPr>
+          <p:cNvPr id="11" name="profile-83">
+            <a:extLst xmlns:a="http://schemas.openxmlformats.org/drawingml/2006/main">
+              <a:ext uri="{FF2B5EF4-FFF2-40B4-BE49-F238E27FC236}">
+                <a16:creationId xmlns:a16="http://schemas.microsoft.com/office/drawing/2014/main" id="{160254A7-DD98-4196-B9C0-BE53686E5C16}"/>
               </a:ext>
             </a:extLst>
           </p:cNvPr>
@@ -6564,10 +6121,10 @@
       </p:sp>
       <p:sp>
         <p:nvSpPr>
-          <p:cNvPr id="11" name="profile-91">
-            <a:extLst xmlns:a="http://schemas.openxmlformats.org/drawingml/2006/main">
-              <a:ext uri="{FF2B5EF4-FFF2-40B4-BE49-F238E27FC236}">
-                <a16:creationId xmlns:a16="http://schemas.microsoft.com/office/drawing/2014/main" id="{001C4924-7819-437B-B2CA-914F08C4F78C}"/>
+          <p:cNvPr id="12" name="profile-84">
+            <a:extLst xmlns:a="http://schemas.openxmlformats.org/drawingml/2006/main">
+              <a:ext uri="{FF2B5EF4-FFF2-40B4-BE49-F238E27FC236}">
+                <a16:creationId xmlns:a16="http://schemas.microsoft.com/office/drawing/2014/main" id="{31B63A82-756F-4F38-B360-7C891C4C5ED6}"/>
               </a:ext>
             </a:extLst>
           </p:cNvPr>
@@ -6594,10 +6151,10 @@
       </p:sp>
       <p:sp>
         <p:nvSpPr>
-          <p:cNvPr id="12" name="profile-92">
-            <a:extLst xmlns:a="http://schemas.openxmlformats.org/drawingml/2006/main">
-              <a:ext uri="{FF2B5EF4-FFF2-40B4-BE49-F238E27FC236}">
-                <a16:creationId xmlns:a16="http://schemas.microsoft.com/office/drawing/2014/main" id="{001ED787-BDF4-4A27-924C-26A0CD4342B7}"/>
+          <p:cNvPr id="13" name="profile-85">
+            <a:extLst xmlns:a="http://schemas.openxmlformats.org/drawingml/2006/main">
+              <a:ext uri="{FF2B5EF4-FFF2-40B4-BE49-F238E27FC236}">
+                <a16:creationId xmlns:a16="http://schemas.microsoft.com/office/drawing/2014/main" id="{8341A469-7CA6-4020-B3ED-FC653F440775}"/>
               </a:ext>
             </a:extLst>
           </p:cNvPr>
@@ -6651,10 +6208,10 @@
       </p:sp>
       <p:sp>
         <p:nvSpPr>
-          <p:cNvPr id="13" name="profile-93">
-            <a:extLst xmlns:a="http://schemas.openxmlformats.org/drawingml/2006/main">
-              <a:ext uri="{FF2B5EF4-FFF2-40B4-BE49-F238E27FC236}">
-                <a16:creationId xmlns:a16="http://schemas.microsoft.com/office/drawing/2014/main" id="{4D7F7F6A-C9B4-499B-BE15-3465DA4746A8}"/>
+          <p:cNvPr id="14" name="profile-86">
+            <a:extLst xmlns:a="http://schemas.openxmlformats.org/drawingml/2006/main">
+              <a:ext uri="{FF2B5EF4-FFF2-40B4-BE49-F238E27FC236}">
+                <a16:creationId xmlns:a16="http://schemas.microsoft.com/office/drawing/2014/main" id="{C263094C-24E7-4B8A-88A3-B61C98D2365E}"/>
               </a:ext>
             </a:extLst>
           </p:cNvPr>
@@ -6681,10 +6238,10 @@
       </p:sp>
       <p:sp>
         <p:nvSpPr>
-          <p:cNvPr id="14" name="profile-94">
-            <a:extLst xmlns:a="http://schemas.openxmlformats.org/drawingml/2006/main">
-              <a:ext uri="{FF2B5EF4-FFF2-40B4-BE49-F238E27FC236}">
-                <a16:creationId xmlns:a16="http://schemas.microsoft.com/office/drawing/2014/main" id="{A1208B64-0015-493F-8F93-A43787FD1096}"/>
+          <p:cNvPr id="15" name="profile-87">
+            <a:extLst xmlns:a="http://schemas.openxmlformats.org/drawingml/2006/main">
+              <a:ext uri="{FF2B5EF4-FFF2-40B4-BE49-F238E27FC236}">
+                <a16:creationId xmlns:a16="http://schemas.microsoft.com/office/drawing/2014/main" id="{F97C3AEB-D8DB-4D78-8234-B99F85431C78}"/>
               </a:ext>
             </a:extLst>
           </p:cNvPr>
@@ -6738,10 +6295,10 @@
       </p:sp>
       <p:sp>
         <p:nvSpPr>
-          <p:cNvPr id="15" name="profile-95">
-            <a:extLst xmlns:a="http://schemas.openxmlformats.org/drawingml/2006/main">
-              <a:ext uri="{FF2B5EF4-FFF2-40B4-BE49-F238E27FC236}">
-                <a16:creationId xmlns:a16="http://schemas.microsoft.com/office/drawing/2014/main" id="{F8A2BE0D-8358-45D3-8BA2-41D50CDE81E9}"/>
+          <p:cNvPr id="16" name="profile-88">
+            <a:extLst xmlns:a="http://schemas.openxmlformats.org/drawingml/2006/main">
+              <a:ext uri="{FF2B5EF4-FFF2-40B4-BE49-F238E27FC236}">
+                <a16:creationId xmlns:a16="http://schemas.microsoft.com/office/drawing/2014/main" id="{8A5D9171-F96B-4943-8DE8-5C6149FEC022}"/>
               </a:ext>
             </a:extLst>
           </p:cNvPr>
@@ -6768,10 +6325,10 @@
       </p:sp>
       <p:sp>
         <p:nvSpPr>
-          <p:cNvPr id="16" name="profile-96">
-            <a:extLst xmlns:a="http://schemas.openxmlformats.org/drawingml/2006/main">
-              <a:ext uri="{FF2B5EF4-FFF2-40B4-BE49-F238E27FC236}">
-                <a16:creationId xmlns:a16="http://schemas.microsoft.com/office/drawing/2014/main" id="{849695B6-DFC8-438E-89CC-F83B83ABA6D7}"/>
+          <p:cNvPr id="17" name="profile-89">
+            <a:extLst xmlns:a="http://schemas.openxmlformats.org/drawingml/2006/main">
+              <a:ext uri="{FF2B5EF4-FFF2-40B4-BE49-F238E27FC236}">
+                <a16:creationId xmlns:a16="http://schemas.microsoft.com/office/drawing/2014/main" id="{9F9D37F9-F892-41F2-88AE-C719D6F2CF50}"/>
               </a:ext>
             </a:extLst>
           </p:cNvPr>
@@ -6825,10 +6382,10 @@
       </p:sp>
       <p:sp>
         <p:nvSpPr>
-          <p:cNvPr id="17" name="profile-97">
-            <a:extLst xmlns:a="http://schemas.openxmlformats.org/drawingml/2006/main">
-              <a:ext uri="{FF2B5EF4-FFF2-40B4-BE49-F238E27FC236}">
-                <a16:creationId xmlns:a16="http://schemas.microsoft.com/office/drawing/2014/main" id="{071180EB-B69A-48A7-B993-F7EBB739FC7F}"/>
+          <p:cNvPr id="18" name="profile-90">
+            <a:extLst xmlns:a="http://schemas.openxmlformats.org/drawingml/2006/main">
+              <a:ext uri="{FF2B5EF4-FFF2-40B4-BE49-F238E27FC236}">
+                <a16:creationId xmlns:a16="http://schemas.microsoft.com/office/drawing/2014/main" id="{1C093CD6-2A0C-4662-9E4F-BC38897CC790}"/>
               </a:ext>
             </a:extLst>
           </p:cNvPr>
@@ -6855,10 +6412,10 @@
       </p:sp>
       <p:sp>
         <p:nvSpPr>
-          <p:cNvPr id="18" name="profile-98">
-            <a:extLst xmlns:a="http://schemas.openxmlformats.org/drawingml/2006/main">
-              <a:ext uri="{FF2B5EF4-FFF2-40B4-BE49-F238E27FC236}">
-                <a16:creationId xmlns:a16="http://schemas.microsoft.com/office/drawing/2014/main" id="{3AC581C3-7D7A-4990-9615-BAD052B8F487}"/>
+          <p:cNvPr id="19" name="profile-91">
+            <a:extLst xmlns:a="http://schemas.openxmlformats.org/drawingml/2006/main">
+              <a:ext uri="{FF2B5EF4-FFF2-40B4-BE49-F238E27FC236}">
+                <a16:creationId xmlns:a16="http://schemas.microsoft.com/office/drawing/2014/main" id="{FAFFF646-A85F-4440-AF13-C5B5483183B8}"/>
               </a:ext>
             </a:extLst>
           </p:cNvPr>
@@ -6912,10 +6469,10 @@
       </p:sp>
       <p:sp>
         <p:nvSpPr>
-          <p:cNvPr id="19" name="profile-99">
-            <a:extLst xmlns:a="http://schemas.openxmlformats.org/drawingml/2006/main">
-              <a:ext uri="{FF2B5EF4-FFF2-40B4-BE49-F238E27FC236}">
-                <a16:creationId xmlns:a16="http://schemas.microsoft.com/office/drawing/2014/main" id="{C289B082-0B64-409C-BAD4-FA9D6E88C865}"/>
+          <p:cNvPr id="20" name="profile-92">
+            <a:extLst xmlns:a="http://schemas.openxmlformats.org/drawingml/2006/main">
+              <a:ext uri="{FF2B5EF4-FFF2-40B4-BE49-F238E27FC236}">
+                <a16:creationId xmlns:a16="http://schemas.microsoft.com/office/drawing/2014/main" id="{183A8348-2E5C-496C-AD60-67213001673A}"/>
               </a:ext>
             </a:extLst>
           </p:cNvPr>
@@ -6969,10 +6526,10 @@
       </p:sp>
       <p:sp>
         <p:nvSpPr>
-          <p:cNvPr id="20" name="profile-100">
-            <a:extLst xmlns:a="http://schemas.openxmlformats.org/drawingml/2006/main">
-              <a:ext uri="{FF2B5EF4-FFF2-40B4-BE49-F238E27FC236}">
-                <a16:creationId xmlns:a16="http://schemas.microsoft.com/office/drawing/2014/main" id="{29C43007-C53A-48CB-A385-640A03C07C4B}"/>
+          <p:cNvPr id="21" name="profile-93">
+            <a:extLst xmlns:a="http://schemas.openxmlformats.org/drawingml/2006/main">
+              <a:ext uri="{FF2B5EF4-FFF2-40B4-BE49-F238E27FC236}">
+                <a16:creationId xmlns:a16="http://schemas.microsoft.com/office/drawing/2014/main" id="{EDD17EED-7B43-4552-A476-E666385ACBAF}"/>
               </a:ext>
             </a:extLst>
           </p:cNvPr>
@@ -6999,10 +6556,10 @@
       </p:sp>
       <p:sp>
         <p:nvSpPr>
-          <p:cNvPr id="21" name="profile-101">
-            <a:extLst xmlns:a="http://schemas.openxmlformats.org/drawingml/2006/main">
-              <a:ext uri="{FF2B5EF4-FFF2-40B4-BE49-F238E27FC236}">
-                <a16:creationId xmlns:a16="http://schemas.microsoft.com/office/drawing/2014/main" id="{53C25BC5-CD97-4420-8D2E-247D1C9AFE2A}"/>
+          <p:cNvPr id="22" name="profile-94">
+            <a:extLst xmlns:a="http://schemas.openxmlformats.org/drawingml/2006/main">
+              <a:ext uri="{FF2B5EF4-FFF2-40B4-BE49-F238E27FC236}">
+                <a16:creationId xmlns:a16="http://schemas.microsoft.com/office/drawing/2014/main" id="{DE58A15F-18C5-4CE3-B07B-1EDE9064B8A9}"/>
               </a:ext>
             </a:extLst>
           </p:cNvPr>
@@ -7045,10 +6602,10 @@
       </p:sp>
       <p:sp>
         <p:nvSpPr>
-          <p:cNvPr id="22" name="profile-102">
-            <a:extLst xmlns:a="http://schemas.openxmlformats.org/drawingml/2006/main">
-              <a:ext uri="{FF2B5EF4-FFF2-40B4-BE49-F238E27FC236}">
-                <a16:creationId xmlns:a16="http://schemas.microsoft.com/office/drawing/2014/main" id="{2555E066-4D8D-4175-AB1F-CA4D5B74097C}"/>
+          <p:cNvPr id="23" name="profile-95">
+            <a:extLst xmlns:a="http://schemas.openxmlformats.org/drawingml/2006/main">
+              <a:ext uri="{FF2B5EF4-FFF2-40B4-BE49-F238E27FC236}">
+                <a16:creationId xmlns:a16="http://schemas.microsoft.com/office/drawing/2014/main" id="{1D188130-28B3-4F62-8C84-646C208C8D96}"/>
               </a:ext>
             </a:extLst>
           </p:cNvPr>
@@ -7102,10 +6659,10 @@
       </p:sp>
       <p:sp>
         <p:nvSpPr>
-          <p:cNvPr id="23" name="profile-103">
-            <a:extLst xmlns:a="http://schemas.openxmlformats.org/drawingml/2006/main">
-              <a:ext uri="{FF2B5EF4-FFF2-40B4-BE49-F238E27FC236}">
-                <a16:creationId xmlns:a16="http://schemas.microsoft.com/office/drawing/2014/main" id="{9A0B6DB8-269D-4C12-8397-4F0980E22F14}"/>
+          <p:cNvPr id="24" name="profile-96">
+            <a:extLst xmlns:a="http://schemas.openxmlformats.org/drawingml/2006/main">
+              <a:ext uri="{FF2B5EF4-FFF2-40B4-BE49-F238E27FC236}">
+                <a16:creationId xmlns:a16="http://schemas.microsoft.com/office/drawing/2014/main" id="{282D46F6-861D-4AF6-A9FD-132290FDC8CD}"/>
               </a:ext>
             </a:extLst>
           </p:cNvPr>
@@ -7159,10 +6716,10 @@
       </p:sp>
       <p:sp>
         <p:nvSpPr>
-          <p:cNvPr id="24" name="profile-104">
-            <a:extLst xmlns:a="http://schemas.openxmlformats.org/drawingml/2006/main">
-              <a:ext uri="{FF2B5EF4-FFF2-40B4-BE49-F238E27FC236}">
-                <a16:creationId xmlns:a16="http://schemas.microsoft.com/office/drawing/2014/main" id="{4963A683-4F0E-42D9-B6A0-E1C3D0D796E9}"/>
+          <p:cNvPr id="25" name="profile-97">
+            <a:extLst xmlns:a="http://schemas.openxmlformats.org/drawingml/2006/main">
+              <a:ext uri="{FF2B5EF4-FFF2-40B4-BE49-F238E27FC236}">
+                <a16:creationId xmlns:a16="http://schemas.microsoft.com/office/drawing/2014/main" id="{B716F937-2FAC-425B-A5A8-F4DEEBFD22F6}"/>
               </a:ext>
             </a:extLst>
           </p:cNvPr>
@@ -7216,10 +6773,10 @@
       </p:sp>
       <p:sp>
         <p:nvSpPr>
-          <p:cNvPr id="25" name="profile-105">
-            <a:extLst xmlns:a="http://schemas.openxmlformats.org/drawingml/2006/main">
-              <a:ext uri="{FF2B5EF4-FFF2-40B4-BE49-F238E27FC236}">
-                <a16:creationId xmlns:a16="http://schemas.microsoft.com/office/drawing/2014/main" id="{598132C0-8C9F-4487-89CE-BB42431A6A63}"/>
+          <p:cNvPr id="26" name="profile-98">
+            <a:extLst xmlns:a="http://schemas.openxmlformats.org/drawingml/2006/main">
+              <a:ext uri="{FF2B5EF4-FFF2-40B4-BE49-F238E27FC236}">
+                <a16:creationId xmlns:a16="http://schemas.microsoft.com/office/drawing/2014/main" id="{F09EFB97-FB26-4C0C-8A82-87A1B70B5D75}"/>
               </a:ext>
             </a:extLst>
           </p:cNvPr>
@@ -7274,7 +6831,7 @@
     </p:spTree>
     <p:extLst>
       <p:ext uri="{BB962C8B-B14F-4D97-AF65-F5344CB8AC3E}">
-        <p14:creationId xmlns:p14="http://schemas.microsoft.com/office/powerpoint/2010/main" val="576589812"/>
+        <p14:creationId xmlns:p14="http://schemas.microsoft.com/office/powerpoint/2010/main" val="1347040303"/>
       </p:ext>
     </p:extLst>
   </p:cSld>
@@ -7309,16 +6866,13 @@
           <p:nvPr/>
         </p:nvPicPr>
         <p:blipFill>
-          <a:blip xmlns:r="http://schemas.openxmlformats.org/officeDocument/2006/relationships" xmlns:a="http://schemas.openxmlformats.org/drawingml/2006/main" r:embed="R2b28ecf11da34a47"/>
-          <a:srcRect xmlns:a="http://schemas.openxmlformats.org/drawingml/2006/main" l="0" t="9938" r="0" b="9938"/>
-          <a:stretch xmlns:a="http://schemas.openxmlformats.org/drawingml/2006/main">
-            <a:fillRect l="0" t="0" r="0" b="0"/>
-          </a:stretch>
+          <a:blip xmlns:r="http://schemas.openxmlformats.org/officeDocument/2006/relationships" xmlns:a="http://schemas.openxmlformats.org/drawingml/2006/main" r:embed="R87573b892be84338"/>
+          <a:stretch xmlns:a="http://schemas.openxmlformats.org/drawingml/2006/main"/>
         </p:blipFill>
         <p:spPr>
           <a:xfrm xmlns:a="http://schemas.openxmlformats.org/drawingml/2006/main">
             <a:off x="0" y="0"/>
-            <a:ext cx="7562850" cy="3181350"/>
+            <a:ext cx="7562850" cy="5041900"/>
           </a:xfrm>
           <a:prstGeom xmlns:a="http://schemas.openxmlformats.org/drawingml/2006/main" prst="rect">
             <a:avLst/>
@@ -7327,26 +6881,26 @@
       </p:pic>
       <p:sp>
         <p:nvSpPr>
-          <p:cNvPr id="2" name="profile-106">
-            <a:extLst xmlns:a="http://schemas.openxmlformats.org/drawingml/2006/main">
-              <a:ext uri="{FF2B5EF4-FFF2-40B4-BE49-F238E27FC236}">
-                <a16:creationId xmlns:a16="http://schemas.microsoft.com/office/drawing/2014/main" id="{EEC36B12-1541-463D-9763-92B67E698B8B}"/>
-              </a:ext>
-            </a:extLst>
-          </p:cNvPr>
-          <p:cNvSpPr>
-            <a:spLocks xmlns:a="http://schemas.openxmlformats.org/drawingml/2006/main" noGrp="1"/>
-          </p:cNvSpPr>
-          <p:nvPr/>
-        </p:nvSpPr>
-        <p:spPr>
-          <a:xfrm xmlns:a="http://schemas.openxmlformats.org/drawingml/2006/main">
-            <a:off x="257175" y="2476500"/>
-            <a:ext cx="7000875" cy="1323975"/>
+          <p:cNvPr id="2" name="profile-99">
+            <a:extLst xmlns:a="http://schemas.openxmlformats.org/drawingml/2006/main">
+              <a:ext uri="{FF2B5EF4-FFF2-40B4-BE49-F238E27FC236}">
+                <a16:creationId xmlns:a16="http://schemas.microsoft.com/office/drawing/2014/main" id="{B0E301FB-2EB8-47E6-9A2D-0BAF43083393}"/>
+              </a:ext>
+            </a:extLst>
+          </p:cNvPr>
+          <p:cNvSpPr>
+            <a:spLocks xmlns:a="http://schemas.openxmlformats.org/drawingml/2006/main" noGrp="1"/>
+          </p:cNvSpPr>
+          <p:nvPr/>
+        </p:nvSpPr>
+        <p:spPr>
+          <a:xfrm xmlns:a="http://schemas.openxmlformats.org/drawingml/2006/main">
+            <a:off x="257175" y="4762500"/>
+            <a:ext cx="7000875" cy="971550"/>
           </a:xfrm>
           <a:custGeom xmlns:a="http://schemas.openxmlformats.org/drawingml/2006/main">
             <a:pathLst>
-              <a:path w="7000875" h="1323975">
+              <a:path w="7000875" h="971550">
                 <a:moveTo>
                   <a:pt x="514350" y="0"/>
                 </a:moveTo>
@@ -7354,10 +6908,10 @@
                   <a:pt x="7000875" y="0"/>
                 </a:lnTo>
                 <a:lnTo>
-                  <a:pt x="6267450" y="1323975"/>
+                  <a:pt x="6267450" y="971550"/>
                 </a:lnTo>
                 <a:lnTo>
-                  <a:pt x="0" y="1323975"/>
+                  <a:pt x="0" y="971550"/>
                 </a:lnTo>
                 <a:close/>
               </a:path>
@@ -7373,26 +6927,26 @@
       </p:sp>
       <p:sp>
         <p:nvSpPr>
-          <p:cNvPr id="3" name="profile-107">
-            <a:extLst xmlns:a="http://schemas.openxmlformats.org/drawingml/2006/main">
-              <a:ext uri="{FF2B5EF4-FFF2-40B4-BE49-F238E27FC236}">
-                <a16:creationId xmlns:a16="http://schemas.microsoft.com/office/drawing/2014/main" id="{6031006B-9A7E-4577-A8A9-46DB0B864797}"/>
-              </a:ext>
-            </a:extLst>
-          </p:cNvPr>
-          <p:cNvSpPr>
-            <a:spLocks xmlns:a="http://schemas.openxmlformats.org/drawingml/2006/main" noGrp="1"/>
-          </p:cNvSpPr>
-          <p:nvPr/>
-        </p:nvSpPr>
-        <p:spPr>
-          <a:xfrm xmlns:a="http://schemas.openxmlformats.org/drawingml/2006/main">
-            <a:off x="257175" y="2476500"/>
-            <a:ext cx="6896100" cy="1238250"/>
+          <p:cNvPr id="3" name="profile-100">
+            <a:extLst xmlns:a="http://schemas.openxmlformats.org/drawingml/2006/main">
+              <a:ext uri="{FF2B5EF4-FFF2-40B4-BE49-F238E27FC236}">
+                <a16:creationId xmlns:a16="http://schemas.microsoft.com/office/drawing/2014/main" id="{7814CCA5-7B85-4EA7-834E-047A5ABFDFB1}"/>
+              </a:ext>
+            </a:extLst>
+          </p:cNvPr>
+          <p:cNvSpPr>
+            <a:spLocks xmlns:a="http://schemas.openxmlformats.org/drawingml/2006/main" noGrp="1"/>
+          </p:cNvSpPr>
+          <p:nvPr/>
+        </p:nvSpPr>
+        <p:spPr>
+          <a:xfrm xmlns:a="http://schemas.openxmlformats.org/drawingml/2006/main">
+            <a:off x="257175" y="4762500"/>
+            <a:ext cx="6896100" cy="885825"/>
           </a:xfrm>
           <a:custGeom xmlns:a="http://schemas.openxmlformats.org/drawingml/2006/main">
             <a:pathLst>
-              <a:path w="6896100" h="1238250">
+              <a:path w="6896100" h="885825">
                 <a:moveTo>
                   <a:pt x="514350" y="0"/>
                 </a:moveTo>
@@ -7400,10 +6954,10 @@
                   <a:pt x="6896100" y="0"/>
                 </a:lnTo>
                 <a:lnTo>
-                  <a:pt x="6210300" y="1238250"/>
+                  <a:pt x="6210300" y="885825"/>
                 </a:lnTo>
                 <a:lnTo>
-                  <a:pt x="0" y="1238250"/>
+                  <a:pt x="0" y="885825"/>
                 </a:lnTo>
                 <a:close/>
               </a:path>
@@ -7419,21 +6973,21 @@
       </p:sp>
       <p:sp>
         <p:nvSpPr>
-          <p:cNvPr id="4" name="profile-108">
-            <a:extLst xmlns:a="http://schemas.openxmlformats.org/drawingml/2006/main">
-              <a:ext uri="{FF2B5EF4-FFF2-40B4-BE49-F238E27FC236}">
-                <a16:creationId xmlns:a16="http://schemas.microsoft.com/office/drawing/2014/main" id="{3531F667-43BF-4930-956D-B9FA3FF14727}"/>
-              </a:ext>
-            </a:extLst>
-          </p:cNvPr>
-          <p:cNvSpPr>
-            <a:spLocks xmlns:a="http://schemas.openxmlformats.org/drawingml/2006/main" noGrp="1"/>
-          </p:cNvSpPr>
-          <p:nvPr/>
-        </p:nvSpPr>
-        <p:spPr>
-          <a:xfrm xmlns:a="http://schemas.openxmlformats.org/drawingml/2006/main">
-            <a:off x="733425" y="2647950"/>
+          <p:cNvPr id="4" name="profile-101">
+            <a:extLst xmlns:a="http://schemas.openxmlformats.org/drawingml/2006/main">
+              <a:ext uri="{FF2B5EF4-FFF2-40B4-BE49-F238E27FC236}">
+                <a16:creationId xmlns:a16="http://schemas.microsoft.com/office/drawing/2014/main" id="{D914FD9B-9455-4C1A-9287-590060FB37E9}"/>
+              </a:ext>
+            </a:extLst>
+          </p:cNvPr>
+          <p:cNvSpPr>
+            <a:spLocks xmlns:a="http://schemas.openxmlformats.org/drawingml/2006/main" noGrp="1"/>
+          </p:cNvSpPr>
+          <p:nvPr/>
+        </p:nvSpPr>
+        <p:spPr>
+          <a:xfrm xmlns:a="http://schemas.openxmlformats.org/drawingml/2006/main">
+            <a:off x="733425" y="4933950"/>
             <a:ext cx="5800725" cy="504444"/>
           </a:xfrm>
           <a:prstGeom xmlns:a="http://schemas.openxmlformats.org/drawingml/2006/main" prst="rect">
@@ -7476,21 +7030,21 @@
       </p:sp>
       <p:sp>
         <p:nvSpPr>
-          <p:cNvPr id="5" name="profile-109">
-            <a:extLst xmlns:a="http://schemas.openxmlformats.org/drawingml/2006/main">
-              <a:ext uri="{FF2B5EF4-FFF2-40B4-BE49-F238E27FC236}">
-                <a16:creationId xmlns:a16="http://schemas.microsoft.com/office/drawing/2014/main" id="{4722C838-7DFF-43D1-9DC4-95B560338D14}"/>
-              </a:ext>
-            </a:extLst>
-          </p:cNvPr>
-          <p:cNvSpPr>
-            <a:spLocks xmlns:a="http://schemas.openxmlformats.org/drawingml/2006/main" noGrp="1"/>
-          </p:cNvSpPr>
-          <p:nvPr/>
-        </p:nvSpPr>
-        <p:spPr>
-          <a:xfrm xmlns:a="http://schemas.openxmlformats.org/drawingml/2006/main">
-            <a:off x="419100" y="3943350"/>
+          <p:cNvPr id="5" name="profile-102">
+            <a:extLst xmlns:a="http://schemas.openxmlformats.org/drawingml/2006/main">
+              <a:ext uri="{FF2B5EF4-FFF2-40B4-BE49-F238E27FC236}">
+                <a16:creationId xmlns:a16="http://schemas.microsoft.com/office/drawing/2014/main" id="{112187DE-53CE-4DC5-AFB3-7EE108BA7F75}"/>
+              </a:ext>
+            </a:extLst>
+          </p:cNvPr>
+          <p:cNvSpPr>
+            <a:spLocks xmlns:a="http://schemas.openxmlformats.org/drawingml/2006/main" noGrp="1"/>
+          </p:cNvSpPr>
+          <p:nvPr/>
+        </p:nvSpPr>
+        <p:spPr>
+          <a:xfrm xmlns:a="http://schemas.openxmlformats.org/drawingml/2006/main">
+            <a:off x="419100" y="5867400"/>
             <a:ext cx="6724650" cy="155258"/>
           </a:xfrm>
           <a:prstGeom xmlns:a="http://schemas.openxmlformats.org/drawingml/2006/main" prst="rect">
@@ -7526,46 +7080,46 @@
                 <a:ea typeface="Arial"/>
                 <a:cs typeface="Arial"/>
               </a:rPr>
-              <a:t>Illustrative pest photograph / Jari Lobo, Pexels</a:t>
-            </a:r>
-          </a:p>
-        </p:txBody>
-      </p:sp>
-      <p:sp>
-        <p:nvSpPr>
-          <p:cNvPr id="6" name="profile-110">
-            <a:extLst xmlns:a="http://schemas.openxmlformats.org/drawingml/2006/main">
-              <a:ext uri="{FF2B5EF4-FFF2-40B4-BE49-F238E27FC236}">
-                <a16:creationId xmlns:a16="http://schemas.microsoft.com/office/drawing/2014/main" id="{86DB815A-298F-4AD3-BDF7-9E552A37DF7A}"/>
-              </a:ext>
-            </a:extLst>
-          </p:cNvPr>
-          <p:cNvSpPr>
-            <a:spLocks xmlns:a="http://schemas.openxmlformats.org/drawingml/2006/main" noGrp="1"/>
-          </p:cNvSpPr>
-          <p:nvPr/>
-        </p:nvSpPr>
-        <p:spPr>
-          <a:xfrm xmlns:a="http://schemas.openxmlformats.org/drawingml/2006/main">
-            <a:off x="419100" y="4429125"/>
-            <a:ext cx="6724650" cy="378143"/>
-          </a:xfrm>
-          <a:prstGeom xmlns:a="http://schemas.openxmlformats.org/drawingml/2006/main" prst="rect">
-            <a:avLst/>
-          </a:prstGeom>
-          <a:noFill xmlns:a="http://schemas.openxmlformats.org/drawingml/2006/main"/>
-          <a:ln xmlns:a="http://schemas.openxmlformats.org/drawingml/2006/main" w="0">
-            <a:noFill/>
-          </a:ln>
-        </p:spPr>
-        <p:txBody>
-          <a:bodyPr xmlns:a="http://schemas.openxmlformats.org/drawingml/2006/main" wrap="none" lIns="0" tIns="0" rIns="0" bIns="0" anchor="t">
-            <a:noAutofit/>
-          </a:bodyPr>
-          <a:lstStyle xmlns:a="http://schemas.openxmlformats.org/drawingml/2006/main"/>
-          <a:p xmlns:a="http://schemas.openxmlformats.org/drawingml/2006/main">
-            <a:pPr algn="l">
-              <a:defRPr sz="2175" b="1">
+              <a:t>AI-generated service illustration</a:t>
+            </a:r>
+          </a:p>
+        </p:txBody>
+      </p:sp>
+      <p:sp>
+        <p:nvSpPr>
+          <p:cNvPr id="6" name="profile-103">
+            <a:extLst xmlns:a="http://schemas.openxmlformats.org/drawingml/2006/main">
+              <a:ext uri="{FF2B5EF4-FFF2-40B4-BE49-F238E27FC236}">
+                <a16:creationId xmlns:a16="http://schemas.microsoft.com/office/drawing/2014/main" id="{60B87999-6211-43D5-9242-E3F224FFDCE2}"/>
+              </a:ext>
+            </a:extLst>
+          </p:cNvPr>
+          <p:cNvSpPr>
+            <a:spLocks xmlns:a="http://schemas.openxmlformats.org/drawingml/2006/main" noGrp="1"/>
+          </p:cNvSpPr>
+          <p:nvPr/>
+        </p:nvSpPr>
+        <p:spPr>
+          <a:xfrm xmlns:a="http://schemas.openxmlformats.org/drawingml/2006/main">
+            <a:off x="419100" y="6219825"/>
+            <a:ext cx="6724650" cy="353378"/>
+          </a:xfrm>
+          <a:prstGeom xmlns:a="http://schemas.openxmlformats.org/drawingml/2006/main" prst="rect">
+            <a:avLst/>
+          </a:prstGeom>
+          <a:noFill xmlns:a="http://schemas.openxmlformats.org/drawingml/2006/main"/>
+          <a:ln xmlns:a="http://schemas.openxmlformats.org/drawingml/2006/main" w="0">
+            <a:noFill/>
+          </a:ln>
+        </p:spPr>
+        <p:txBody>
+          <a:bodyPr xmlns:a="http://schemas.openxmlformats.org/drawingml/2006/main" wrap="none" lIns="0" tIns="0" rIns="0" bIns="0" anchor="t">
+            <a:noAutofit/>
+          </a:bodyPr>
+          <a:lstStyle xmlns:a="http://schemas.openxmlformats.org/drawingml/2006/main"/>
+          <a:p xmlns:a="http://schemas.openxmlformats.org/drawingml/2006/main">
+            <a:pPr algn="l">
+              <a:defRPr sz="2025" b="1">
                 <a:solidFill>
                   <a:srgbClr val="0A1F45"/>
                 </a:solidFill>
@@ -7575,7 +7129,7 @@
               </a:defRPr>
             </a:pPr>
             <a:r>
-              <a:rPr sz="2175" b="1">
+              <a:rPr sz="2025" b="1">
                 <a:solidFill>
                   <a:srgbClr val="0A1F45"/>
                 </a:solidFill>
@@ -7590,39 +7144,39 @@
       </p:sp>
       <p:sp>
         <p:nvSpPr>
-          <p:cNvPr id="7" name="profile-111">
-            <a:extLst xmlns:a="http://schemas.openxmlformats.org/drawingml/2006/main">
-              <a:ext uri="{FF2B5EF4-FFF2-40B4-BE49-F238E27FC236}">
-                <a16:creationId xmlns:a16="http://schemas.microsoft.com/office/drawing/2014/main" id="{F7A22ED1-D52C-4494-A837-4ECE6250C338}"/>
-              </a:ext>
-            </a:extLst>
-          </p:cNvPr>
-          <p:cNvSpPr>
-            <a:spLocks xmlns:a="http://schemas.openxmlformats.org/drawingml/2006/main" noGrp="1"/>
-          </p:cNvSpPr>
-          <p:nvPr/>
-        </p:nvSpPr>
-        <p:spPr>
-          <a:xfrm xmlns:a="http://schemas.openxmlformats.org/drawingml/2006/main">
-            <a:off x="419100" y="4972050"/>
-            <a:ext cx="6724650" cy="295275"/>
-          </a:xfrm>
-          <a:prstGeom xmlns:a="http://schemas.openxmlformats.org/drawingml/2006/main" prst="rect">
-            <a:avLst/>
-          </a:prstGeom>
-          <a:noFill xmlns:a="http://schemas.openxmlformats.org/drawingml/2006/main"/>
-          <a:ln xmlns:a="http://schemas.openxmlformats.org/drawingml/2006/main" w="0">
-            <a:noFill/>
-          </a:ln>
-        </p:spPr>
-        <p:txBody>
-          <a:bodyPr xmlns:a="http://schemas.openxmlformats.org/drawingml/2006/main" wrap="none" lIns="0" tIns="0" rIns="0" bIns="0" anchor="t">
-            <a:noAutofit/>
-          </a:bodyPr>
-          <a:lstStyle xmlns:a="http://schemas.openxmlformats.org/drawingml/2006/main"/>
-          <a:p xmlns:a="http://schemas.openxmlformats.org/drawingml/2006/main">
-            <a:pPr algn="l">
-              <a:defRPr sz="1500" b="0">
+          <p:cNvPr id="7" name="profile-104">
+            <a:extLst xmlns:a="http://schemas.openxmlformats.org/drawingml/2006/main">
+              <a:ext uri="{FF2B5EF4-FFF2-40B4-BE49-F238E27FC236}">
+                <a16:creationId xmlns:a16="http://schemas.microsoft.com/office/drawing/2014/main" id="{7217CFE9-8124-4BE9-A3C1-EDF0503DECE9}"/>
+              </a:ext>
+            </a:extLst>
+          </p:cNvPr>
+          <p:cNvSpPr>
+            <a:spLocks xmlns:a="http://schemas.openxmlformats.org/drawingml/2006/main" noGrp="1"/>
+          </p:cNvSpPr>
+          <p:nvPr/>
+        </p:nvSpPr>
+        <p:spPr>
+          <a:xfrm xmlns:a="http://schemas.openxmlformats.org/drawingml/2006/main">
+            <a:off x="419100" y="6657975"/>
+            <a:ext cx="6724650" cy="257175"/>
+          </a:xfrm>
+          <a:prstGeom xmlns:a="http://schemas.openxmlformats.org/drawingml/2006/main" prst="rect">
+            <a:avLst/>
+          </a:prstGeom>
+          <a:noFill xmlns:a="http://schemas.openxmlformats.org/drawingml/2006/main"/>
+          <a:ln xmlns:a="http://schemas.openxmlformats.org/drawingml/2006/main" w="0">
+            <a:noFill/>
+          </a:ln>
+        </p:spPr>
+        <p:txBody>
+          <a:bodyPr xmlns:a="http://schemas.openxmlformats.org/drawingml/2006/main" wrap="none" lIns="0" tIns="0" rIns="0" bIns="0" anchor="t">
+            <a:noAutofit/>
+          </a:bodyPr>
+          <a:lstStyle xmlns:a="http://schemas.openxmlformats.org/drawingml/2006/main"/>
+          <a:p xmlns:a="http://schemas.openxmlformats.org/drawingml/2006/main">
+            <a:pPr algn="l">
+              <a:defRPr sz="1350" b="0">
                 <a:solidFill>
                   <a:srgbClr val="0B1B33"/>
                 </a:solidFill>
@@ -7632,7 +7186,7 @@
               </a:defRPr>
             </a:pPr>
             <a:r>
-              <a:rPr sz="1500" b="0">
+              <a:rPr sz="1350" b="0">
                 <a:solidFill>
                   <a:srgbClr val="0B1B33"/>
                 </a:solidFill>
@@ -7640,46 +7194,46 @@
                 <a:ea typeface="Arial"/>
                 <a:cs typeface="Arial"/>
               </a:rPr>
-              <a:t>Pest control services based on an assessment of the property and the pest</a:t>
-            </a:r>
-          </a:p>
-        </p:txBody>
-      </p:sp>
-      <p:sp>
-        <p:nvSpPr>
-          <p:cNvPr id="8" name="profile-112">
-            <a:extLst xmlns:a="http://schemas.openxmlformats.org/drawingml/2006/main">
-              <a:ext uri="{FF2B5EF4-FFF2-40B4-BE49-F238E27FC236}">
-                <a16:creationId xmlns:a16="http://schemas.microsoft.com/office/drawing/2014/main" id="{0C807381-24CF-4D92-9AA5-9ADF9651E904}"/>
-              </a:ext>
-            </a:extLst>
-          </p:cNvPr>
-          <p:cNvSpPr>
-            <a:spLocks xmlns:a="http://schemas.openxmlformats.org/drawingml/2006/main" noGrp="1"/>
-          </p:cNvSpPr>
-          <p:nvPr/>
-        </p:nvSpPr>
-        <p:spPr>
-          <a:xfrm xmlns:a="http://schemas.openxmlformats.org/drawingml/2006/main">
-            <a:off x="419100" y="5248275"/>
-            <a:ext cx="6724650" cy="295275"/>
-          </a:xfrm>
-          <a:prstGeom xmlns:a="http://schemas.openxmlformats.org/drawingml/2006/main" prst="rect">
-            <a:avLst/>
-          </a:prstGeom>
-          <a:noFill xmlns:a="http://schemas.openxmlformats.org/drawingml/2006/main"/>
-          <a:ln xmlns:a="http://schemas.openxmlformats.org/drawingml/2006/main" w="0">
-            <a:noFill/>
-          </a:ln>
-        </p:spPr>
-        <p:txBody>
-          <a:bodyPr xmlns:a="http://schemas.openxmlformats.org/drawingml/2006/main" wrap="none" lIns="0" tIns="0" rIns="0" bIns="0" anchor="t">
-            <a:noAutofit/>
-          </a:bodyPr>
-          <a:lstStyle xmlns:a="http://schemas.openxmlformats.org/drawingml/2006/main"/>
-          <a:p xmlns:a="http://schemas.openxmlformats.org/drawingml/2006/main">
-            <a:pPr algn="l">
-              <a:defRPr sz="1500" b="0">
+              <a:t>Pest control services based on an assessment of the property and the pest concerns</a:t>
+            </a:r>
+          </a:p>
+        </p:txBody>
+      </p:sp>
+      <p:sp>
+        <p:nvSpPr>
+          <p:cNvPr id="8" name="profile-105">
+            <a:extLst xmlns:a="http://schemas.openxmlformats.org/drawingml/2006/main">
+              <a:ext uri="{FF2B5EF4-FFF2-40B4-BE49-F238E27FC236}">
+                <a16:creationId xmlns:a16="http://schemas.microsoft.com/office/drawing/2014/main" id="{0D63F27D-C736-4411-993B-DE8FF384A839}"/>
+              </a:ext>
+            </a:extLst>
+          </p:cNvPr>
+          <p:cNvSpPr>
+            <a:spLocks xmlns:a="http://schemas.openxmlformats.org/drawingml/2006/main" noGrp="1"/>
+          </p:cNvSpPr>
+          <p:nvPr/>
+        </p:nvSpPr>
+        <p:spPr>
+          <a:xfrm xmlns:a="http://schemas.openxmlformats.org/drawingml/2006/main">
+            <a:off x="419100" y="6896100"/>
+            <a:ext cx="6724650" cy="257175"/>
+          </a:xfrm>
+          <a:prstGeom xmlns:a="http://schemas.openxmlformats.org/drawingml/2006/main" prst="rect">
+            <a:avLst/>
+          </a:prstGeom>
+          <a:noFill xmlns:a="http://schemas.openxmlformats.org/drawingml/2006/main"/>
+          <a:ln xmlns:a="http://schemas.openxmlformats.org/drawingml/2006/main" w="0">
+            <a:noFill/>
+          </a:ln>
+        </p:spPr>
+        <p:txBody>
+          <a:bodyPr xmlns:a="http://schemas.openxmlformats.org/drawingml/2006/main" wrap="none" lIns="0" tIns="0" rIns="0" bIns="0" anchor="t">
+            <a:noAutofit/>
+          </a:bodyPr>
+          <a:lstStyle xmlns:a="http://schemas.openxmlformats.org/drawingml/2006/main"/>
+          <a:p xmlns:a="http://schemas.openxmlformats.org/drawingml/2006/main">
+            <a:pPr algn="l">
+              <a:defRPr sz="1350" b="0">
                 <a:solidFill>
                   <a:srgbClr val="0B1B33"/>
                 </a:solidFill>
@@ -7689,7 +7243,7 @@
               </a:defRPr>
             </a:pPr>
             <a:r>
-              <a:rPr sz="1500" b="0">
+              <a:rPr sz="1350" b="0">
                 <a:solidFill>
                   <a:srgbClr val="0B1B33"/>
                 </a:solidFill>
@@ -7697,29 +7251,29 @@
                 <a:ea typeface="Arial"/>
                 <a:cs typeface="Arial"/>
               </a:rPr>
-              <a:t>concerns reported by the client.</a:t>
-            </a:r>
-          </a:p>
-        </p:txBody>
-      </p:sp>
-      <p:sp>
-        <p:nvSpPr>
-          <p:cNvPr id="9" name="profile-113">
-            <a:extLst xmlns:a="http://schemas.openxmlformats.org/drawingml/2006/main">
-              <a:ext uri="{FF2B5EF4-FFF2-40B4-BE49-F238E27FC236}">
-                <a16:creationId xmlns:a16="http://schemas.microsoft.com/office/drawing/2014/main" id="{6CC4EE0A-89C2-4479-A077-24CD6C2B9246}"/>
-              </a:ext>
-            </a:extLst>
-          </p:cNvPr>
-          <p:cNvSpPr>
-            <a:spLocks xmlns:a="http://schemas.openxmlformats.org/drawingml/2006/main" noGrp="1"/>
-          </p:cNvSpPr>
-          <p:nvPr/>
-        </p:nvSpPr>
-        <p:spPr>
-          <a:xfrm xmlns:a="http://schemas.openxmlformats.org/drawingml/2006/main">
-            <a:off x="0" y="6305550"/>
-            <a:ext cx="7562850" cy="2257425"/>
+              <a:t>reported by the client.</a:t>
+            </a:r>
+          </a:p>
+        </p:txBody>
+      </p:sp>
+      <p:sp>
+        <p:nvSpPr>
+          <p:cNvPr id="9" name="profile-106">
+            <a:extLst xmlns:a="http://schemas.openxmlformats.org/drawingml/2006/main">
+              <a:ext uri="{FF2B5EF4-FFF2-40B4-BE49-F238E27FC236}">
+                <a16:creationId xmlns:a16="http://schemas.microsoft.com/office/drawing/2014/main" id="{DB4CBDF4-1825-41BF-878E-82F659C1601F}"/>
+              </a:ext>
+            </a:extLst>
+          </p:cNvPr>
+          <p:cNvSpPr>
+            <a:spLocks xmlns:a="http://schemas.openxmlformats.org/drawingml/2006/main" noGrp="1"/>
+          </p:cNvSpPr>
+          <p:nvPr/>
+        </p:nvSpPr>
+        <p:spPr>
+          <a:xfrm xmlns:a="http://schemas.openxmlformats.org/drawingml/2006/main">
+            <a:off x="0" y="7419975"/>
+            <a:ext cx="7562850" cy="1504950"/>
           </a:xfrm>
           <a:prstGeom xmlns:a="http://schemas.openxmlformats.org/drawingml/2006/main" prst="rect">
             <a:avLst/>
@@ -7734,21 +7288,21 @@
       </p:sp>
       <p:sp>
         <p:nvSpPr>
-          <p:cNvPr id="10" name="profile-114">
-            <a:extLst xmlns:a="http://schemas.openxmlformats.org/drawingml/2006/main">
-              <a:ext uri="{FF2B5EF4-FFF2-40B4-BE49-F238E27FC236}">
-                <a16:creationId xmlns:a16="http://schemas.microsoft.com/office/drawing/2014/main" id="{D1A85116-47C3-4482-9022-09784579A566}"/>
-              </a:ext>
-            </a:extLst>
-          </p:cNvPr>
-          <p:cNvSpPr>
-            <a:spLocks xmlns:a="http://schemas.openxmlformats.org/drawingml/2006/main" noGrp="1"/>
-          </p:cNvSpPr>
-          <p:nvPr/>
-        </p:nvSpPr>
-        <p:spPr>
-          <a:xfrm xmlns:a="http://schemas.openxmlformats.org/drawingml/2006/main">
-            <a:off x="419100" y="6686550"/>
+          <p:cNvPr id="10" name="profile-107">
+            <a:extLst xmlns:a="http://schemas.openxmlformats.org/drawingml/2006/main">
+              <a:ext uri="{FF2B5EF4-FFF2-40B4-BE49-F238E27FC236}">
+                <a16:creationId xmlns:a16="http://schemas.microsoft.com/office/drawing/2014/main" id="{E322CDEF-12BD-4D7D-B5A1-60D0F143A08D}"/>
+              </a:ext>
+            </a:extLst>
+          </p:cNvPr>
+          <p:cNvSpPr>
+            <a:spLocks xmlns:a="http://schemas.openxmlformats.org/drawingml/2006/main" noGrp="1"/>
+          </p:cNvSpPr>
+          <p:nvPr/>
+        </p:nvSpPr>
+        <p:spPr>
+          <a:xfrm xmlns:a="http://schemas.openxmlformats.org/drawingml/2006/main">
+            <a:off x="419100" y="7724775"/>
             <a:ext cx="47625" cy="47625"/>
           </a:xfrm>
           <a:prstGeom xmlns:a="http://schemas.openxmlformats.org/drawingml/2006/main" prst="rect">
@@ -7764,39 +7318,39 @@
       </p:sp>
       <p:sp>
         <p:nvSpPr>
-          <p:cNvPr id="11" name="profile-115">
-            <a:extLst xmlns:a="http://schemas.openxmlformats.org/drawingml/2006/main">
-              <a:ext uri="{FF2B5EF4-FFF2-40B4-BE49-F238E27FC236}">
-                <a16:creationId xmlns:a16="http://schemas.microsoft.com/office/drawing/2014/main" id="{60A8EE8B-F957-467E-866B-B7E1B0FC4305}"/>
-              </a:ext>
-            </a:extLst>
-          </p:cNvPr>
-          <p:cNvSpPr>
-            <a:spLocks xmlns:a="http://schemas.openxmlformats.org/drawingml/2006/main" noGrp="1"/>
-          </p:cNvSpPr>
-          <p:nvPr/>
-        </p:nvSpPr>
-        <p:spPr>
-          <a:xfrm xmlns:a="http://schemas.openxmlformats.org/drawingml/2006/main">
-            <a:off x="600075" y="6610350"/>
-            <a:ext cx="6343650" cy="308229"/>
-          </a:xfrm>
-          <a:prstGeom xmlns:a="http://schemas.openxmlformats.org/drawingml/2006/main" prst="rect">
-            <a:avLst/>
-          </a:prstGeom>
-          <a:noFill xmlns:a="http://schemas.openxmlformats.org/drawingml/2006/main"/>
-          <a:ln xmlns:a="http://schemas.openxmlformats.org/drawingml/2006/main" w="0">
-            <a:noFill/>
-          </a:ln>
-        </p:spPr>
-        <p:txBody>
-          <a:bodyPr xmlns:a="http://schemas.openxmlformats.org/drawingml/2006/main" wrap="none" lIns="0" tIns="0" rIns="0" bIns="0" anchor="t">
-            <a:noAutofit/>
-          </a:bodyPr>
-          <a:lstStyle xmlns:a="http://schemas.openxmlformats.org/drawingml/2006/main"/>
-          <a:p xmlns:a="http://schemas.openxmlformats.org/drawingml/2006/main">
-            <a:pPr algn="l">
-              <a:defRPr sz="1650" b="0">
+          <p:cNvPr id="11" name="profile-108">
+            <a:extLst xmlns:a="http://schemas.openxmlformats.org/drawingml/2006/main">
+              <a:ext uri="{FF2B5EF4-FFF2-40B4-BE49-F238E27FC236}">
+                <a16:creationId xmlns:a16="http://schemas.microsoft.com/office/drawing/2014/main" id="{C5F4EE88-B4C7-412F-A8CC-1D73E512FD7E}"/>
+              </a:ext>
+            </a:extLst>
+          </p:cNvPr>
+          <p:cNvSpPr>
+            <a:spLocks xmlns:a="http://schemas.openxmlformats.org/drawingml/2006/main" noGrp="1"/>
+          </p:cNvSpPr>
+          <p:nvPr/>
+        </p:nvSpPr>
+        <p:spPr>
+          <a:xfrm xmlns:a="http://schemas.openxmlformats.org/drawingml/2006/main">
+            <a:off x="600075" y="7648575"/>
+            <a:ext cx="6343650" cy="255651"/>
+          </a:xfrm>
+          <a:prstGeom xmlns:a="http://schemas.openxmlformats.org/drawingml/2006/main" prst="rect">
+            <a:avLst/>
+          </a:prstGeom>
+          <a:noFill xmlns:a="http://schemas.openxmlformats.org/drawingml/2006/main"/>
+          <a:ln xmlns:a="http://schemas.openxmlformats.org/drawingml/2006/main" w="0">
+            <a:noFill/>
+          </a:ln>
+        </p:spPr>
+        <p:txBody>
+          <a:bodyPr xmlns:a="http://schemas.openxmlformats.org/drawingml/2006/main" wrap="none" lIns="0" tIns="0" rIns="0" bIns="0" anchor="t">
+            <a:noAutofit/>
+          </a:bodyPr>
+          <a:lstStyle xmlns:a="http://schemas.openxmlformats.org/drawingml/2006/main"/>
+          <a:p xmlns:a="http://schemas.openxmlformats.org/drawingml/2006/main">
+            <a:pPr algn="l">
+              <a:defRPr sz="1350" b="0">
                 <a:solidFill>
                   <a:srgbClr val="FFFFFF"/>
                 </a:solidFill>
@@ -7806,7 +7360,7 @@
               </a:defRPr>
             </a:pPr>
             <a:r>
-              <a:rPr sz="1650" b="0">
+              <a:rPr sz="1350" b="0">
                 <a:solidFill>
                   <a:srgbClr val="FFFFFF"/>
                 </a:solidFill>
@@ -7821,21 +7375,21 @@
       </p:sp>
       <p:sp>
         <p:nvSpPr>
-          <p:cNvPr id="12" name="profile-116">
-            <a:extLst xmlns:a="http://schemas.openxmlformats.org/drawingml/2006/main">
-              <a:ext uri="{FF2B5EF4-FFF2-40B4-BE49-F238E27FC236}">
-                <a16:creationId xmlns:a16="http://schemas.microsoft.com/office/drawing/2014/main" id="{84DDD6CC-7669-41A7-A7D8-2E241528C776}"/>
-              </a:ext>
-            </a:extLst>
-          </p:cNvPr>
-          <p:cNvSpPr>
-            <a:spLocks xmlns:a="http://schemas.openxmlformats.org/drawingml/2006/main" noGrp="1"/>
-          </p:cNvSpPr>
-          <p:nvPr/>
-        </p:nvSpPr>
-        <p:spPr>
-          <a:xfrm xmlns:a="http://schemas.openxmlformats.org/drawingml/2006/main">
-            <a:off x="419100" y="7223379"/>
+          <p:cNvPr id="12" name="profile-109">
+            <a:extLst xmlns:a="http://schemas.openxmlformats.org/drawingml/2006/main">
+              <a:ext uri="{FF2B5EF4-FFF2-40B4-BE49-F238E27FC236}">
+                <a16:creationId xmlns:a16="http://schemas.microsoft.com/office/drawing/2014/main" id="{B8081506-9743-4FF6-8FF7-301DDE3F6377}"/>
+              </a:ext>
+            </a:extLst>
+          </p:cNvPr>
+          <p:cNvSpPr>
+            <a:spLocks xmlns:a="http://schemas.openxmlformats.org/drawingml/2006/main" noGrp="1"/>
+          </p:cNvSpPr>
+          <p:nvPr/>
+        </p:nvSpPr>
+        <p:spPr>
+          <a:xfrm xmlns:a="http://schemas.openxmlformats.org/drawingml/2006/main">
+            <a:off x="419100" y="8094726"/>
             <a:ext cx="47625" cy="47625"/>
           </a:xfrm>
           <a:prstGeom xmlns:a="http://schemas.openxmlformats.org/drawingml/2006/main" prst="rect">
@@ -7851,39 +7405,39 @@
       </p:sp>
       <p:sp>
         <p:nvSpPr>
-          <p:cNvPr id="13" name="profile-117">
-            <a:extLst xmlns:a="http://schemas.openxmlformats.org/drawingml/2006/main">
-              <a:ext uri="{FF2B5EF4-FFF2-40B4-BE49-F238E27FC236}">
-                <a16:creationId xmlns:a16="http://schemas.microsoft.com/office/drawing/2014/main" id="{5144E391-3C55-4D19-8190-38E47444CA00}"/>
-              </a:ext>
-            </a:extLst>
-          </p:cNvPr>
-          <p:cNvSpPr>
-            <a:spLocks xmlns:a="http://schemas.openxmlformats.org/drawingml/2006/main" noGrp="1"/>
-          </p:cNvSpPr>
-          <p:nvPr/>
-        </p:nvSpPr>
-        <p:spPr>
-          <a:xfrm xmlns:a="http://schemas.openxmlformats.org/drawingml/2006/main">
-            <a:off x="600075" y="7147179"/>
-            <a:ext cx="6343650" cy="308229"/>
-          </a:xfrm>
-          <a:prstGeom xmlns:a="http://schemas.openxmlformats.org/drawingml/2006/main" prst="rect">
-            <a:avLst/>
-          </a:prstGeom>
-          <a:noFill xmlns:a="http://schemas.openxmlformats.org/drawingml/2006/main"/>
-          <a:ln xmlns:a="http://schemas.openxmlformats.org/drawingml/2006/main" w="0">
-            <a:noFill/>
-          </a:ln>
-        </p:spPr>
-        <p:txBody>
-          <a:bodyPr xmlns:a="http://schemas.openxmlformats.org/drawingml/2006/main" wrap="none" lIns="0" tIns="0" rIns="0" bIns="0" anchor="t">
-            <a:noAutofit/>
-          </a:bodyPr>
-          <a:lstStyle xmlns:a="http://schemas.openxmlformats.org/drawingml/2006/main"/>
-          <a:p xmlns:a="http://schemas.openxmlformats.org/drawingml/2006/main">
-            <a:pPr algn="l">
-              <a:defRPr sz="1650" b="0">
+          <p:cNvPr id="13" name="profile-110">
+            <a:extLst xmlns:a="http://schemas.openxmlformats.org/drawingml/2006/main">
+              <a:ext uri="{FF2B5EF4-FFF2-40B4-BE49-F238E27FC236}">
+                <a16:creationId xmlns:a16="http://schemas.microsoft.com/office/drawing/2014/main" id="{7D195609-5D0B-4BF4-AE99-F3F793B5CDEA}"/>
+              </a:ext>
+            </a:extLst>
+          </p:cNvPr>
+          <p:cNvSpPr>
+            <a:spLocks xmlns:a="http://schemas.openxmlformats.org/drawingml/2006/main" noGrp="1"/>
+          </p:cNvSpPr>
+          <p:nvPr/>
+        </p:nvSpPr>
+        <p:spPr>
+          <a:xfrm xmlns:a="http://schemas.openxmlformats.org/drawingml/2006/main">
+            <a:off x="600075" y="8018526"/>
+            <a:ext cx="6343650" cy="255651"/>
+          </a:xfrm>
+          <a:prstGeom xmlns:a="http://schemas.openxmlformats.org/drawingml/2006/main" prst="rect">
+            <a:avLst/>
+          </a:prstGeom>
+          <a:noFill xmlns:a="http://schemas.openxmlformats.org/drawingml/2006/main"/>
+          <a:ln xmlns:a="http://schemas.openxmlformats.org/drawingml/2006/main" w="0">
+            <a:noFill/>
+          </a:ln>
+        </p:spPr>
+        <p:txBody>
+          <a:bodyPr xmlns:a="http://schemas.openxmlformats.org/drawingml/2006/main" wrap="none" lIns="0" tIns="0" rIns="0" bIns="0" anchor="t">
+            <a:noAutofit/>
+          </a:bodyPr>
+          <a:lstStyle xmlns:a="http://schemas.openxmlformats.org/drawingml/2006/main"/>
+          <a:p xmlns:a="http://schemas.openxmlformats.org/drawingml/2006/main">
+            <a:pPr algn="l">
+              <a:defRPr sz="1350" b="0">
                 <a:solidFill>
                   <a:srgbClr val="FFFFFF"/>
                 </a:solidFill>
@@ -7893,7 +7447,7 @@
               </a:defRPr>
             </a:pPr>
             <a:r>
-              <a:rPr sz="1650" b="0">
+              <a:rPr sz="1350" b="0">
                 <a:solidFill>
                   <a:srgbClr val="FFFFFF"/>
                 </a:solidFill>
@@ -7908,21 +7462,21 @@
       </p:sp>
       <p:sp>
         <p:nvSpPr>
-          <p:cNvPr id="14" name="profile-118">
-            <a:extLst xmlns:a="http://schemas.openxmlformats.org/drawingml/2006/main">
-              <a:ext uri="{FF2B5EF4-FFF2-40B4-BE49-F238E27FC236}">
-                <a16:creationId xmlns:a16="http://schemas.microsoft.com/office/drawing/2014/main" id="{884E8332-D901-43BC-B0D2-F1772D38685D}"/>
-              </a:ext>
-            </a:extLst>
-          </p:cNvPr>
-          <p:cNvSpPr>
-            <a:spLocks xmlns:a="http://schemas.openxmlformats.org/drawingml/2006/main" noGrp="1"/>
-          </p:cNvSpPr>
-          <p:nvPr/>
-        </p:nvSpPr>
-        <p:spPr>
-          <a:xfrm xmlns:a="http://schemas.openxmlformats.org/drawingml/2006/main">
-            <a:off x="419100" y="7760208"/>
+          <p:cNvPr id="14" name="profile-111">
+            <a:extLst xmlns:a="http://schemas.openxmlformats.org/drawingml/2006/main">
+              <a:ext uri="{FF2B5EF4-FFF2-40B4-BE49-F238E27FC236}">
+                <a16:creationId xmlns:a16="http://schemas.microsoft.com/office/drawing/2014/main" id="{1CB74970-DDB2-4AB7-98AD-0F4503ED692F}"/>
+              </a:ext>
+            </a:extLst>
+          </p:cNvPr>
+          <p:cNvSpPr>
+            <a:spLocks xmlns:a="http://schemas.openxmlformats.org/drawingml/2006/main" noGrp="1"/>
+          </p:cNvSpPr>
+          <p:nvPr/>
+        </p:nvSpPr>
+        <p:spPr>
+          <a:xfrm xmlns:a="http://schemas.openxmlformats.org/drawingml/2006/main">
+            <a:off x="419100" y="8464677"/>
             <a:ext cx="47625" cy="47625"/>
           </a:xfrm>
           <a:prstGeom xmlns:a="http://schemas.openxmlformats.org/drawingml/2006/main" prst="rect">
@@ -7938,39 +7492,39 @@
       </p:sp>
       <p:sp>
         <p:nvSpPr>
-          <p:cNvPr id="15" name="profile-119">
-            <a:extLst xmlns:a="http://schemas.openxmlformats.org/drawingml/2006/main">
-              <a:ext uri="{FF2B5EF4-FFF2-40B4-BE49-F238E27FC236}">
-                <a16:creationId xmlns:a16="http://schemas.microsoft.com/office/drawing/2014/main" id="{B035EEA7-53C5-4C9E-85E2-E304142A95F8}"/>
-              </a:ext>
-            </a:extLst>
-          </p:cNvPr>
-          <p:cNvSpPr>
-            <a:spLocks xmlns:a="http://schemas.openxmlformats.org/drawingml/2006/main" noGrp="1"/>
-          </p:cNvSpPr>
-          <p:nvPr/>
-        </p:nvSpPr>
-        <p:spPr>
-          <a:xfrm xmlns:a="http://schemas.openxmlformats.org/drawingml/2006/main">
-            <a:off x="600075" y="7684008"/>
-            <a:ext cx="6343650" cy="308229"/>
-          </a:xfrm>
-          <a:prstGeom xmlns:a="http://schemas.openxmlformats.org/drawingml/2006/main" prst="rect">
-            <a:avLst/>
-          </a:prstGeom>
-          <a:noFill xmlns:a="http://schemas.openxmlformats.org/drawingml/2006/main"/>
-          <a:ln xmlns:a="http://schemas.openxmlformats.org/drawingml/2006/main" w="0">
-            <a:noFill/>
-          </a:ln>
-        </p:spPr>
-        <p:txBody>
-          <a:bodyPr xmlns:a="http://schemas.openxmlformats.org/drawingml/2006/main" wrap="none" lIns="0" tIns="0" rIns="0" bIns="0" anchor="t">
-            <a:noAutofit/>
-          </a:bodyPr>
-          <a:lstStyle xmlns:a="http://schemas.openxmlformats.org/drawingml/2006/main"/>
-          <a:p xmlns:a="http://schemas.openxmlformats.org/drawingml/2006/main">
-            <a:pPr algn="l">
-              <a:defRPr sz="1650" b="0">
+          <p:cNvPr id="15" name="profile-112">
+            <a:extLst xmlns:a="http://schemas.openxmlformats.org/drawingml/2006/main">
+              <a:ext uri="{FF2B5EF4-FFF2-40B4-BE49-F238E27FC236}">
+                <a16:creationId xmlns:a16="http://schemas.microsoft.com/office/drawing/2014/main" id="{DE13FE02-CB94-4909-A119-1141F0AE331A}"/>
+              </a:ext>
+            </a:extLst>
+          </p:cNvPr>
+          <p:cNvSpPr>
+            <a:spLocks xmlns:a="http://schemas.openxmlformats.org/drawingml/2006/main" noGrp="1"/>
+          </p:cNvSpPr>
+          <p:nvPr/>
+        </p:nvSpPr>
+        <p:spPr>
+          <a:xfrm xmlns:a="http://schemas.openxmlformats.org/drawingml/2006/main">
+            <a:off x="600075" y="8388477"/>
+            <a:ext cx="6343650" cy="255651"/>
+          </a:xfrm>
+          <a:prstGeom xmlns:a="http://schemas.openxmlformats.org/drawingml/2006/main" prst="rect">
+            <a:avLst/>
+          </a:prstGeom>
+          <a:noFill xmlns:a="http://schemas.openxmlformats.org/drawingml/2006/main"/>
+          <a:ln xmlns:a="http://schemas.openxmlformats.org/drawingml/2006/main" w="0">
+            <a:noFill/>
+          </a:ln>
+        </p:spPr>
+        <p:txBody>
+          <a:bodyPr xmlns:a="http://schemas.openxmlformats.org/drawingml/2006/main" wrap="none" lIns="0" tIns="0" rIns="0" bIns="0" anchor="t">
+            <a:noAutofit/>
+          </a:bodyPr>
+          <a:lstStyle xmlns:a="http://schemas.openxmlformats.org/drawingml/2006/main"/>
+          <a:p xmlns:a="http://schemas.openxmlformats.org/drawingml/2006/main">
+            <a:pPr algn="l">
+              <a:defRPr sz="1350" b="0">
                 <a:solidFill>
                   <a:srgbClr val="FFFFFF"/>
                 </a:solidFill>
@@ -7980,7 +7534,7 @@
               </a:defRPr>
             </a:pPr>
             <a:r>
-              <a:rPr sz="1650" b="0">
+              <a:rPr sz="1350" b="0">
                 <a:solidFill>
                   <a:srgbClr val="FFFFFF"/>
                 </a:solidFill>
@@ -7995,26 +7549,26 @@
       </p:sp>
       <p:sp>
         <p:nvSpPr>
-          <p:cNvPr id="16" name="profile-120">
-            <a:extLst xmlns:a="http://schemas.openxmlformats.org/drawingml/2006/main">
-              <a:ext uri="{FF2B5EF4-FFF2-40B4-BE49-F238E27FC236}">
-                <a16:creationId xmlns:a16="http://schemas.microsoft.com/office/drawing/2014/main" id="{FCFC5231-ED03-4CF8-8FD0-7B8E55EEB9CD}"/>
-              </a:ext>
-            </a:extLst>
-          </p:cNvPr>
-          <p:cNvSpPr>
-            <a:spLocks xmlns:a="http://schemas.openxmlformats.org/drawingml/2006/main" noGrp="1"/>
-          </p:cNvSpPr>
-          <p:nvPr/>
-        </p:nvSpPr>
-        <p:spPr>
-          <a:xfrm xmlns:a="http://schemas.openxmlformats.org/drawingml/2006/main">
-            <a:off x="0" y="8715375"/>
-            <a:ext cx="400050" cy="933450"/>
+          <p:cNvPr id="16" name="profile-113">
+            <a:extLst xmlns:a="http://schemas.openxmlformats.org/drawingml/2006/main">
+              <a:ext uri="{FF2B5EF4-FFF2-40B4-BE49-F238E27FC236}">
+                <a16:creationId xmlns:a16="http://schemas.microsoft.com/office/drawing/2014/main" id="{D9DA8EF3-F0B4-42F1-8296-CADCCDC2AC60}"/>
+              </a:ext>
+            </a:extLst>
+          </p:cNvPr>
+          <p:cNvSpPr>
+            <a:spLocks xmlns:a="http://schemas.openxmlformats.org/drawingml/2006/main" noGrp="1"/>
+          </p:cNvSpPr>
+          <p:nvPr/>
+        </p:nvSpPr>
+        <p:spPr>
+          <a:xfrm xmlns:a="http://schemas.openxmlformats.org/drawingml/2006/main">
+            <a:off x="0" y="9058275"/>
+            <a:ext cx="400050" cy="666750"/>
           </a:xfrm>
           <a:custGeom xmlns:a="http://schemas.openxmlformats.org/drawingml/2006/main">
             <a:pathLst>
-              <a:path w="400050" h="933450">
+              <a:path w="400050" h="666750">
                 <a:moveTo>
                   <a:pt x="0" y="0"/>
                 </a:moveTo>
@@ -8022,10 +7576,10 @@
                   <a:pt x="400050" y="0"/>
                 </a:lnTo>
                 <a:lnTo>
-                  <a:pt x="171450" y="933450"/>
+                  <a:pt x="171450" y="666750"/>
                 </a:lnTo>
                 <a:lnTo>
-                  <a:pt x="0" y="933450"/>
+                  <a:pt x="0" y="666750"/>
                 </a:lnTo>
                 <a:close/>
               </a:path>
@@ -8041,39 +7595,39 @@
       </p:sp>
       <p:sp>
         <p:nvSpPr>
-          <p:cNvPr id="17" name="profile-121">
-            <a:extLst xmlns:a="http://schemas.openxmlformats.org/drawingml/2006/main">
-              <a:ext uri="{FF2B5EF4-FFF2-40B4-BE49-F238E27FC236}">
-                <a16:creationId xmlns:a16="http://schemas.microsoft.com/office/drawing/2014/main" id="{843F110A-E94E-409D-8BC8-56181C5353F5}"/>
-              </a:ext>
-            </a:extLst>
-          </p:cNvPr>
-          <p:cNvSpPr>
-            <a:spLocks xmlns:a="http://schemas.openxmlformats.org/drawingml/2006/main" noGrp="1"/>
-          </p:cNvSpPr>
-          <p:nvPr/>
-        </p:nvSpPr>
-        <p:spPr>
-          <a:xfrm xmlns:a="http://schemas.openxmlformats.org/drawingml/2006/main">
-            <a:off x="571500" y="8915400"/>
-            <a:ext cx="6410325" cy="276225"/>
-          </a:xfrm>
-          <a:prstGeom xmlns:a="http://schemas.openxmlformats.org/drawingml/2006/main" prst="rect">
-            <a:avLst/>
-          </a:prstGeom>
-          <a:noFill xmlns:a="http://schemas.openxmlformats.org/drawingml/2006/main"/>
-          <a:ln xmlns:a="http://schemas.openxmlformats.org/drawingml/2006/main" w="0">
-            <a:noFill/>
-          </a:ln>
-        </p:spPr>
-        <p:txBody>
-          <a:bodyPr xmlns:a="http://schemas.openxmlformats.org/drawingml/2006/main" wrap="none" lIns="0" tIns="0" rIns="0" bIns="0" anchor="t">
-            <a:noAutofit/>
-          </a:bodyPr>
-          <a:lstStyle xmlns:a="http://schemas.openxmlformats.org/drawingml/2006/main"/>
-          <a:p xmlns:a="http://schemas.openxmlformats.org/drawingml/2006/main">
-            <a:pPr algn="l">
-              <a:defRPr sz="1350" b="0">
+          <p:cNvPr id="17" name="profile-114">
+            <a:extLst xmlns:a="http://schemas.openxmlformats.org/drawingml/2006/main">
+              <a:ext uri="{FF2B5EF4-FFF2-40B4-BE49-F238E27FC236}">
+                <a16:creationId xmlns:a16="http://schemas.microsoft.com/office/drawing/2014/main" id="{C603432A-8221-4A74-80ED-0178BB1C0B75}"/>
+              </a:ext>
+            </a:extLst>
+          </p:cNvPr>
+          <p:cNvSpPr>
+            <a:spLocks xmlns:a="http://schemas.openxmlformats.org/drawingml/2006/main" noGrp="1"/>
+          </p:cNvSpPr>
+          <p:nvPr/>
+        </p:nvSpPr>
+        <p:spPr>
+          <a:xfrm xmlns:a="http://schemas.openxmlformats.org/drawingml/2006/main">
+            <a:off x="571500" y="9182100"/>
+            <a:ext cx="6410325" cy="247650"/>
+          </a:xfrm>
+          <a:prstGeom xmlns:a="http://schemas.openxmlformats.org/drawingml/2006/main" prst="rect">
+            <a:avLst/>
+          </a:prstGeom>
+          <a:noFill xmlns:a="http://schemas.openxmlformats.org/drawingml/2006/main"/>
+          <a:ln xmlns:a="http://schemas.openxmlformats.org/drawingml/2006/main" w="0">
+            <a:noFill/>
+          </a:ln>
+        </p:spPr>
+        <p:txBody>
+          <a:bodyPr xmlns:a="http://schemas.openxmlformats.org/drawingml/2006/main" wrap="none" lIns="0" tIns="0" rIns="0" bIns="0" anchor="t">
+            <a:noAutofit/>
+          </a:bodyPr>
+          <a:lstStyle xmlns:a="http://schemas.openxmlformats.org/drawingml/2006/main"/>
+          <a:p xmlns:a="http://schemas.openxmlformats.org/drawingml/2006/main">
+            <a:pPr algn="l">
+              <a:defRPr sz="1200" b="0">
                 <a:solidFill>
                   <a:srgbClr val="0B1B33"/>
                 </a:solidFill>
@@ -8083,7 +7637,7 @@
               </a:defRPr>
             </a:pPr>
             <a:r>
-              <a:rPr sz="1350" b="0">
+              <a:rPr sz="1200" b="0">
                 <a:solidFill>
                   <a:srgbClr val="0B1B33"/>
                 </a:solidFill>
@@ -8091,46 +7645,46 @@
                 <a:ea typeface="Arial"/>
                 <a:cs typeface="Arial"/>
               </a:rPr>
-              <a:t>The treatment scope, service schedule and specialist requirements are confirmed</a:t>
-            </a:r>
-          </a:p>
-        </p:txBody>
-      </p:sp>
-      <p:sp>
-        <p:nvSpPr>
-          <p:cNvPr id="18" name="profile-122">
-            <a:extLst xmlns:a="http://schemas.openxmlformats.org/drawingml/2006/main">
-              <a:ext uri="{FF2B5EF4-FFF2-40B4-BE49-F238E27FC236}">
-                <a16:creationId xmlns:a16="http://schemas.microsoft.com/office/drawing/2014/main" id="{F3D1419D-8658-44B0-805F-A4EBE5B5116F}"/>
-              </a:ext>
-            </a:extLst>
-          </p:cNvPr>
-          <p:cNvSpPr>
-            <a:spLocks xmlns:a="http://schemas.openxmlformats.org/drawingml/2006/main" noGrp="1"/>
-          </p:cNvSpPr>
-          <p:nvPr/>
-        </p:nvSpPr>
-        <p:spPr>
-          <a:xfrm xmlns:a="http://schemas.openxmlformats.org/drawingml/2006/main">
-            <a:off x="571500" y="9172575"/>
-            <a:ext cx="6410325" cy="276225"/>
-          </a:xfrm>
-          <a:prstGeom xmlns:a="http://schemas.openxmlformats.org/drawingml/2006/main" prst="rect">
-            <a:avLst/>
-          </a:prstGeom>
-          <a:noFill xmlns:a="http://schemas.openxmlformats.org/drawingml/2006/main"/>
-          <a:ln xmlns:a="http://schemas.openxmlformats.org/drawingml/2006/main" w="0">
-            <a:noFill/>
-          </a:ln>
-        </p:spPr>
-        <p:txBody>
-          <a:bodyPr xmlns:a="http://schemas.openxmlformats.org/drawingml/2006/main" wrap="none" lIns="0" tIns="0" rIns="0" bIns="0" anchor="t">
-            <a:noAutofit/>
-          </a:bodyPr>
-          <a:lstStyle xmlns:a="http://schemas.openxmlformats.org/drawingml/2006/main"/>
-          <a:p xmlns:a="http://schemas.openxmlformats.org/drawingml/2006/main">
-            <a:pPr algn="l">
-              <a:defRPr sz="1350" b="0">
+              <a:t>The treatment scope, service schedule and specialist requirements are confirmed after</a:t>
+            </a:r>
+          </a:p>
+        </p:txBody>
+      </p:sp>
+      <p:sp>
+        <p:nvSpPr>
+          <p:cNvPr id="18" name="profile-115">
+            <a:extLst xmlns:a="http://schemas.openxmlformats.org/drawingml/2006/main">
+              <a:ext uri="{FF2B5EF4-FFF2-40B4-BE49-F238E27FC236}">
+                <a16:creationId xmlns:a16="http://schemas.microsoft.com/office/drawing/2014/main" id="{F526376E-DDF2-4AB6-9468-F17FBB7A9871}"/>
+              </a:ext>
+            </a:extLst>
+          </p:cNvPr>
+          <p:cNvSpPr>
+            <a:spLocks xmlns:a="http://schemas.openxmlformats.org/drawingml/2006/main" noGrp="1"/>
+          </p:cNvSpPr>
+          <p:nvPr/>
+        </p:nvSpPr>
+        <p:spPr>
+          <a:xfrm xmlns:a="http://schemas.openxmlformats.org/drawingml/2006/main">
+            <a:off x="571500" y="9410700"/>
+            <a:ext cx="6410325" cy="247650"/>
+          </a:xfrm>
+          <a:prstGeom xmlns:a="http://schemas.openxmlformats.org/drawingml/2006/main" prst="rect">
+            <a:avLst/>
+          </a:prstGeom>
+          <a:noFill xmlns:a="http://schemas.openxmlformats.org/drawingml/2006/main"/>
+          <a:ln xmlns:a="http://schemas.openxmlformats.org/drawingml/2006/main" w="0">
+            <a:noFill/>
+          </a:ln>
+        </p:spPr>
+        <p:txBody>
+          <a:bodyPr xmlns:a="http://schemas.openxmlformats.org/drawingml/2006/main" wrap="none" lIns="0" tIns="0" rIns="0" bIns="0" anchor="t">
+            <a:noAutofit/>
+          </a:bodyPr>
+          <a:lstStyle xmlns:a="http://schemas.openxmlformats.org/drawingml/2006/main"/>
+          <a:p xmlns:a="http://schemas.openxmlformats.org/drawingml/2006/main">
+            <a:pPr algn="l">
+              <a:defRPr sz="1200" b="0">
                 <a:solidFill>
                   <a:srgbClr val="0B1B33"/>
                 </a:solidFill>
@@ -8140,7 +7694,7 @@
               </a:defRPr>
             </a:pPr>
             <a:r>
-              <a:rPr sz="1350" b="0">
+              <a:rPr sz="1200" b="0">
                 <a:solidFill>
                   <a:srgbClr val="0B1B33"/>
                 </a:solidFill>
@@ -8148,17 +7702,17 @@
                 <a:ea typeface="Arial"/>
                 <a:cs typeface="Arial"/>
               </a:rPr>
-              <a:t>after assessment.</a:t>
-            </a:r>
-          </a:p>
-        </p:txBody>
-      </p:sp>
-      <p:sp>
-        <p:nvSpPr>
-          <p:cNvPr id="19" name="profile-123">
-            <a:extLst xmlns:a="http://schemas.openxmlformats.org/drawingml/2006/main">
-              <a:ext uri="{FF2B5EF4-FFF2-40B4-BE49-F238E27FC236}">
-                <a16:creationId xmlns:a16="http://schemas.microsoft.com/office/drawing/2014/main" id="{51A26AFC-6B85-4923-BE0A-F988A21F92B4}"/>
+              <a:t>assessment.</a:t>
+            </a:r>
+          </a:p>
+        </p:txBody>
+      </p:sp>
+      <p:sp>
+        <p:nvSpPr>
+          <p:cNvPr id="19" name="profile-116">
+            <a:extLst xmlns:a="http://schemas.openxmlformats.org/drawingml/2006/main">
+              <a:ext uri="{FF2B5EF4-FFF2-40B4-BE49-F238E27FC236}">
+                <a16:creationId xmlns:a16="http://schemas.microsoft.com/office/drawing/2014/main" id="{EA45A23E-1991-4A85-8AF2-7A08216A5FAB}"/>
               </a:ext>
             </a:extLst>
           </p:cNvPr>
@@ -8185,10 +7739,10 @@
       </p:sp>
       <p:sp>
         <p:nvSpPr>
-          <p:cNvPr id="20" name="profile-124">
-            <a:extLst xmlns:a="http://schemas.openxmlformats.org/drawingml/2006/main">
-              <a:ext uri="{FF2B5EF4-FFF2-40B4-BE49-F238E27FC236}">
-                <a16:creationId xmlns:a16="http://schemas.microsoft.com/office/drawing/2014/main" id="{37B2138C-2F8B-43D5-97B9-89CF228C064C}"/>
+          <p:cNvPr id="20" name="profile-117">
+            <a:extLst xmlns:a="http://schemas.openxmlformats.org/drawingml/2006/main">
+              <a:ext uri="{FF2B5EF4-FFF2-40B4-BE49-F238E27FC236}">
+                <a16:creationId xmlns:a16="http://schemas.microsoft.com/office/drawing/2014/main" id="{42D057A4-FA56-4B63-A56F-94A2AC8D5143}"/>
               </a:ext>
             </a:extLst>
           </p:cNvPr>
@@ -8231,10 +7785,10 @@
       </p:sp>
       <p:sp>
         <p:nvSpPr>
-          <p:cNvPr id="21" name="profile-125">
-            <a:extLst xmlns:a="http://schemas.openxmlformats.org/drawingml/2006/main">
-              <a:ext uri="{FF2B5EF4-FFF2-40B4-BE49-F238E27FC236}">
-                <a16:creationId xmlns:a16="http://schemas.microsoft.com/office/drawing/2014/main" id="{3442981B-8024-445B-939E-F95418CF2A8D}"/>
+          <p:cNvPr id="21" name="profile-118">
+            <a:extLst xmlns:a="http://schemas.openxmlformats.org/drawingml/2006/main">
+              <a:ext uri="{FF2B5EF4-FFF2-40B4-BE49-F238E27FC236}">
+                <a16:creationId xmlns:a16="http://schemas.microsoft.com/office/drawing/2014/main" id="{811321C5-5AC7-488C-8B33-ABD40A75FB9A}"/>
               </a:ext>
             </a:extLst>
           </p:cNvPr>
@@ -8288,10 +7842,10 @@
       </p:sp>
       <p:sp>
         <p:nvSpPr>
-          <p:cNvPr id="22" name="profile-126">
-            <a:extLst xmlns:a="http://schemas.openxmlformats.org/drawingml/2006/main">
-              <a:ext uri="{FF2B5EF4-FFF2-40B4-BE49-F238E27FC236}">
-                <a16:creationId xmlns:a16="http://schemas.microsoft.com/office/drawing/2014/main" id="{B0920589-DA6F-4FCB-ABF1-3E2C33FA2FD0}"/>
+          <p:cNvPr id="22" name="profile-119">
+            <a:extLst xmlns:a="http://schemas.openxmlformats.org/drawingml/2006/main">
+              <a:ext uri="{FF2B5EF4-FFF2-40B4-BE49-F238E27FC236}">
+                <a16:creationId xmlns:a16="http://schemas.microsoft.com/office/drawing/2014/main" id="{5A3C1AD5-C49B-42A4-801D-6A16E36B53DE}"/>
               </a:ext>
             </a:extLst>
           </p:cNvPr>
@@ -8345,10 +7899,10 @@
       </p:sp>
       <p:sp>
         <p:nvSpPr>
-          <p:cNvPr id="23" name="profile-127">
-            <a:extLst xmlns:a="http://schemas.openxmlformats.org/drawingml/2006/main">
-              <a:ext uri="{FF2B5EF4-FFF2-40B4-BE49-F238E27FC236}">
-                <a16:creationId xmlns:a16="http://schemas.microsoft.com/office/drawing/2014/main" id="{393EE87A-1EBC-4B64-84CD-CA9B92C330D2}"/>
+          <p:cNvPr id="23" name="profile-120">
+            <a:extLst xmlns:a="http://schemas.openxmlformats.org/drawingml/2006/main">
+              <a:ext uri="{FF2B5EF4-FFF2-40B4-BE49-F238E27FC236}">
+                <a16:creationId xmlns:a16="http://schemas.microsoft.com/office/drawing/2014/main" id="{92CEE3C9-6840-4DC3-8A4D-4D1A9BBE60EC}"/>
               </a:ext>
             </a:extLst>
           </p:cNvPr>
@@ -8402,10 +7956,10 @@
       </p:sp>
       <p:sp>
         <p:nvSpPr>
-          <p:cNvPr id="24" name="profile-128">
-            <a:extLst xmlns:a="http://schemas.openxmlformats.org/drawingml/2006/main">
-              <a:ext uri="{FF2B5EF4-FFF2-40B4-BE49-F238E27FC236}">
-                <a16:creationId xmlns:a16="http://schemas.microsoft.com/office/drawing/2014/main" id="{060C4CF3-3047-4752-B555-B5802084C8DC}"/>
+          <p:cNvPr id="24" name="profile-121">
+            <a:extLst xmlns:a="http://schemas.openxmlformats.org/drawingml/2006/main">
+              <a:ext uri="{FF2B5EF4-FFF2-40B4-BE49-F238E27FC236}">
+                <a16:creationId xmlns:a16="http://schemas.microsoft.com/office/drawing/2014/main" id="{DEF0E675-BFD3-4BD8-BC24-7614D5A05196}"/>
               </a:ext>
             </a:extLst>
           </p:cNvPr>
@@ -8460,7 +8014,7 @@
     </p:spTree>
     <p:extLst>
       <p:ext uri="{BB962C8B-B14F-4D97-AF65-F5344CB8AC3E}">
-        <p14:creationId xmlns:p14="http://schemas.microsoft.com/office/powerpoint/2010/main" val="1283753389"/>
+        <p14:creationId xmlns:p14="http://schemas.microsoft.com/office/powerpoint/2010/main" val="357992142"/>
       </p:ext>
     </p:extLst>
   </p:cSld>
@@ -8495,7 +8049,7 @@
           <p:nvPr/>
         </p:nvPicPr>
         <p:blipFill>
-          <a:blip xmlns:r="http://schemas.openxmlformats.org/officeDocument/2006/relationships" xmlns:a="http://schemas.openxmlformats.org/drawingml/2006/main" r:embed="R439711306e1a459c"/>
+          <a:blip xmlns:r="http://schemas.openxmlformats.org/officeDocument/2006/relationships" xmlns:a="http://schemas.openxmlformats.org/drawingml/2006/main" r:embed="R461f7de29cb448ee"/>
           <a:stretch xmlns:a="http://schemas.openxmlformats.org/drawingml/2006/main"/>
         </p:blipFill>
         <p:spPr>
@@ -8510,10 +8064,10 @@
       </p:pic>
       <p:sp>
         <p:nvSpPr>
-          <p:cNvPr id="2" name="profile-129">
-            <a:extLst xmlns:a="http://schemas.openxmlformats.org/drawingml/2006/main">
-              <a:ext uri="{FF2B5EF4-FFF2-40B4-BE49-F238E27FC236}">
-                <a16:creationId xmlns:a16="http://schemas.microsoft.com/office/drawing/2014/main" id="{41C50467-4837-4897-BAD1-C3B11BD383F0}"/>
+          <p:cNvPr id="2" name="profile-122">
+            <a:extLst xmlns:a="http://schemas.openxmlformats.org/drawingml/2006/main">
+              <a:ext uri="{FF2B5EF4-FFF2-40B4-BE49-F238E27FC236}">
+                <a16:creationId xmlns:a16="http://schemas.microsoft.com/office/drawing/2014/main" id="{1F00AE20-4281-4AAF-B1BB-C041CD4E7F7D}"/>
               </a:ext>
             </a:extLst>
           </p:cNvPr>
@@ -8567,10 +8121,10 @@
       </p:sp>
       <p:sp>
         <p:nvSpPr>
-          <p:cNvPr id="3" name="profile-130">
-            <a:extLst xmlns:a="http://schemas.openxmlformats.org/drawingml/2006/main">
-              <a:ext uri="{FF2B5EF4-FFF2-40B4-BE49-F238E27FC236}">
-                <a16:creationId xmlns:a16="http://schemas.microsoft.com/office/drawing/2014/main" id="{8863C003-8374-487A-B355-FBBFEE598974}"/>
+          <p:cNvPr id="3" name="profile-123">
+            <a:extLst xmlns:a="http://schemas.openxmlformats.org/drawingml/2006/main">
+              <a:ext uri="{FF2B5EF4-FFF2-40B4-BE49-F238E27FC236}">
+                <a16:creationId xmlns:a16="http://schemas.microsoft.com/office/drawing/2014/main" id="{6C367F77-4CAE-48C8-AFBB-26DC22D17408}"/>
               </a:ext>
             </a:extLst>
           </p:cNvPr>
@@ -8624,10 +8178,10 @@
       </p:sp>
       <p:sp>
         <p:nvSpPr>
-          <p:cNvPr id="4" name="profile-131">
-            <a:extLst xmlns:a="http://schemas.openxmlformats.org/drawingml/2006/main">
-              <a:ext uri="{FF2B5EF4-FFF2-40B4-BE49-F238E27FC236}">
-                <a16:creationId xmlns:a16="http://schemas.microsoft.com/office/drawing/2014/main" id="{531E2CF8-35B3-4B84-9829-A424AF8B480E}"/>
+          <p:cNvPr id="4" name="profile-124">
+            <a:extLst xmlns:a="http://schemas.openxmlformats.org/drawingml/2006/main">
+              <a:ext uri="{FF2B5EF4-FFF2-40B4-BE49-F238E27FC236}">
+                <a16:creationId xmlns:a16="http://schemas.microsoft.com/office/drawing/2014/main" id="{F6F5A22B-5052-4BB1-8F75-14BBEE14D735}"/>
               </a:ext>
             </a:extLst>
           </p:cNvPr>
@@ -8681,10 +8235,10 @@
       </p:sp>
       <p:sp>
         <p:nvSpPr>
-          <p:cNvPr id="5" name="profile-132">
-            <a:extLst xmlns:a="http://schemas.openxmlformats.org/drawingml/2006/main">
-              <a:ext uri="{FF2B5EF4-FFF2-40B4-BE49-F238E27FC236}">
-                <a16:creationId xmlns:a16="http://schemas.microsoft.com/office/drawing/2014/main" id="{E7F0D83D-098C-48AB-9D66-BF0310E37718}"/>
+          <p:cNvPr id="5" name="profile-125">
+            <a:extLst xmlns:a="http://schemas.openxmlformats.org/drawingml/2006/main">
+              <a:ext uri="{FF2B5EF4-FFF2-40B4-BE49-F238E27FC236}">
+                <a16:creationId xmlns:a16="http://schemas.microsoft.com/office/drawing/2014/main" id="{7E666316-47B5-43D4-844B-AD9D8461C89B}"/>
               </a:ext>
             </a:extLst>
           </p:cNvPr>
@@ -8727,10 +8281,10 @@
       </p:sp>
       <p:sp>
         <p:nvSpPr>
-          <p:cNvPr id="6" name="profile-133">
-            <a:extLst xmlns:a="http://schemas.openxmlformats.org/drawingml/2006/main">
-              <a:ext uri="{FF2B5EF4-FFF2-40B4-BE49-F238E27FC236}">
-                <a16:creationId xmlns:a16="http://schemas.microsoft.com/office/drawing/2014/main" id="{8AA8A2FB-33A5-417E-AE59-81927C3742E6}"/>
+          <p:cNvPr id="6" name="profile-126">
+            <a:extLst xmlns:a="http://schemas.openxmlformats.org/drawingml/2006/main">
+              <a:ext uri="{FF2B5EF4-FFF2-40B4-BE49-F238E27FC236}">
+                <a16:creationId xmlns:a16="http://schemas.microsoft.com/office/drawing/2014/main" id="{E7642CB9-EA2F-4198-A41C-E0AFC62434E4}"/>
               </a:ext>
             </a:extLst>
           </p:cNvPr>
@@ -8784,10 +8338,10 @@
       </p:sp>
       <p:sp>
         <p:nvSpPr>
-          <p:cNvPr id="7" name="profile-134">
-            <a:extLst xmlns:a="http://schemas.openxmlformats.org/drawingml/2006/main">
-              <a:ext uri="{FF2B5EF4-FFF2-40B4-BE49-F238E27FC236}">
-                <a16:creationId xmlns:a16="http://schemas.microsoft.com/office/drawing/2014/main" id="{1168CCE3-CAD6-4F03-AE84-9697378778B8}"/>
+          <p:cNvPr id="7" name="profile-127">
+            <a:extLst xmlns:a="http://schemas.openxmlformats.org/drawingml/2006/main">
+              <a:ext uri="{FF2B5EF4-FFF2-40B4-BE49-F238E27FC236}">
+                <a16:creationId xmlns:a16="http://schemas.microsoft.com/office/drawing/2014/main" id="{090D05AF-A4C5-44C0-BC44-665C56C7C80E}"/>
               </a:ext>
             </a:extLst>
           </p:cNvPr>
@@ -8841,10 +8395,10 @@
       </p:sp>
       <p:sp>
         <p:nvSpPr>
-          <p:cNvPr id="8" name="profile-135">
-            <a:extLst xmlns:a="http://schemas.openxmlformats.org/drawingml/2006/main">
-              <a:ext uri="{FF2B5EF4-FFF2-40B4-BE49-F238E27FC236}">
-                <a16:creationId xmlns:a16="http://schemas.microsoft.com/office/drawing/2014/main" id="{7F23B2F2-FFB8-4FA1-90D2-D509DE17EE34}"/>
+          <p:cNvPr id="8" name="profile-128">
+            <a:extLst xmlns:a="http://schemas.openxmlformats.org/drawingml/2006/main">
+              <a:ext uri="{FF2B5EF4-FFF2-40B4-BE49-F238E27FC236}">
+                <a16:creationId xmlns:a16="http://schemas.microsoft.com/office/drawing/2014/main" id="{37F5BE88-F8C0-4BB3-815F-6EE90BCB4089}"/>
               </a:ext>
             </a:extLst>
           </p:cNvPr>
@@ -8898,10 +8452,10 @@
       </p:sp>
       <p:sp>
         <p:nvSpPr>
-          <p:cNvPr id="9" name="profile-136">
-            <a:extLst xmlns:a="http://schemas.openxmlformats.org/drawingml/2006/main">
-              <a:ext uri="{FF2B5EF4-FFF2-40B4-BE49-F238E27FC236}">
-                <a16:creationId xmlns:a16="http://schemas.microsoft.com/office/drawing/2014/main" id="{AFD3FEFF-FB76-4F79-BE21-A4E15DF809F9}"/>
+          <p:cNvPr id="9" name="profile-129">
+            <a:extLst xmlns:a="http://schemas.openxmlformats.org/drawingml/2006/main">
+              <a:ext uri="{FF2B5EF4-FFF2-40B4-BE49-F238E27FC236}">
+                <a16:creationId xmlns:a16="http://schemas.microsoft.com/office/drawing/2014/main" id="{E4BFEBB1-614C-4360-B119-6CE2125CA7B1}"/>
               </a:ext>
             </a:extLst>
           </p:cNvPr>
@@ -8955,10 +8509,10 @@
       </p:sp>
       <p:sp>
         <p:nvSpPr>
-          <p:cNvPr id="10" name="profile-137">
-            <a:extLst xmlns:a="http://schemas.openxmlformats.org/drawingml/2006/main">
-              <a:ext uri="{FF2B5EF4-FFF2-40B4-BE49-F238E27FC236}">
-                <a16:creationId xmlns:a16="http://schemas.microsoft.com/office/drawing/2014/main" id="{46D729CF-E9DA-4146-86D8-FDB84389B2D2}"/>
+          <p:cNvPr id="10" name="profile-130">
+            <a:extLst xmlns:a="http://schemas.openxmlformats.org/drawingml/2006/main">
+              <a:ext uri="{FF2B5EF4-FFF2-40B4-BE49-F238E27FC236}">
+                <a16:creationId xmlns:a16="http://schemas.microsoft.com/office/drawing/2014/main" id="{6C332771-EDC3-49A2-A57A-F7447E628816}"/>
               </a:ext>
             </a:extLst>
           </p:cNvPr>
@@ -9012,10 +8566,10 @@
       </p:sp>
       <p:sp>
         <p:nvSpPr>
-          <p:cNvPr id="11" name="profile-138">
-            <a:extLst xmlns:a="http://schemas.openxmlformats.org/drawingml/2006/main">
-              <a:ext uri="{FF2B5EF4-FFF2-40B4-BE49-F238E27FC236}">
-                <a16:creationId xmlns:a16="http://schemas.microsoft.com/office/drawing/2014/main" id="{B08CCAD8-C4C0-4055-BB54-F339EC01B049}"/>
+          <p:cNvPr id="11" name="profile-131">
+            <a:extLst xmlns:a="http://schemas.openxmlformats.org/drawingml/2006/main">
+              <a:ext uri="{FF2B5EF4-FFF2-40B4-BE49-F238E27FC236}">
+                <a16:creationId xmlns:a16="http://schemas.microsoft.com/office/drawing/2014/main" id="{D00EC79A-3016-4D60-BEE7-15E6E1281FE3}"/>
               </a:ext>
             </a:extLst>
           </p:cNvPr>
@@ -9069,10 +8623,10 @@
       </p:sp>
       <p:sp>
         <p:nvSpPr>
-          <p:cNvPr id="12" name="profile-139">
-            <a:extLst xmlns:a="http://schemas.openxmlformats.org/drawingml/2006/main">
-              <a:ext uri="{FF2B5EF4-FFF2-40B4-BE49-F238E27FC236}">
-                <a16:creationId xmlns:a16="http://schemas.microsoft.com/office/drawing/2014/main" id="{A91D2333-B910-4910-9ED6-1376B5137302}"/>
+          <p:cNvPr id="12" name="profile-132">
+            <a:extLst xmlns:a="http://schemas.openxmlformats.org/drawingml/2006/main">
+              <a:ext uri="{FF2B5EF4-FFF2-40B4-BE49-F238E27FC236}">
+                <a16:creationId xmlns:a16="http://schemas.microsoft.com/office/drawing/2014/main" id="{0A7A6EAA-EE15-4026-897B-DC86DA845307}"/>
               </a:ext>
             </a:extLst>
           </p:cNvPr>
@@ -9126,10 +8680,10 @@
       </p:sp>
       <p:sp>
         <p:nvSpPr>
-          <p:cNvPr id="13" name="profile-140">
-            <a:extLst xmlns:a="http://schemas.openxmlformats.org/drawingml/2006/main">
-              <a:ext uri="{FF2B5EF4-FFF2-40B4-BE49-F238E27FC236}">
-                <a16:creationId xmlns:a16="http://schemas.microsoft.com/office/drawing/2014/main" id="{7C31D54F-0648-4A1A-A083-D78CE3FBD6A0}"/>
+          <p:cNvPr id="13" name="profile-133">
+            <a:extLst xmlns:a="http://schemas.openxmlformats.org/drawingml/2006/main">
+              <a:ext uri="{FF2B5EF4-FFF2-40B4-BE49-F238E27FC236}">
+                <a16:creationId xmlns:a16="http://schemas.microsoft.com/office/drawing/2014/main" id="{37802D81-5355-423A-B189-47FEA31E8518}"/>
               </a:ext>
             </a:extLst>
           </p:cNvPr>
@@ -9183,10 +8737,10 @@
       </p:sp>
       <p:sp>
         <p:nvSpPr>
-          <p:cNvPr id="14" name="profile-141">
-            <a:extLst xmlns:a="http://schemas.openxmlformats.org/drawingml/2006/main">
-              <a:ext uri="{FF2B5EF4-FFF2-40B4-BE49-F238E27FC236}">
-                <a16:creationId xmlns:a16="http://schemas.microsoft.com/office/drawing/2014/main" id="{BCA73CB8-C33D-40F8-91C6-E4BF2BCF108F}"/>
+          <p:cNvPr id="14" name="profile-134">
+            <a:extLst xmlns:a="http://schemas.openxmlformats.org/drawingml/2006/main">
+              <a:ext uri="{FF2B5EF4-FFF2-40B4-BE49-F238E27FC236}">
+                <a16:creationId xmlns:a16="http://schemas.microsoft.com/office/drawing/2014/main" id="{8C9B6CB3-F8C8-4C9B-904E-0E65C4EFDA1D}"/>
               </a:ext>
             </a:extLst>
           </p:cNvPr>
@@ -9240,10 +8794,10 @@
       </p:sp>
       <p:sp>
         <p:nvSpPr>
-          <p:cNvPr id="15" name="profile-142">
-            <a:extLst xmlns:a="http://schemas.openxmlformats.org/drawingml/2006/main">
-              <a:ext uri="{FF2B5EF4-FFF2-40B4-BE49-F238E27FC236}">
-                <a16:creationId xmlns:a16="http://schemas.microsoft.com/office/drawing/2014/main" id="{0C821D52-BF61-479C-8EA9-06C057487B58}"/>
+          <p:cNvPr id="15" name="profile-135">
+            <a:extLst xmlns:a="http://schemas.openxmlformats.org/drawingml/2006/main">
+              <a:ext uri="{FF2B5EF4-FFF2-40B4-BE49-F238E27FC236}">
+                <a16:creationId xmlns:a16="http://schemas.microsoft.com/office/drawing/2014/main" id="{8FD855D6-642E-4E1C-8BC3-623AEAAF6444}"/>
               </a:ext>
             </a:extLst>
           </p:cNvPr>
@@ -9297,10 +8851,10 @@
       </p:sp>
       <p:sp>
         <p:nvSpPr>
-          <p:cNvPr id="16" name="profile-143">
-            <a:extLst xmlns:a="http://schemas.openxmlformats.org/drawingml/2006/main">
-              <a:ext uri="{FF2B5EF4-FFF2-40B4-BE49-F238E27FC236}">
-                <a16:creationId xmlns:a16="http://schemas.microsoft.com/office/drawing/2014/main" id="{260EA2D8-16FC-47B2-9F0C-E70FE905C01F}"/>
+          <p:cNvPr id="16" name="profile-136">
+            <a:extLst xmlns:a="http://schemas.openxmlformats.org/drawingml/2006/main">
+              <a:ext uri="{FF2B5EF4-FFF2-40B4-BE49-F238E27FC236}">
+                <a16:creationId xmlns:a16="http://schemas.microsoft.com/office/drawing/2014/main" id="{BDEF04FF-0E96-48D4-84DB-0C0FF0144C4B}"/>
               </a:ext>
             </a:extLst>
           </p:cNvPr>
@@ -9354,10 +8908,10 @@
       </p:sp>
       <p:sp>
         <p:nvSpPr>
-          <p:cNvPr id="17" name="profile-144">
-            <a:extLst xmlns:a="http://schemas.openxmlformats.org/drawingml/2006/main">
-              <a:ext uri="{FF2B5EF4-FFF2-40B4-BE49-F238E27FC236}">
-                <a16:creationId xmlns:a16="http://schemas.microsoft.com/office/drawing/2014/main" id="{F508A464-08F1-4B97-8480-F8370A2F22F2}"/>
+          <p:cNvPr id="17" name="profile-137">
+            <a:extLst xmlns:a="http://schemas.openxmlformats.org/drawingml/2006/main">
+              <a:ext uri="{FF2B5EF4-FFF2-40B4-BE49-F238E27FC236}">
+                <a16:creationId xmlns:a16="http://schemas.microsoft.com/office/drawing/2014/main" id="{431D367A-9433-41CD-9BC1-2C4E27CCE04B}"/>
               </a:ext>
             </a:extLst>
           </p:cNvPr>
@@ -9411,10 +8965,10 @@
       </p:sp>
       <p:sp>
         <p:nvSpPr>
-          <p:cNvPr id="18" name="profile-145">
-            <a:extLst xmlns:a="http://schemas.openxmlformats.org/drawingml/2006/main">
-              <a:ext uri="{FF2B5EF4-FFF2-40B4-BE49-F238E27FC236}">
-                <a16:creationId xmlns:a16="http://schemas.microsoft.com/office/drawing/2014/main" id="{29452A34-FDA0-4DD7-9537-2C157D233708}"/>
+          <p:cNvPr id="18" name="profile-138">
+            <a:extLst xmlns:a="http://schemas.openxmlformats.org/drawingml/2006/main">
+              <a:ext uri="{FF2B5EF4-FFF2-40B4-BE49-F238E27FC236}">
+                <a16:creationId xmlns:a16="http://schemas.microsoft.com/office/drawing/2014/main" id="{84E0E7EC-E8EE-4816-A575-77BAD92FDF11}"/>
               </a:ext>
             </a:extLst>
           </p:cNvPr>
@@ -9468,10 +9022,10 @@
       </p:sp>
       <p:sp>
         <p:nvSpPr>
-          <p:cNvPr id="19" name="profile-146">
-            <a:extLst xmlns:a="http://schemas.openxmlformats.org/drawingml/2006/main">
-              <a:ext uri="{FF2B5EF4-FFF2-40B4-BE49-F238E27FC236}">
-                <a16:creationId xmlns:a16="http://schemas.microsoft.com/office/drawing/2014/main" id="{5489D87E-3F5E-401E-ABEC-2F408A0CB84D}"/>
+          <p:cNvPr id="19" name="profile-139">
+            <a:extLst xmlns:a="http://schemas.openxmlformats.org/drawingml/2006/main">
+              <a:ext uri="{FF2B5EF4-FFF2-40B4-BE49-F238E27FC236}">
+                <a16:creationId xmlns:a16="http://schemas.microsoft.com/office/drawing/2014/main" id="{78F33B01-760D-4C51-9AF1-EC8AF60020AE}"/>
               </a:ext>
             </a:extLst>
           </p:cNvPr>
@@ -9525,10 +9079,10 @@
       </p:sp>
       <p:sp>
         <p:nvSpPr>
-          <p:cNvPr id="20" name="profile-147">
-            <a:extLst xmlns:a="http://schemas.openxmlformats.org/drawingml/2006/main">
-              <a:ext uri="{FF2B5EF4-FFF2-40B4-BE49-F238E27FC236}">
-                <a16:creationId xmlns:a16="http://schemas.microsoft.com/office/drawing/2014/main" id="{2763DAF6-F9BB-4214-94BB-E159503E9793}"/>
+          <p:cNvPr id="20" name="profile-140">
+            <a:extLst xmlns:a="http://schemas.openxmlformats.org/drawingml/2006/main">
+              <a:ext uri="{FF2B5EF4-FFF2-40B4-BE49-F238E27FC236}">
+                <a16:creationId xmlns:a16="http://schemas.microsoft.com/office/drawing/2014/main" id="{96024825-95BE-4537-B4EE-6B1E56517192}"/>
               </a:ext>
             </a:extLst>
           </p:cNvPr>
@@ -9582,10 +9136,10 @@
       </p:sp>
       <p:sp>
         <p:nvSpPr>
-          <p:cNvPr id="21" name="profile-148">
-            <a:extLst xmlns:a="http://schemas.openxmlformats.org/drawingml/2006/main">
-              <a:ext uri="{FF2B5EF4-FFF2-40B4-BE49-F238E27FC236}">
-                <a16:creationId xmlns:a16="http://schemas.microsoft.com/office/drawing/2014/main" id="{D6B45D0B-4F6E-4E61-939F-33B387BC63D0}"/>
+          <p:cNvPr id="21" name="profile-141">
+            <a:extLst xmlns:a="http://schemas.openxmlformats.org/drawingml/2006/main">
+              <a:ext uri="{FF2B5EF4-FFF2-40B4-BE49-F238E27FC236}">
+                <a16:creationId xmlns:a16="http://schemas.microsoft.com/office/drawing/2014/main" id="{C08EB7C5-CA3C-4758-8D8A-B87AD99AF8CF}"/>
               </a:ext>
             </a:extLst>
           </p:cNvPr>
@@ -9639,10 +9193,10 @@
       </p:sp>
       <p:sp>
         <p:nvSpPr>
-          <p:cNvPr id="22" name="profile-149">
-            <a:extLst xmlns:a="http://schemas.openxmlformats.org/drawingml/2006/main">
-              <a:ext uri="{FF2B5EF4-FFF2-40B4-BE49-F238E27FC236}">
-                <a16:creationId xmlns:a16="http://schemas.microsoft.com/office/drawing/2014/main" id="{67E523EC-60C4-43DE-91CA-AAFF5A1C4078}"/>
+          <p:cNvPr id="22" name="profile-142">
+            <a:extLst xmlns:a="http://schemas.openxmlformats.org/drawingml/2006/main">
+              <a:ext uri="{FF2B5EF4-FFF2-40B4-BE49-F238E27FC236}">
+                <a16:creationId xmlns:a16="http://schemas.microsoft.com/office/drawing/2014/main" id="{33A77A3F-299D-4D47-A182-1D1905CEC452}"/>
               </a:ext>
             </a:extLst>
           </p:cNvPr>
@@ -9696,10 +9250,10 @@
       </p:sp>
       <p:sp>
         <p:nvSpPr>
-          <p:cNvPr id="23" name="profile-150">
-            <a:extLst xmlns:a="http://schemas.openxmlformats.org/drawingml/2006/main">
-              <a:ext uri="{FF2B5EF4-FFF2-40B4-BE49-F238E27FC236}">
-                <a16:creationId xmlns:a16="http://schemas.microsoft.com/office/drawing/2014/main" id="{41B4A601-8D37-437B-A958-103B64829016}"/>
+          <p:cNvPr id="23" name="profile-143">
+            <a:extLst xmlns:a="http://schemas.openxmlformats.org/drawingml/2006/main">
+              <a:ext uri="{FF2B5EF4-FFF2-40B4-BE49-F238E27FC236}">
+                <a16:creationId xmlns:a16="http://schemas.microsoft.com/office/drawing/2014/main" id="{EE1FCB3A-BA7D-430B-84FF-B3BB6CCE7A42}"/>
               </a:ext>
             </a:extLst>
           </p:cNvPr>
@@ -9753,10 +9307,10 @@
       </p:sp>
       <p:sp>
         <p:nvSpPr>
-          <p:cNvPr id="24" name="profile-151">
-            <a:extLst xmlns:a="http://schemas.openxmlformats.org/drawingml/2006/main">
-              <a:ext uri="{FF2B5EF4-FFF2-40B4-BE49-F238E27FC236}">
-                <a16:creationId xmlns:a16="http://schemas.microsoft.com/office/drawing/2014/main" id="{58816AD2-562B-4F91-A837-9404F354F9D1}"/>
+          <p:cNvPr id="24" name="profile-144">
+            <a:extLst xmlns:a="http://schemas.openxmlformats.org/drawingml/2006/main">
+              <a:ext uri="{FF2B5EF4-FFF2-40B4-BE49-F238E27FC236}">
+                <a16:creationId xmlns:a16="http://schemas.microsoft.com/office/drawing/2014/main" id="{D65C73A4-A896-4C35-A7D4-4772FD42DC0C}"/>
               </a:ext>
             </a:extLst>
           </p:cNvPr>
@@ -9810,10 +9364,10 @@
       </p:sp>
       <p:sp>
         <p:nvSpPr>
-          <p:cNvPr id="25" name="profile-152">
-            <a:extLst xmlns:a="http://schemas.openxmlformats.org/drawingml/2006/main">
-              <a:ext uri="{FF2B5EF4-FFF2-40B4-BE49-F238E27FC236}">
-                <a16:creationId xmlns:a16="http://schemas.microsoft.com/office/drawing/2014/main" id="{251BF507-5D5D-4C6A-9803-34E71B5C0055}"/>
+          <p:cNvPr id="25" name="profile-145">
+            <a:extLst xmlns:a="http://schemas.openxmlformats.org/drawingml/2006/main">
+              <a:ext uri="{FF2B5EF4-FFF2-40B4-BE49-F238E27FC236}">
+                <a16:creationId xmlns:a16="http://schemas.microsoft.com/office/drawing/2014/main" id="{33C6400C-0A4E-4B5D-B6FC-1B5047CE0E67}"/>
               </a:ext>
             </a:extLst>
           </p:cNvPr>
@@ -9867,10 +9421,10 @@
       </p:sp>
       <p:sp>
         <p:nvSpPr>
-          <p:cNvPr id="26" name="profile-153">
-            <a:extLst xmlns:a="http://schemas.openxmlformats.org/drawingml/2006/main">
-              <a:ext uri="{FF2B5EF4-FFF2-40B4-BE49-F238E27FC236}">
-                <a16:creationId xmlns:a16="http://schemas.microsoft.com/office/drawing/2014/main" id="{7ADC4305-FC0F-4924-A201-7606761019B8}"/>
+          <p:cNvPr id="26" name="profile-146">
+            <a:extLst xmlns:a="http://schemas.openxmlformats.org/drawingml/2006/main">
+              <a:ext uri="{FF2B5EF4-FFF2-40B4-BE49-F238E27FC236}">
+                <a16:creationId xmlns:a16="http://schemas.microsoft.com/office/drawing/2014/main" id="{59B14DA5-06C9-4A04-8A33-B0455E6CAE90}"/>
               </a:ext>
             </a:extLst>
           </p:cNvPr>
@@ -9897,10 +9451,10 @@
       </p:sp>
       <p:sp>
         <p:nvSpPr>
-          <p:cNvPr id="27" name="profile-154">
-            <a:extLst xmlns:a="http://schemas.openxmlformats.org/drawingml/2006/main">
-              <a:ext uri="{FF2B5EF4-FFF2-40B4-BE49-F238E27FC236}">
-                <a16:creationId xmlns:a16="http://schemas.microsoft.com/office/drawing/2014/main" id="{4E04F433-E004-4C15-90B3-777C84047A3F}"/>
+          <p:cNvPr id="27" name="profile-147">
+            <a:extLst xmlns:a="http://schemas.openxmlformats.org/drawingml/2006/main">
+              <a:ext uri="{FF2B5EF4-FFF2-40B4-BE49-F238E27FC236}">
+                <a16:creationId xmlns:a16="http://schemas.microsoft.com/office/drawing/2014/main" id="{04C1CD4B-2916-434C-86A2-9DB11C01C751}"/>
               </a:ext>
             </a:extLst>
           </p:cNvPr>
@@ -9954,10 +9508,10 @@
       </p:sp>
       <p:sp>
         <p:nvSpPr>
-          <p:cNvPr id="28" name="profile-155">
-            <a:extLst xmlns:a="http://schemas.openxmlformats.org/drawingml/2006/main">
-              <a:ext uri="{FF2B5EF4-FFF2-40B4-BE49-F238E27FC236}">
-                <a16:creationId xmlns:a16="http://schemas.microsoft.com/office/drawing/2014/main" id="{4A8AF7E8-0D8F-4CE7-A2F0-87B2D4A5C176}"/>
+          <p:cNvPr id="28" name="profile-148">
+            <a:extLst xmlns:a="http://schemas.openxmlformats.org/drawingml/2006/main">
+              <a:ext uri="{FF2B5EF4-FFF2-40B4-BE49-F238E27FC236}">
+                <a16:creationId xmlns:a16="http://schemas.microsoft.com/office/drawing/2014/main" id="{EDF9FF95-6355-44C8-AEB2-E63C1DF505E1}"/>
               </a:ext>
             </a:extLst>
           </p:cNvPr>
@@ -10011,10 +9565,10 @@
       </p:sp>
       <p:sp>
         <p:nvSpPr>
-          <p:cNvPr id="29" name="profile-156">
-            <a:extLst xmlns:a="http://schemas.openxmlformats.org/drawingml/2006/main">
-              <a:ext uri="{FF2B5EF4-FFF2-40B4-BE49-F238E27FC236}">
-                <a16:creationId xmlns:a16="http://schemas.microsoft.com/office/drawing/2014/main" id="{A5A4E373-443B-4B10-8FC1-D025E0FE0DF8}"/>
+          <p:cNvPr id="29" name="profile-149">
+            <a:extLst xmlns:a="http://schemas.openxmlformats.org/drawingml/2006/main">
+              <a:ext uri="{FF2B5EF4-FFF2-40B4-BE49-F238E27FC236}">
+                <a16:creationId xmlns:a16="http://schemas.microsoft.com/office/drawing/2014/main" id="{45381777-AA4E-4D80-9B7F-0EE44506F8D4}"/>
               </a:ext>
             </a:extLst>
           </p:cNvPr>
@@ -10068,10 +9622,10 @@
       </p:sp>
       <p:sp>
         <p:nvSpPr>
-          <p:cNvPr id="30" name="profile-157">
-            <a:extLst xmlns:a="http://schemas.openxmlformats.org/drawingml/2006/main">
-              <a:ext uri="{FF2B5EF4-FFF2-40B4-BE49-F238E27FC236}">
-                <a16:creationId xmlns:a16="http://schemas.microsoft.com/office/drawing/2014/main" id="{A60D65C1-EE77-47C1-B01C-D242583CB3CA}"/>
+          <p:cNvPr id="30" name="profile-150">
+            <a:extLst xmlns:a="http://schemas.openxmlformats.org/drawingml/2006/main">
+              <a:ext uri="{FF2B5EF4-FFF2-40B4-BE49-F238E27FC236}">
+                <a16:creationId xmlns:a16="http://schemas.microsoft.com/office/drawing/2014/main" id="{E4468A6A-5486-4DBB-82A5-E14A4AD75C8D}"/>
               </a:ext>
             </a:extLst>
           </p:cNvPr>
@@ -10125,10 +9679,10 @@
       </p:sp>
       <p:sp>
         <p:nvSpPr>
-          <p:cNvPr id="31" name="profile-158">
-            <a:extLst xmlns:a="http://schemas.openxmlformats.org/drawingml/2006/main">
-              <a:ext uri="{FF2B5EF4-FFF2-40B4-BE49-F238E27FC236}">
-                <a16:creationId xmlns:a16="http://schemas.microsoft.com/office/drawing/2014/main" id="{662C9C7A-5905-4D77-97C8-BB5B17CC3AB2}"/>
+          <p:cNvPr id="31" name="profile-151">
+            <a:extLst xmlns:a="http://schemas.openxmlformats.org/drawingml/2006/main">
+              <a:ext uri="{FF2B5EF4-FFF2-40B4-BE49-F238E27FC236}">
+                <a16:creationId xmlns:a16="http://schemas.microsoft.com/office/drawing/2014/main" id="{6F7C2137-70DC-4737-AF7E-0B28DD8B806C}"/>
               </a:ext>
             </a:extLst>
           </p:cNvPr>
@@ -10155,10 +9709,10 @@
       </p:sp>
       <p:sp>
         <p:nvSpPr>
-          <p:cNvPr id="32" name="profile-159">
-            <a:extLst xmlns:a="http://schemas.openxmlformats.org/drawingml/2006/main">
-              <a:ext uri="{FF2B5EF4-FFF2-40B4-BE49-F238E27FC236}">
-                <a16:creationId xmlns:a16="http://schemas.microsoft.com/office/drawing/2014/main" id="{CD8ED270-A2FF-4F45-936F-AC39F19566E0}"/>
+          <p:cNvPr id="32" name="profile-152">
+            <a:extLst xmlns:a="http://schemas.openxmlformats.org/drawingml/2006/main">
+              <a:ext uri="{FF2B5EF4-FFF2-40B4-BE49-F238E27FC236}">
+                <a16:creationId xmlns:a16="http://schemas.microsoft.com/office/drawing/2014/main" id="{083C6E80-C720-4C15-912D-AA49F6597C99}"/>
               </a:ext>
             </a:extLst>
           </p:cNvPr>
@@ -10212,10 +9766,10 @@
       </p:sp>
       <p:sp>
         <p:nvSpPr>
-          <p:cNvPr id="33" name="profile-160">
-            <a:extLst xmlns:a="http://schemas.openxmlformats.org/drawingml/2006/main">
-              <a:ext uri="{FF2B5EF4-FFF2-40B4-BE49-F238E27FC236}">
-                <a16:creationId xmlns:a16="http://schemas.microsoft.com/office/drawing/2014/main" id="{BA3A3B6A-B534-4E9B-A782-81E68108DED8}"/>
+          <p:cNvPr id="33" name="profile-153">
+            <a:extLst xmlns:a="http://schemas.openxmlformats.org/drawingml/2006/main">
+              <a:ext uri="{FF2B5EF4-FFF2-40B4-BE49-F238E27FC236}">
+                <a16:creationId xmlns:a16="http://schemas.microsoft.com/office/drawing/2014/main" id="{7F4D26D8-37E7-4E5F-AFFC-B04E51C03123}"/>
               </a:ext>
             </a:extLst>
           </p:cNvPr>
@@ -10270,7 +9824,7 @@
     </p:spTree>
     <p:extLst>
       <p:ext uri="{BB962C8B-B14F-4D97-AF65-F5344CB8AC3E}">
-        <p14:creationId xmlns:p14="http://schemas.microsoft.com/office/powerpoint/2010/main" val="630580886"/>
+        <p14:creationId xmlns:p14="http://schemas.microsoft.com/office/powerpoint/2010/main" val="866434541"/>
       </p:ext>
     </p:extLst>
   </p:cSld>
